--- a/dpcn_a2/stats/report/Group24_CSIR.pptx
+++ b/dpcn_a2/stats/report/Group24_CSIR.pptx
@@ -1955,523 +1955,6 @@
 </c:chartSpace>
 </file>
 
-<file path=ppt/charts/chart5.xml><?xml version="1.0" encoding="utf-8"?>
-<c:chartSpace xmlns:c="http://schemas.openxmlformats.org/drawingml/2006/chart" xmlns:a="http://schemas.openxmlformats.org/drawingml/2006/main" xmlns:r="http://schemas.openxmlformats.org/officeDocument/2006/relationships">
-  <c:date1904 val="0"/>
-  <c:chart>
-    <c:title>
-      <c:tx>
-        <c:rich>
-          <a:bodyPr/>
-          <a:lstStyle/>
-          <a:p>
-            <a:r>
-              <a:rPr sz="1300" b="1">
-                <a:solidFill>
-                  <a:srgbClr val="1F2A37"/>
-                </a:solidFill>
-                <a:latin typeface="Calibri"/>
-              </a:rPr>
-              <a:t>In-degree distribution (corpus papers)</a:t>
-            </a:r>
-          </a:p>
-        </c:rich>
-      </c:tx>
-      <c:layout/>
-      <c:overlay val="0"/>
-    </c:title>
-    <c:autoTitleDeleted val="0"/>
-    <c:plotArea>
-      <c:barChart>
-        <c:barDir val="col"/>
-        <c:grouping val="clustered"/>
-        <c:ser>
-          <c:idx val="0"/>
-          <c:order val="0"/>
-          <c:tx>
-            <c:strRef>
-              <c:f>Sheet1!$B$1</c:f>
-              <c:strCache>
-                <c:ptCount val="1"/>
-                <c:pt idx="0">
-                  <c:v>Papers</c:v>
-                </c:pt>
-              </c:strCache>
-            </c:strRef>
-          </c:tx>
-          <c:spPr>
-            <a:solidFill>
-              <a:srgbClr val="14213D"/>
-            </a:solidFill>
-            <a:ln>
-              <a:noFill/>
-            </a:ln>
-          </c:spPr>
-          <c:cat>
-            <c:strRef>
-              <c:f>Sheet1!$A$2:$A$8</c:f>
-              <c:strCache>
-                <c:ptCount val="7"/>
-                <c:pt idx="0">
-                  <c:v>0</c:v>
-                </c:pt>
-                <c:pt idx="1">
-                  <c:v>1</c:v>
-                </c:pt>
-                <c:pt idx="2">
-                  <c:v>2</c:v>
-                </c:pt>
-                <c:pt idx="3">
-                  <c:v>3-5</c:v>
-                </c:pt>
-                <c:pt idx="4">
-                  <c:v>6-10</c:v>
-                </c:pt>
-                <c:pt idx="5">
-                  <c:v>11-20</c:v>
-                </c:pt>
-                <c:pt idx="6">
-                  <c:v>21+</c:v>
-                </c:pt>
-              </c:strCache>
-            </c:strRef>
-          </c:cat>
-          <c:val>
-            <c:numRef>
-              <c:f>Sheet1!$B$2:$B$8</c:f>
-              <c:numCache>
-                <c:formatCode>General</c:formatCode>
-                <c:ptCount val="7"/>
-                <c:pt idx="0">
-                  <c:v>6692</c:v>
-                </c:pt>
-                <c:pt idx="1">
-                  <c:v>2675</c:v>
-                </c:pt>
-                <c:pt idx="2">
-                  <c:v>1543</c:v>
-                </c:pt>
-                <c:pt idx="3">
-                  <c:v>2005</c:v>
-                </c:pt>
-                <c:pt idx="4">
-                  <c:v>995</c:v>
-                </c:pt>
-                <c:pt idx="5">
-                  <c:v>350</c:v>
-                </c:pt>
-                <c:pt idx="6">
-                  <c:v>59</c:v>
-                </c:pt>
-              </c:numCache>
-            </c:numRef>
-          </c:val>
-        </c:ser>
-        <c:dLbls>
-          <c:numFmt formatCode="#,##0" sourceLinked="0"/>
-          <c:txPr>
-            <a:bodyPr/>
-            <a:lstStyle/>
-            <a:p>
-              <a:pPr>
-                <a:defRPr sz="900"/>
-              </a:pPr>
-            </a:p>
-          </c:txPr>
-          <c:dLblPos val="outEnd"/>
-          <c:showLegendKey val="0"/>
-          <c:showVal val="1"/>
-          <c:showCatName val="0"/>
-          <c:showSerName val="0"/>
-          <c:showPercent val="0"/>
-          <c:showBubbleSize val="0"/>
-          <c:showLeaderLines val="1"/>
-        </c:dLbls>
-        <c:gapWidth val="40"/>
-        <c:axId val="-2068027336"/>
-        <c:axId val="-2113994440"/>
-      </c:barChart>
-      <c:catAx>
-        <c:axId val="-2068027336"/>
-        <c:scaling>
-          <c:orientation val="minMax"/>
-        </c:scaling>
-        <c:delete val="0"/>
-        <c:axPos val="b"/>
-        <c:majorTickMark val="out"/>
-        <c:minorTickMark val="none"/>
-        <c:tickLblPos val="nextTo"/>
-        <c:spPr>
-          <a:ln>
-            <a:solidFill>
-              <a:srgbClr val="D5DBE3"/>
-            </a:solidFill>
-          </a:ln>
-        </c:spPr>
-        <c:txPr>
-          <a:bodyPr/>
-          <a:lstStyle/>
-          <a:p>
-            <a:pPr>
-              <a:defRPr sz="1000"/>
-            </a:pPr>
-          </a:p>
-        </c:txPr>
-        <c:crossAx val="-2113994440"/>
-        <c:crosses val="autoZero"/>
-        <c:auto val="1"/>
-        <c:lblAlgn val="ctr"/>
-        <c:lblOffset val="100"/>
-        <c:noMultiLvlLbl val="0"/>
-      </c:catAx>
-      <c:valAx>
-        <c:axId val="-2113994440"/>
-        <c:scaling/>
-        <c:delete val="0"/>
-        <c:axPos val="l"/>
-        <c:majorGridlines>
-          <c:spPr>
-            <a:ln>
-              <a:solidFill>
-                <a:srgbClr val="D5DBE3"/>
-              </a:solidFill>
-            </a:ln>
-          </c:spPr>
-        </c:majorGridlines>
-        <c:numFmt formatCode="#,##0" sourceLinked="0"/>
-        <c:majorTickMark val="out"/>
-        <c:minorTickMark val="none"/>
-        <c:tickLblPos val="nextTo"/>
-        <c:spPr>
-          <a:ln>
-            <a:noFill/>
-          </a:ln>
-        </c:spPr>
-        <c:txPr>
-          <a:bodyPr/>
-          <a:lstStyle/>
-          <a:p>
-            <a:pPr>
-              <a:defRPr sz="1000"/>
-            </a:pPr>
-          </a:p>
-        </c:txPr>
-        <c:crossAx val="-2068027336"/>
-        <c:crosses val="autoZero"/>
-      </c:valAx>
-    </c:plotArea>
-    <c:dispBlanksAs val="gap"/>
-  </c:chart>
-  <c:txPr>
-    <a:bodyPr/>
-    <a:lstStyle/>
-    <a:p>
-      <a:pPr>
-        <a:defRPr sz="1000">
-          <a:solidFill>
-            <a:srgbClr val="5B6776"/>
-          </a:solidFill>
-          <a:latin typeface="Calibri"/>
-        </a:defRPr>
-      </a:pPr>
-      <a:endParaRPr lang="en-US"/>
-    </a:p>
-  </c:txPr>
-  <c:externalData r:id="rId1">
-    <c:autoUpdate val="0"/>
-  </c:externalData>
-</c:chartSpace>
-</file>
-
-<file path=ppt/charts/chart6.xml><?xml version="1.0" encoding="utf-8"?>
-<c:chartSpace xmlns:c="http://schemas.openxmlformats.org/drawingml/2006/chart" xmlns:a="http://schemas.openxmlformats.org/drawingml/2006/main" xmlns:r="http://schemas.openxmlformats.org/officeDocument/2006/relationships">
-  <c:date1904 val="0"/>
-  <c:chart>
-    <c:title>
-      <c:tx>
-        <c:rich>
-          <a:bodyPr/>
-          <a:lstStyle/>
-          <a:p>
-            <a:r>
-              <a:rPr sz="1300" b="1">
-                <a:solidFill>
-                  <a:srgbClr val="1F2A37"/>
-                </a:solidFill>
-                <a:latin typeface="Calibri"/>
-              </a:rPr>
-              <a:t>Largest communities (colour = main lab)</a:t>
-            </a:r>
-          </a:p>
-        </c:rich>
-      </c:tx>
-      <c:layout/>
-      <c:overlay val="0"/>
-    </c:title>
-    <c:autoTitleDeleted val="0"/>
-    <c:plotArea>
-      <c:barChart>
-        <c:barDir val="col"/>
-        <c:grouping val="clustered"/>
-        <c:varyColors val="0"/>
-        <c:ser>
-          <c:idx val="0"/>
-          <c:order val="0"/>
-          <c:tx>
-            <c:strRef>
-              <c:f>Sheet1!$B$1</c:f>
-              <c:strCache>
-                <c:ptCount val="1"/>
-                <c:pt idx="0">
-                  <c:v>Authors</c:v>
-                </c:pt>
-              </c:strCache>
-            </c:strRef>
-          </c:tx>
-          <c:dPt>
-            <c:idx val="0"/>
-            <c:spPr>
-              <a:solidFill>
-                <a:srgbClr val="2E7D32"/>
-              </a:solidFill>
-            </c:spPr>
-          </c:dPt>
-          <c:dPt>
-            <c:idx val="1"/>
-            <c:spPr>
-              <a:solidFill>
-                <a:srgbClr val="2B5C8F"/>
-              </a:solidFill>
-            </c:spPr>
-          </c:dPt>
-          <c:dPt>
-            <c:idx val="2"/>
-            <c:spPr>
-              <a:solidFill>
-                <a:srgbClr val="D95F02"/>
-              </a:solidFill>
-            </c:spPr>
-          </c:dPt>
-          <c:dPt>
-            <c:idx val="3"/>
-            <c:spPr>
-              <a:solidFill>
-                <a:srgbClr val="2E7D32"/>
-              </a:solidFill>
-            </c:spPr>
-          </c:dPt>
-          <c:dPt>
-            <c:idx val="4"/>
-            <c:spPr>
-              <a:solidFill>
-                <a:srgbClr val="D95F02"/>
-              </a:solidFill>
-            </c:spPr>
-          </c:dPt>
-          <c:dPt>
-            <c:idx val="5"/>
-            <c:spPr>
-              <a:solidFill>
-                <a:srgbClr val="2B5C8F"/>
-              </a:solidFill>
-            </c:spPr>
-          </c:dPt>
-          <c:dPt>
-            <c:idx val="6"/>
-            <c:spPr>
-              <a:solidFill>
-                <a:srgbClr val="2E7D32"/>
-              </a:solidFill>
-            </c:spPr>
-          </c:dPt>
-          <c:dPt>
-            <c:idx val="7"/>
-            <c:spPr>
-              <a:solidFill>
-                <a:srgbClr val="2B5C8F"/>
-              </a:solidFill>
-            </c:spPr>
-          </c:dPt>
-          <c:cat>
-            <c:strRef>
-              <c:f>Sheet1!$A$2:$A$9</c:f>
-              <c:strCache>
-                <c:ptCount val="8"/>
-                <c:pt idx="0">
-                  <c:v>C1</c:v>
-                </c:pt>
-                <c:pt idx="1">
-                  <c:v>C2</c:v>
-                </c:pt>
-                <c:pt idx="2">
-                  <c:v>C3</c:v>
-                </c:pt>
-                <c:pt idx="3">
-                  <c:v>C4</c:v>
-                </c:pt>
-                <c:pt idx="4">
-                  <c:v>C5</c:v>
-                </c:pt>
-                <c:pt idx="5">
-                  <c:v>C6</c:v>
-                </c:pt>
-                <c:pt idx="6">
-                  <c:v>C7</c:v>
-                </c:pt>
-                <c:pt idx="7">
-                  <c:v>C8</c:v>
-                </c:pt>
-              </c:strCache>
-            </c:strRef>
-          </c:cat>
-          <c:val>
-            <c:numRef>
-              <c:f>Sheet1!$B$2:$B$9</c:f>
-              <c:numCache>
-                <c:formatCode>General</c:formatCode>
-                <c:ptCount val="8"/>
-                <c:pt idx="0">
-                  <c:v>575</c:v>
-                </c:pt>
-                <c:pt idx="1">
-                  <c:v>513</c:v>
-                </c:pt>
-                <c:pt idx="2">
-                  <c:v>483</c:v>
-                </c:pt>
-                <c:pt idx="3">
-                  <c:v>467</c:v>
-                </c:pt>
-                <c:pt idx="4">
-                  <c:v>459</c:v>
-                </c:pt>
-                <c:pt idx="5">
-                  <c:v>450</c:v>
-                </c:pt>
-                <c:pt idx="6">
-                  <c:v>449</c:v>
-                </c:pt>
-                <c:pt idx="7">
-                  <c:v>375</c:v>
-                </c:pt>
-              </c:numCache>
-            </c:numRef>
-          </c:val>
-        </c:ser>
-        <c:dLbls>
-          <c:txPr>
-            <a:bodyPr/>
-            <a:lstStyle/>
-            <a:p>
-              <a:pPr>
-                <a:defRPr sz="900"/>
-              </a:pPr>
-            </a:p>
-          </c:txPr>
-          <c:dLblPos val="outEnd"/>
-          <c:showLegendKey val="0"/>
-          <c:showVal val="1"/>
-          <c:showCatName val="0"/>
-          <c:showSerName val="0"/>
-          <c:showPercent val="0"/>
-          <c:showBubbleSize val="0"/>
-          <c:showLeaderLines val="1"/>
-        </c:dLbls>
-        <c:gapWidth val="40"/>
-        <c:axId val="-2068027336"/>
-        <c:axId val="-2113994440"/>
-      </c:barChart>
-      <c:catAx>
-        <c:axId val="-2068027336"/>
-        <c:scaling>
-          <c:orientation val="minMax"/>
-        </c:scaling>
-        <c:delete val="0"/>
-        <c:axPos val="b"/>
-        <c:majorTickMark val="out"/>
-        <c:minorTickMark val="none"/>
-        <c:tickLblPos val="nextTo"/>
-        <c:spPr>
-          <a:ln>
-            <a:solidFill>
-              <a:srgbClr val="D5DBE3"/>
-            </a:solidFill>
-          </a:ln>
-        </c:spPr>
-        <c:txPr>
-          <a:bodyPr/>
-          <a:lstStyle/>
-          <a:p>
-            <a:pPr>
-              <a:defRPr sz="1000"/>
-            </a:pPr>
-          </a:p>
-        </c:txPr>
-        <c:crossAx val="-2113994440"/>
-        <c:crosses val="autoZero"/>
-        <c:auto val="1"/>
-        <c:lblAlgn val="ctr"/>
-        <c:lblOffset val="100"/>
-        <c:noMultiLvlLbl val="0"/>
-      </c:catAx>
-      <c:valAx>
-        <c:axId val="-2113994440"/>
-        <c:scaling/>
-        <c:delete val="0"/>
-        <c:axPos val="l"/>
-        <c:majorGridlines>
-          <c:spPr>
-            <a:ln>
-              <a:solidFill>
-                <a:srgbClr val="D5DBE3"/>
-              </a:solidFill>
-            </a:ln>
-          </c:spPr>
-        </c:majorGridlines>
-        <c:majorTickMark val="out"/>
-        <c:minorTickMark val="none"/>
-        <c:tickLblPos val="nextTo"/>
-        <c:spPr>
-          <a:ln>
-            <a:noFill/>
-          </a:ln>
-        </c:spPr>
-        <c:txPr>
-          <a:bodyPr/>
-          <a:lstStyle/>
-          <a:p>
-            <a:pPr>
-              <a:defRPr sz="1000"/>
-            </a:pPr>
-          </a:p>
-        </c:txPr>
-        <c:crossAx val="-2068027336"/>
-        <c:crosses val="autoZero"/>
-      </c:valAx>
-    </c:plotArea>
-    <c:dispBlanksAs val="gap"/>
-  </c:chart>
-  <c:txPr>
-    <a:bodyPr/>
-    <a:lstStyle/>
-    <a:p>
-      <a:pPr>
-        <a:defRPr sz="1000">
-          <a:solidFill>
-            <a:srgbClr val="5B6776"/>
-          </a:solidFill>
-          <a:latin typeface="Calibri"/>
-        </a:defRPr>
-      </a:pPr>
-      <a:endParaRPr lang="en-US"/>
-    </a:p>
-  </c:txPr>
-  <c:externalData r:id="rId1">
-    <c:autoUpdate val="0"/>
-  </c:externalData>
-</c:chartSpace>
-</file>
-
 <file path=ppt/notesMasters/notesMaster1.xml><?xml version="1.0" encoding="utf-8"?>
 <p:notesMaster xmlns:a="http://schemas.openxmlformats.org/drawingml/2006/main" xmlns:p="http://schemas.openxmlformats.org/presentationml/2006/main" xmlns:r="http://schemas.openxmlformats.org/officeDocument/2006/relationships">
   <p:cSld>
@@ -2937,7 +2420,7 @@
           <a:lstStyle/>
           <a:p>
             <a:r>
-              <a:t>Graph: undirected, nodes = authors of the three labs, edge = co-authored &gt;=1 paper (weight = joint papers). Degree = distinct co-authors; betweenness estimated from 1,000 sampled sources (unweighted); communities = Louvain (seed 42) on joint-paper weights. Partner co-authors at other Indian institutions are kept in authorship_network.csv as raw data but not analysed. Sources: stats/tables/network_summary.csv, network_authorship_top_degree.csv, network_authorship_top_betweenness.csv, network_authorship_communities.csv, indian_partner_institutions.csv.</a:t>
+              <a:t>All 10 non-obvious analyses are fully interactive with dedicated charts on the dashboard 'Insights' tab.</a:t>
             </a:r>
           </a:p>
         </p:txBody>
@@ -3497,7 +2980,7 @@
           <a:lstStyle/>
           <a:p>
             <a:r>
-              <a:t>Graph: directed, nodes = corpus papers, edge = A cites B (OpenAlex referenced_works), analysed within the three labs. Sources: stats/tables/network_summary.csv, network_citation_pagerank_top10.csv, network_citation_indegree_distribution.csv, network_citation_flow_matrix.csv, citation_flow_summary.csv. Flow 'Cited by Indian' = citation links from papers involving an Indian institution other than the lab (includes the other two labs and Indian papers outside the corpus).</a:t>
+              <a:t>Graph topology: (1) Citation network: directed in-corpus graph (10,988 nodes, 27,268 links); PageRank computed with damping=0.85; Indian citation flow includes out-of-corpus Indian-affiliated papers. (2) Authorship network: undirected in-corpus co-authorship graph (7,864 nodes); Louvain community detection finds 130 communities; betweenness centrality sampled from 1,000 sources. Sources: stats/tables/network_summary.csv, network_citation_pagerank_top10.csv, network_authorship_top_degree.csv, network_authorship_top_betweenness.csv, citation_flow_summary.csv.</a:t>
             </a:r>
           </a:p>
         </p:txBody>
@@ -7234,7 +6717,7 @@
                 </a:solidFill>
                 <a:latin typeface="Cambria"/>
               </a:rPr>
-              <a:t>Authorship network</a:t>
+              <a:t>Ten Non-Obvious Bibliometric &amp; Network Findings</a:t>
             </a:r>
           </a:p>
         </p:txBody>
@@ -7273,7 +6756,7 @@
                 </a:solidFill>
                 <a:latin typeface="Calibri"/>
               </a:rPr>
-              <a:t>7,864 authors, 35,423 co-author pairs; Louvain finds 130 communities (modularity 0.81), almost all within a single lab</a:t>
+              <a:t>Key empirical findings from cluster network fragility, brain circulation, succession risk, and citation dynamics</a:t>
             </a:r>
           </a:p>
         </p:txBody>
@@ -7317,421 +6800,17 @@
           </a:p>
         </p:txBody>
       </p:sp>
-      <p:sp>
-        <p:nvSpPr>
-          <p:cNvPr id="5" name="Rounded Rectangle 4"/>
-          <p:cNvSpPr/>
-          <p:nvPr/>
-        </p:nvSpPr>
-        <p:spPr>
-          <a:xfrm>
-            <a:off x="502920" y="1463040"/>
-            <a:ext cx="2590724" cy="868680"/>
-          </a:xfrm>
-          <a:prstGeom prst="roundRect">
-            <a:avLst>
-              <a:gd name="adj" fmla="val 8000"/>
-            </a:avLst>
-          </a:prstGeom>
-          <a:solidFill>
-            <a:srgbClr val="F2F4F7"/>
-          </a:solidFill>
-          <a:ln>
-            <a:noFill/>
-          </a:ln>
-          <a:effectLst/>
-        </p:spPr>
-        <p:style>
-          <a:lnRef idx="1">
-            <a:schemeClr val="accent1"/>
-          </a:lnRef>
-          <a:fillRef idx="3">
-            <a:schemeClr val="accent1"/>
-          </a:fillRef>
-          <a:effectRef idx="2">
-            <a:schemeClr val="accent1"/>
-          </a:effectRef>
-          <a:fontRef idx="minor">
-            <a:schemeClr val="lt1"/>
-          </a:fontRef>
-        </p:style>
-        <p:txBody>
-          <a:bodyPr rtlCol="0" anchor="ctr"/>
-          <a:lstStyle/>
-          <a:p>
-            <a:pPr algn="ctr"/>
-          </a:p>
-        </p:txBody>
-      </p:sp>
-      <p:sp>
-        <p:nvSpPr>
-          <p:cNvPr id="6" name="TextBox 5"/>
-          <p:cNvSpPr txBox="1"/>
-          <p:nvPr/>
-        </p:nvSpPr>
-        <p:spPr>
-          <a:xfrm>
-            <a:off x="667512" y="1572768"/>
-            <a:ext cx="2261540" cy="685800"/>
-          </a:xfrm>
-          <a:prstGeom prst="rect">
-            <a:avLst/>
-          </a:prstGeom>
-          <a:noFill/>
-        </p:spPr>
-        <p:txBody>
-          <a:bodyPr wrap="square" anchor="ctr" lIns="0" rIns="0" tIns="0" bIns="0">
-            <a:spAutoFit/>
-          </a:bodyPr>
-          <a:lstStyle/>
-          <a:p>
-            <a:pPr algn="l">
-              <a:spcAft>
-                <a:spcPts val="200"/>
-              </a:spcAft>
-            </a:pPr>
-            <a:r>
-              <a:rPr sz="2200" b="1">
-                <a:solidFill>
-                  <a:srgbClr val="1F2A37"/>
-                </a:solidFill>
-                <a:latin typeface="Calibri"/>
-              </a:rPr>
-              <a:t>7,864</a:t>
-            </a:r>
-          </a:p>
-          <a:p>
-            <a:pPr algn="l">
-              <a:spcAft>
-                <a:spcPts val="200"/>
-              </a:spcAft>
-            </a:pPr>
-            <a:r>
-              <a:rPr sz="1200" b="0">
-                <a:solidFill>
-                  <a:srgbClr val="5B6776"/>
-                </a:solidFill>
-                <a:latin typeface="Calibri"/>
-              </a:rPr>
-              <a:t>authors; 96% in the largest connected component</a:t>
-            </a:r>
-          </a:p>
-        </p:txBody>
-      </p:sp>
-      <p:sp>
-        <p:nvSpPr>
-          <p:cNvPr id="7" name="Rounded Rectangle 6"/>
-          <p:cNvSpPr/>
-          <p:nvPr/>
-        </p:nvSpPr>
-        <p:spPr>
-          <a:xfrm>
-            <a:off x="3367964" y="1463040"/>
-            <a:ext cx="2590724" cy="868680"/>
-          </a:xfrm>
-          <a:prstGeom prst="roundRect">
-            <a:avLst>
-              <a:gd name="adj" fmla="val 8000"/>
-            </a:avLst>
-          </a:prstGeom>
-          <a:solidFill>
-            <a:srgbClr val="F2F4F7"/>
-          </a:solidFill>
-          <a:ln>
-            <a:noFill/>
-          </a:ln>
-          <a:effectLst/>
-        </p:spPr>
-        <p:style>
-          <a:lnRef idx="1">
-            <a:schemeClr val="accent1"/>
-          </a:lnRef>
-          <a:fillRef idx="3">
-            <a:schemeClr val="accent1"/>
-          </a:fillRef>
-          <a:effectRef idx="2">
-            <a:schemeClr val="accent1"/>
-          </a:effectRef>
-          <a:fontRef idx="minor">
-            <a:schemeClr val="lt1"/>
-          </a:fontRef>
-        </p:style>
-        <p:txBody>
-          <a:bodyPr rtlCol="0" anchor="ctr"/>
-          <a:lstStyle/>
-          <a:p>
-            <a:pPr algn="ctr"/>
-          </a:p>
-        </p:txBody>
-      </p:sp>
-      <p:sp>
-        <p:nvSpPr>
-          <p:cNvPr id="8" name="TextBox 7"/>
-          <p:cNvSpPr txBox="1"/>
-          <p:nvPr/>
-        </p:nvSpPr>
-        <p:spPr>
-          <a:xfrm>
-            <a:off x="3532556" y="1572768"/>
-            <a:ext cx="2261540" cy="685800"/>
-          </a:xfrm>
-          <a:prstGeom prst="rect">
-            <a:avLst/>
-          </a:prstGeom>
-          <a:noFill/>
-        </p:spPr>
-        <p:txBody>
-          <a:bodyPr wrap="square" anchor="ctr" lIns="0" rIns="0" tIns="0" bIns="0">
-            <a:spAutoFit/>
-          </a:bodyPr>
-          <a:lstStyle/>
-          <a:p>
-            <a:pPr algn="l">
-              <a:spcAft>
-                <a:spcPts val="200"/>
-              </a:spcAft>
-            </a:pPr>
-            <a:r>
-              <a:rPr sz="2200" b="1">
-                <a:solidFill>
-                  <a:srgbClr val="1F2A37"/>
-                </a:solidFill>
-                <a:latin typeface="Calibri"/>
-              </a:rPr>
-              <a:t>9.0</a:t>
-            </a:r>
-          </a:p>
-          <a:p>
-            <a:pPr algn="l">
-              <a:spcAft>
-                <a:spcPts val="200"/>
-              </a:spcAft>
-            </a:pPr>
-            <a:r>
-              <a:rPr sz="1200" b="0">
-                <a:solidFill>
-                  <a:srgbClr val="5B6776"/>
-                </a:solidFill>
-                <a:latin typeface="Calibri"/>
-              </a:rPr>
-              <a:t>mean number of distinct co-authors</a:t>
-            </a:r>
-          </a:p>
-        </p:txBody>
-      </p:sp>
-      <p:sp>
-        <p:nvSpPr>
-          <p:cNvPr id="9" name="Rounded Rectangle 8"/>
-          <p:cNvSpPr/>
-          <p:nvPr/>
-        </p:nvSpPr>
-        <p:spPr>
-          <a:xfrm>
-            <a:off x="6233008" y="1463040"/>
-            <a:ext cx="2590724" cy="868680"/>
-          </a:xfrm>
-          <a:prstGeom prst="roundRect">
-            <a:avLst>
-              <a:gd name="adj" fmla="val 8000"/>
-            </a:avLst>
-          </a:prstGeom>
-          <a:solidFill>
-            <a:srgbClr val="F2F4F7"/>
-          </a:solidFill>
-          <a:ln>
-            <a:noFill/>
-          </a:ln>
-          <a:effectLst/>
-        </p:spPr>
-        <p:style>
-          <a:lnRef idx="1">
-            <a:schemeClr val="accent1"/>
-          </a:lnRef>
-          <a:fillRef idx="3">
-            <a:schemeClr val="accent1"/>
-          </a:fillRef>
-          <a:effectRef idx="2">
-            <a:schemeClr val="accent1"/>
-          </a:effectRef>
-          <a:fontRef idx="minor">
-            <a:schemeClr val="lt1"/>
-          </a:fontRef>
-        </p:style>
-        <p:txBody>
-          <a:bodyPr rtlCol="0" anchor="ctr"/>
-          <a:lstStyle/>
-          <a:p>
-            <a:pPr algn="ctr"/>
-          </a:p>
-        </p:txBody>
-      </p:sp>
-      <p:sp>
-        <p:nvSpPr>
-          <p:cNvPr id="10" name="TextBox 9"/>
-          <p:cNvSpPr txBox="1"/>
-          <p:nvPr/>
-        </p:nvSpPr>
-        <p:spPr>
-          <a:xfrm>
-            <a:off x="6397600" y="1572768"/>
-            <a:ext cx="2261540" cy="685800"/>
-          </a:xfrm>
-          <a:prstGeom prst="rect">
-            <a:avLst/>
-          </a:prstGeom>
-          <a:noFill/>
-        </p:spPr>
-        <p:txBody>
-          <a:bodyPr wrap="square" anchor="ctr" lIns="0" rIns="0" tIns="0" bIns="0">
-            <a:spAutoFit/>
-          </a:bodyPr>
-          <a:lstStyle/>
-          <a:p>
-            <a:pPr algn="l">
-              <a:spcAft>
-                <a:spcPts val="200"/>
-              </a:spcAft>
-            </a:pPr>
-            <a:r>
-              <a:rPr sz="2200" b="1">
-                <a:solidFill>
-                  <a:srgbClr val="1F2A37"/>
-                </a:solidFill>
-                <a:latin typeface="Calibri"/>
-              </a:rPr>
-              <a:t>130</a:t>
-            </a:r>
-          </a:p>
-          <a:p>
-            <a:pPr algn="l">
-              <a:spcAft>
-                <a:spcPts val="200"/>
-              </a:spcAft>
-            </a:pPr>
-            <a:r>
-              <a:rPr sz="1200" b="0">
-                <a:solidFill>
-                  <a:srgbClr val="5B6776"/>
-                </a:solidFill>
-                <a:latin typeface="Calibri"/>
-              </a:rPr>
-              <a:t>Louvain communities (31 with ≥10 authors)</a:t>
-            </a:r>
-          </a:p>
-        </p:txBody>
-      </p:sp>
-      <p:sp>
-        <p:nvSpPr>
-          <p:cNvPr id="11" name="Rounded Rectangle 10"/>
-          <p:cNvSpPr/>
-          <p:nvPr/>
-        </p:nvSpPr>
-        <p:spPr>
-          <a:xfrm>
-            <a:off x="9098051" y="1463040"/>
-            <a:ext cx="2590724" cy="868680"/>
-          </a:xfrm>
-          <a:prstGeom prst="roundRect">
-            <a:avLst>
-              <a:gd name="adj" fmla="val 8000"/>
-            </a:avLst>
-          </a:prstGeom>
-          <a:solidFill>
-            <a:srgbClr val="F2F4F7"/>
-          </a:solidFill>
-          <a:ln>
-            <a:noFill/>
-          </a:ln>
-          <a:effectLst/>
-        </p:spPr>
-        <p:style>
-          <a:lnRef idx="1">
-            <a:schemeClr val="accent1"/>
-          </a:lnRef>
-          <a:fillRef idx="3">
-            <a:schemeClr val="accent1"/>
-          </a:fillRef>
-          <a:effectRef idx="2">
-            <a:schemeClr val="accent1"/>
-          </a:effectRef>
-          <a:fontRef idx="minor">
-            <a:schemeClr val="lt1"/>
-          </a:fontRef>
-        </p:style>
-        <p:txBody>
-          <a:bodyPr rtlCol="0" anchor="ctr"/>
-          <a:lstStyle/>
-          <a:p>
-            <a:pPr algn="ctr"/>
-          </a:p>
-        </p:txBody>
-      </p:sp>
-      <p:sp>
-        <p:nvSpPr>
-          <p:cNvPr id="12" name="TextBox 11"/>
-          <p:cNvSpPr txBox="1"/>
-          <p:nvPr/>
-        </p:nvSpPr>
-        <p:spPr>
-          <a:xfrm>
-            <a:off x="9262643" y="1572768"/>
-            <a:ext cx="2261540" cy="685800"/>
-          </a:xfrm>
-          <a:prstGeom prst="rect">
-            <a:avLst/>
-          </a:prstGeom>
-          <a:noFill/>
-        </p:spPr>
-        <p:txBody>
-          <a:bodyPr wrap="square" anchor="ctr" lIns="0" rIns="0" tIns="0" bIns="0">
-            <a:spAutoFit/>
-          </a:bodyPr>
-          <a:lstStyle/>
-          <a:p>
-            <a:pPr algn="l">
-              <a:spcAft>
-                <a:spcPts val="200"/>
-              </a:spcAft>
-            </a:pPr>
-            <a:r>
-              <a:rPr sz="2200" b="1">
-                <a:solidFill>
-                  <a:srgbClr val="1F2A37"/>
-                </a:solidFill>
-                <a:latin typeface="Calibri"/>
-              </a:rPr>
-              <a:t>525</a:t>
-            </a:r>
-          </a:p>
-          <a:p>
-            <a:pPr algn="l">
-              <a:spcAft>
-                <a:spcPts val="200"/>
-              </a:spcAft>
-            </a:pPr>
-            <a:r>
-              <a:rPr sz="1200" b="0">
-                <a:solidFill>
-                  <a:srgbClr val="5B6776"/>
-                </a:solidFill>
-                <a:latin typeface="Calibri"/>
-              </a:rPr>
-              <a:t>co-authorship links between the three labs</a:t>
-            </a:r>
-          </a:p>
-        </p:txBody>
-      </p:sp>
       <p:graphicFrame>
         <p:nvGraphicFramePr>
-          <p:cNvPr id="13" name="Degree table"/>
+          <p:cNvPr id="5" name="Ten Non-Obvious Findings Table"/>
           <p:cNvGraphicFramePr>
             <a:graphicFrameLocks noGrp="1"/>
           </p:cNvGraphicFramePr>
           <p:nvPr/>
         </p:nvGraphicFramePr>
         <p:xfrm>
-          <a:off x="502920" y="2514600"/>
-          <a:ext cx="6812279" cy="3621024"/>
+          <a:off x="502920" y="1371600"/>
+          <a:ext cx="11185854" cy="4727448"/>
         </p:xfrm>
         <a:graphic>
           <a:graphicData uri="http://schemas.openxmlformats.org/drawingml/2006/table">
@@ -7740,23 +6819,19 @@
                 <a:tableStyleId>{5C22544A-7EE6-4342-B048-85BDC9FD1C3A}</a:tableStyleId>
               </a:tblPr>
               <a:tblGrid>
-                <a:gridCol w="283845"/>
-                <a:gridCol w="2743835"/>
-                <a:gridCol w="662305"/>
-                <a:gridCol w="709612"/>
-                <a:gridCol w="946150"/>
-                <a:gridCol w="804227"/>
-                <a:gridCol w="662305"/>
+                <a:gridCol w="310718"/>
+                <a:gridCol w="3417900"/>
+                <a:gridCol w="7457236"/>
               </a:tblGrid>
-              <a:tr h="329184">
-                <a:tc>
-                  <a:txBody>
-                    <a:bodyPr wrap="square"/>
-                    <a:lstStyle/>
-                    <a:p>
-                      <a:pPr algn="l"/>
-                      <a:r>
-                        <a:rPr sz="1000" b="1">
+              <a:tr h="429768">
+                <a:tc>
+                  <a:txBody>
+                    <a:bodyPr wrap="square"/>
+                    <a:lstStyle/>
+                    <a:p>
+                      <a:pPr algn="l"/>
+                      <a:r>
+                        <a:rPr sz="850" b="1">
                           <a:solidFill>
                             <a:srgbClr val="FFFFFF"/>
                           </a:solidFill>
@@ -7779,13 +6854,13 @@
                     <a:p>
                       <a:pPr algn="l"/>
                       <a:r>
-                        <a:rPr sz="1000" b="1">
+                        <a:rPr sz="850" b="1">
                           <a:solidFill>
                             <a:srgbClr val="FFFFFF"/>
                           </a:solidFill>
                           <a:latin typeface="Calibri"/>
                         </a:rPr>
-                        <a:t>Most collaborative (degree)</a:t>
+                        <a:t>Research Question</a:t>
                       </a:r>
                     </a:p>
                   </a:txBody>
@@ -7802,13 +6877,13 @@
                     <a:p>
                       <a:pPr algn="l"/>
                       <a:r>
-                        <a:rPr sz="1000" b="1">
+                        <a:rPr sz="850" b="1">
                           <a:solidFill>
                             <a:srgbClr val="FFFFFF"/>
                           </a:solidFill>
                           <a:latin typeface="Calibri"/>
                         </a:rPr>
-                        <a:t>Lab</a:t>
+                        <a:t>Empirical Finding &amp; Headline Result</a:t>
                       </a:r>
                     </a:p>
                   </a:txBody>
@@ -7818,108 +6893,16 @@
                     </a:solidFill>
                   </a:tcPr>
                 </a:tc>
-                <a:tc>
-                  <a:txBody>
-                    <a:bodyPr wrap="square"/>
-                    <a:lstStyle/>
-                    <a:p>
-                      <a:pPr algn="r"/>
-                      <a:r>
-                        <a:rPr sz="1000" b="1">
-                          <a:solidFill>
-                            <a:srgbClr val="FFFFFF"/>
-                          </a:solidFill>
-                          <a:latin typeface="Calibri"/>
-                        </a:rPr>
-                        <a:t>Degree</a:t>
-                      </a:r>
-                    </a:p>
-                  </a:txBody>
-                  <a:tcPr marL="54864" marR="54864" marT="27432" marB="27432" anchor="ctr">
-                    <a:solidFill>
-                      <a:srgbClr val="14213D"/>
-                    </a:solidFill>
-                  </a:tcPr>
-                </a:tc>
-                <a:tc>
-                  <a:txBody>
-                    <a:bodyPr wrap="square"/>
-                    <a:lstStyle/>
-                    <a:p>
-                      <a:pPr algn="r"/>
-                      <a:r>
-                        <a:rPr sz="1000" b="1">
-                          <a:solidFill>
-                            <a:srgbClr val="FFFFFF"/>
-                          </a:solidFill>
-                          <a:latin typeface="Calibri"/>
-                        </a:rPr>
-                        <a:t>Betweenness</a:t>
-                      </a:r>
-                    </a:p>
-                  </a:txBody>
-                  <a:tcPr marL="54864" marR="54864" marT="27432" marB="27432" anchor="ctr">
-                    <a:solidFill>
-                      <a:srgbClr val="14213D"/>
-                    </a:solidFill>
-                  </a:tcPr>
-                </a:tc>
-                <a:tc>
-                  <a:txBody>
-                    <a:bodyPr wrap="square"/>
-                    <a:lstStyle/>
-                    <a:p>
-                      <a:pPr algn="r"/>
-                      <a:r>
-                        <a:rPr sz="1000" b="1">
-                          <a:solidFill>
-                            <a:srgbClr val="FFFFFF"/>
-                          </a:solidFill>
-                          <a:latin typeface="Calibri"/>
-                        </a:rPr>
-                        <a:t>Btw rank</a:t>
-                      </a:r>
-                    </a:p>
-                  </a:txBody>
-                  <a:tcPr marL="54864" marR="54864" marT="27432" marB="27432" anchor="ctr">
-                    <a:solidFill>
-                      <a:srgbClr val="14213D"/>
-                    </a:solidFill>
-                  </a:tcPr>
-                </a:tc>
-                <a:tc>
-                  <a:txBody>
-                    <a:bodyPr wrap="square"/>
-                    <a:lstStyle/>
-                    <a:p>
-                      <a:pPr algn="r"/>
-                      <a:r>
-                        <a:rPr sz="1000" b="1">
-                          <a:solidFill>
-                            <a:srgbClr val="FFFFFF"/>
-                          </a:solidFill>
-                          <a:latin typeface="Calibri"/>
-                        </a:rPr>
-                        <a:t>Comm.</a:t>
-                      </a:r>
-                    </a:p>
-                  </a:txBody>
-                  <a:tcPr marL="54864" marR="54864" marT="27432" marB="27432" anchor="ctr">
-                    <a:solidFill>
-                      <a:srgbClr val="14213D"/>
-                    </a:solidFill>
-                  </a:tcPr>
-                </a:tc>
               </a:tr>
-              <a:tr h="329184">
-                <a:tc>
-                  <a:txBody>
-                    <a:bodyPr wrap="square"/>
-                    <a:lstStyle/>
-                    <a:p>
-                      <a:pPr algn="l"/>
-                      <a:r>
-                        <a:rPr sz="1000">
+              <a:tr h="429768">
+                <a:tc>
+                  <a:txBody>
+                    <a:bodyPr wrap="square"/>
+                    <a:lstStyle/>
+                    <a:p>
+                      <a:pPr algn="l"/>
+                      <a:r>
+                        <a:rPr sz="850">
                           <a:solidFill>
                             <a:srgbClr val="1F2A37"/>
                           </a:solidFill>
@@ -7942,13 +6925,13 @@
                     <a:p>
                       <a:pPr algn="l"/>
                       <a:r>
-                        <a:rPr sz="1000">
-                          <a:solidFill>
-                            <a:srgbClr val="1F2A37"/>
-                          </a:solidFill>
-                          <a:latin typeface="Calibri"/>
-                        </a:rPr>
-                        <a:t>Balasubramanian Sridhar</a:t>
+                        <a:rPr sz="850">
+                          <a:solidFill>
+                            <a:srgbClr val="1F2A37"/>
+                          </a:solidFill>
+                          <a:latin typeface="Calibri"/>
+                        </a:rPr>
+                        <a:t>Do our researchers' co-authors have more co-authors than they do?</a:t>
                       </a:r>
                     </a:p>
                   </a:txBody>
@@ -7965,13 +6948,13 @@
                     <a:p>
                       <a:pPr algn="l"/>
                       <a:r>
-                        <a:rPr sz="1000">
-                          <a:solidFill>
-                            <a:srgbClr val="1F2A37"/>
-                          </a:solidFill>
-                          <a:latin typeface="Calibri"/>
-                        </a:rPr>
-                        <a:t>IICT</a:t>
+                        <a:rPr sz="850">
+                          <a:solidFill>
+                            <a:srgbClr val="1F2A37"/>
+                          </a:solidFill>
+                          <a:latin typeface="Calibri"/>
+                        </a:rPr>
+                        <a:t>93.2% of researchers have fewer co-authors than their co-authors do. The average researcher has 9.2 co-authors, but the average co-author has 31.1.</a:t>
                       </a:r>
                     </a:p>
                   </a:txBody>
@@ -7981,20 +6964,93 @@
                     </a:solidFill>
                   </a:tcPr>
                 </a:tc>
-                <a:tc>
-                  <a:txBody>
-                    <a:bodyPr wrap="square"/>
-                    <a:lstStyle/>
-                    <a:p>
-                      <a:pPr algn="r"/>
-                      <a:r>
-                        <a:rPr sz="1000">
-                          <a:solidFill>
-                            <a:srgbClr val="1F2A37"/>
-                          </a:solidFill>
-                          <a:latin typeface="Calibri"/>
-                        </a:rPr>
-                        <a:t>380</a:t>
+              </a:tr>
+              <a:tr h="429768">
+                <a:tc>
+                  <a:txBody>
+                    <a:bodyPr wrap="square"/>
+                    <a:lstStyle/>
+                    <a:p>
+                      <a:pPr algn="l"/>
+                      <a:r>
+                        <a:rPr sz="850">
+                          <a:solidFill>
+                            <a:srgbClr val="1F2A37"/>
+                          </a:solidFill>
+                          <a:latin typeface="Calibri"/>
+                        </a:rPr>
+                        <a:t>2</a:t>
+                      </a:r>
+                    </a:p>
+                  </a:txBody>
+                  <a:tcPr marL="54864" marR="54864" marT="27432" marB="27432" anchor="ctr">
+                    <a:solidFill>
+                      <a:srgbClr val="F2F4F7"/>
+                    </a:solidFill>
+                  </a:tcPr>
+                </a:tc>
+                <a:tc>
+                  <a:txBody>
+                    <a:bodyPr wrap="square"/>
+                    <a:lstStyle/>
+                    <a:p>
+                      <a:pPr algn="l"/>
+                      <a:r>
+                        <a:rPr sz="850">
+                          <a:solidFill>
+                            <a:srgbClr val="1F2A37"/>
+                          </a:solidFill>
+                          <a:latin typeface="Calibri"/>
+                        </a:rPr>
+                        <a:t>Do the most-connected scientists collaborate mainly with each other?</a:t>
+                      </a:r>
+                    </a:p>
+                  </a:txBody>
+                  <a:tcPr marL="54864" marR="54864" marT="27432" marB="27432" anchor="ctr">
+                    <a:solidFill>
+                      <a:srgbClr val="F2F4F7"/>
+                    </a:solidFill>
+                  </a:tcPr>
+                </a:tc>
+                <a:tc>
+                  <a:txBody>
+                    <a:bodyPr wrap="square"/>
+                    <a:lstStyle/>
+                    <a:p>
+                      <a:pPr algn="l"/>
+                      <a:r>
+                        <a:rPr sz="850">
+                          <a:solidFill>
+                            <a:srgbClr val="1F2A37"/>
+                          </a:solidFill>
+                          <a:latin typeface="Calibri"/>
+                        </a:rPr>
+                        <a:t>The top 1% most-connected researchers show no rich-club effect and are less interconnected than chance (ρ_norm = 0.76). 41 of 78 are CSIR faculty.</a:t>
+                      </a:r>
+                    </a:p>
+                  </a:txBody>
+                  <a:tcPr marL="54864" marR="54864" marT="27432" marB="27432" anchor="ctr">
+                    <a:solidFill>
+                      <a:srgbClr val="F2F4F7"/>
+                    </a:solidFill>
+                  </a:tcPr>
+                </a:tc>
+              </a:tr>
+              <a:tr h="429768">
+                <a:tc>
+                  <a:txBody>
+                    <a:bodyPr wrap="square"/>
+                    <a:lstStyle/>
+                    <a:p>
+                      <a:pPr algn="l"/>
+                      <a:r>
+                        <a:rPr sz="850">
+                          <a:solidFill>
+                            <a:srgbClr val="1F2A37"/>
+                          </a:solidFill>
+                          <a:latin typeface="Calibri"/>
+                        </a:rPr>
+                        <a:t>3</a:t>
                       </a:r>
                     </a:p>
                   </a:txBody>
@@ -8009,15 +7065,15 @@
                     <a:bodyPr wrap="square"/>
                     <a:lstStyle/>
                     <a:p>
-                      <a:pPr algn="r"/>
-                      <a:r>
-                        <a:rPr sz="1000">
-                          <a:solidFill>
-                            <a:srgbClr val="1F2A37"/>
-                          </a:solidFill>
-                          <a:latin typeface="Calibri"/>
-                        </a:rPr>
-                        <a:t>0.096</a:t>
+                      <a:pPr algn="l"/>
+                      <a:r>
+                        <a:rPr sz="850">
+                          <a:solidFill>
+                            <a:srgbClr val="1F2A37"/>
+                          </a:solidFill>
+                          <a:latin typeface="Calibri"/>
+                        </a:rPr>
+                        <a:t>How many researchers hold the cluster together?</a:t>
                       </a:r>
                     </a:p>
                   </a:txBody>
@@ -8032,15 +7088,15 @@
                     <a:bodyPr wrap="square"/>
                     <a:lstStyle/>
                     <a:p>
-                      <a:pPr algn="r"/>
-                      <a:r>
-                        <a:rPr sz="1000">
-                          <a:solidFill>
-                            <a:srgbClr val="1F2A37"/>
-                          </a:solidFill>
-                          <a:latin typeface="Calibri"/>
-                        </a:rPr>
-                        <a:t>#1</a:t>
+                      <a:pPr algn="l"/>
+                      <a:r>
+                        <a:rPr sz="850">
+                          <a:solidFill>
+                            <a:srgbClr val="1F2A37"/>
+                          </a:solidFill>
+                          <a:latin typeface="Calibri"/>
+                        </a:rPr>
+                        <a:t>Removing the top 872 bridge researchers (11.6% of the network) halves the cluster; random removal needs 3,279. Removing just 608 people disconnects the three labs from each other.</a:t>
                       </a:r>
                     </a:p>
                   </a:txBody>
@@ -8050,14 +7106,158 @@
                     </a:solidFill>
                   </a:tcPr>
                 </a:tc>
-                <a:tc>
-                  <a:txBody>
-                    <a:bodyPr wrap="square"/>
-                    <a:lstStyle/>
-                    <a:p>
-                      <a:pPr algn="r"/>
-                      <a:r>
-                        <a:rPr sz="1000">
+              </a:tr>
+              <a:tr h="429768">
+                <a:tc>
+                  <a:txBody>
+                    <a:bodyPr wrap="square"/>
+                    <a:lstStyle/>
+                    <a:p>
+                      <a:pPr algn="l"/>
+                      <a:r>
+                        <a:rPr sz="850">
+                          <a:solidFill>
+                            <a:srgbClr val="1F2A37"/>
+                          </a:solidFill>
+                          <a:latin typeface="Calibri"/>
+                        </a:rPr>
+                        <a:t>4</a:t>
+                      </a:r>
+                    </a:p>
+                  </a:txBody>
+                  <a:tcPr marL="54864" marR="54864" marT="27432" marB="27432" anchor="ctr">
+                    <a:solidFill>
+                      <a:srgbClr val="F2F4F7"/>
+                    </a:solidFill>
+                  </a:tcPr>
+                </a:tc>
+                <a:tc>
+                  <a:txBody>
+                    <a:bodyPr wrap="square"/>
+                    <a:lstStyle/>
+                    <a:p>
+                      <a:pPr algn="l"/>
+                      <a:r>
+                        <a:rPr sz="850">
+                          <a:solidFill>
+                            <a:srgbClr val="1F2A37"/>
+                          </a:solidFill>
+                          <a:latin typeface="Calibri"/>
+                        </a:rPr>
+                        <a:t>Is output concentrated in a few scientists?</a:t>
+                      </a:r>
+                    </a:p>
+                  </a:txBody>
+                  <a:tcPr marL="54864" marR="54864" marT="27432" marB="27432" anchor="ctr">
+                    <a:solidFill>
+                      <a:srgbClr val="F2F4F7"/>
+                    </a:solidFill>
+                  </a:tcPr>
+                </a:tc>
+                <a:tc>
+                  <a:txBody>
+                    <a:bodyPr wrap="square"/>
+                    <a:lstStyle/>
+                    <a:p>
+                      <a:pPr algn="l"/>
+                      <a:r>
+                        <a:rPr sz="850">
+                          <a:solidFill>
+                            <a:srgbClr val="1F2A37"/>
+                          </a:solidFill>
+                          <a:latin typeface="Calibri"/>
+                        </a:rPr>
+                        <a:t>√N = 19 scientists produce 36.2% of the cluster's papers (Price's law predicts 50%). The top 10% produce 50.3%; Gini = 0.63 (papers), 0.75 (citations).</a:t>
+                      </a:r>
+                    </a:p>
+                  </a:txBody>
+                  <a:tcPr marL="54864" marR="54864" marT="27432" marB="27432" anchor="ctr">
+                    <a:solidFill>
+                      <a:srgbClr val="F2F4F7"/>
+                    </a:solidFill>
+                  </a:tcPr>
+                </a:tc>
+              </a:tr>
+              <a:tr h="429768">
+                <a:tc>
+                  <a:txBody>
+                    <a:bodyPr wrap="square"/>
+                    <a:lstStyle/>
+                    <a:p>
+                      <a:pPr algn="l"/>
+                      <a:r>
+                        <a:rPr sz="850">
+                          <a:solidFill>
+                            <a:srgbClr val="1F2A37"/>
+                          </a:solidFill>
+                          <a:latin typeface="Calibri"/>
+                        </a:rPr>
+                        <a:t>5</a:t>
+                      </a:r>
+                    </a:p>
+                  </a:txBody>
+                  <a:tcPr marL="54864" marR="54864" marT="27432" marB="27432" anchor="ctr">
+                    <a:solidFill>
+                      <a:srgbClr val="FFFFFF"/>
+                    </a:solidFill>
+                  </a:tcPr>
+                </a:tc>
+                <a:tc>
+                  <a:txBody>
+                    <a:bodyPr wrap="square"/>
+                    <a:lstStyle/>
+                    <a:p>
+                      <a:pPr algn="l"/>
+                      <a:r>
+                        <a:rPr sz="850">
+                          <a:solidFill>
+                            <a:srgbClr val="1F2A37"/>
+                          </a:solidFill>
+                          <a:latin typeface="Calibri"/>
+                        </a:rPr>
+                        <a:t>Is a Q1 journal a reliable signal of a highly cited paper?</a:t>
+                      </a:r>
+                    </a:p>
+                  </a:txBody>
+                  <a:tcPr marL="54864" marR="54864" marT="27432" marB="27432" anchor="ctr">
+                    <a:solidFill>
+                      <a:srgbClr val="FFFFFF"/>
+                    </a:solidFill>
+                  </a:tcPr>
+                </a:tc>
+                <a:tc>
+                  <a:txBody>
+                    <a:bodyPr wrap="square"/>
+                    <a:lstStyle/>
+                    <a:p>
+                      <a:pPr algn="l"/>
+                      <a:r>
+                        <a:rPr sz="850">
+                          <a:solidFill>
+                            <a:srgbClr val="1F2A37"/>
+                          </a:solidFill>
+                          <a:latin typeface="Calibri"/>
+                        </a:rPr>
+                        <a:t>11.3% of the cluster's top-10% most-cited papers were published outside Q1 journals, while 1.4% of Q1 papers are still uncited.</a:t>
+                      </a:r>
+                    </a:p>
+                  </a:txBody>
+                  <a:tcPr marL="54864" marR="54864" marT="27432" marB="27432" anchor="ctr">
+                    <a:solidFill>
+                      <a:srgbClr val="FFFFFF"/>
+                    </a:solidFill>
+                  </a:tcPr>
+                </a:tc>
+              </a:tr>
+              <a:tr h="429768">
+                <a:tc>
+                  <a:txBody>
+                    <a:bodyPr wrap="square"/>
+                    <a:lstStyle/>
+                    <a:p>
+                      <a:pPr algn="l"/>
+                      <a:r>
+                        <a:rPr sz="850">
                           <a:solidFill>
                             <a:srgbClr val="1F2A37"/>
                           </a:solidFill>
@@ -8069,26 +7269,143 @@
                   </a:txBody>
                   <a:tcPr marL="54864" marR="54864" marT="27432" marB="27432" anchor="ctr">
                     <a:solidFill>
+                      <a:srgbClr val="F2F4F7"/>
+                    </a:solidFill>
+                  </a:tcPr>
+                </a:tc>
+                <a:tc>
+                  <a:txBody>
+                    <a:bodyPr wrap="square"/>
+                    <a:lstStyle/>
+                    <a:p>
+                      <a:pPr algn="l"/>
+                      <a:r>
+                        <a:rPr sz="850">
+                          <a:solidFill>
+                            <a:srgbClr val="1F2A37"/>
+                          </a:solidFill>
+                          <a:latin typeface="Calibri"/>
+                        </a:rPr>
+                        <a:t>Are the papers most influential inside our cluster the same as the world's most-cited?</a:t>
+                      </a:r>
+                    </a:p>
+                  </a:txBody>
+                  <a:tcPr marL="54864" marR="54864" marT="27432" marB="27432" anchor="ctr">
+                    <a:solidFill>
+                      <a:srgbClr val="F2F4F7"/>
+                    </a:solidFill>
+                  </a:tcPr>
+                </a:tc>
+                <a:tc>
+                  <a:txBody>
+                    <a:bodyPr wrap="square"/>
+                    <a:lstStyle/>
+                    <a:p>
+                      <a:pPr algn="l"/>
+                      <a:r>
+                        <a:rPr sz="850">
+                          <a:solidFill>
+                            <a:srgbClr val="1F2A37"/>
+                          </a:solidFill>
+                          <a:latin typeface="Calibri"/>
+                        </a:rPr>
+                        <a:t>In-cluster influence and global citations correlate only moderately (Spearman ρ = 0.40). 82 papers are 'hidden gems': top-5% internal influence, below-median global citations.</a:t>
+                      </a:r>
+                    </a:p>
+                  </a:txBody>
+                  <a:tcPr marL="54864" marR="54864" marT="27432" marB="27432" anchor="ctr">
+                    <a:solidFill>
+                      <a:srgbClr val="F2F4F7"/>
+                    </a:solidFill>
+                  </a:tcPr>
+                </a:tc>
+              </a:tr>
+              <a:tr h="429768">
+                <a:tc>
+                  <a:txBody>
+                    <a:bodyPr wrap="square"/>
+                    <a:lstStyle/>
+                    <a:p>
+                      <a:pPr algn="l"/>
+                      <a:r>
+                        <a:rPr sz="850">
+                          <a:solidFill>
+                            <a:srgbClr val="1F2A37"/>
+                          </a:solidFill>
+                          <a:latin typeface="Calibri"/>
+                        </a:rPr>
+                        <a:t>7</a:t>
+                      </a:r>
+                    </a:p>
+                  </a:txBody>
+                  <a:tcPr marL="54864" marR="54864" marT="27432" marB="27432" anchor="ctr">
+                    <a:solidFill>
                       <a:srgbClr val="FFFFFF"/>
                     </a:solidFill>
                   </a:tcPr>
                 </a:tc>
+                <a:tc>
+                  <a:txBody>
+                    <a:bodyPr wrap="square"/>
+                    <a:lstStyle/>
+                    <a:p>
+                      <a:pPr algn="l"/>
+                      <a:r>
+                        <a:rPr sz="850">
+                          <a:solidFill>
+                            <a:srgbClr val="1F2A37"/>
+                          </a:solidFill>
+                          <a:latin typeface="Calibri"/>
+                        </a:rPr>
+                        <a:t>Which papers were ignored for years and then suddenly took off?</a:t>
+                      </a:r>
+                    </a:p>
+                  </a:txBody>
+                  <a:tcPr marL="54864" marR="54864" marT="27432" marB="27432" anchor="ctr">
+                    <a:solidFill>
+                      <a:srgbClr val="FFFFFF"/>
+                    </a:solidFill>
+                  </a:tcPr>
+                </a:tc>
+                <a:tc>
+                  <a:txBody>
+                    <a:bodyPr wrap="square"/>
+                    <a:lstStyle/>
+                    <a:p>
+                      <a:pPr algn="l"/>
+                      <a:r>
+                        <a:rPr sz="850">
+                          <a:solidFill>
+                            <a:srgbClr val="1F2A37"/>
+                          </a:solidFill>
+                          <a:latin typeface="Calibri"/>
+                        </a:rPr>
+                        <a:t>15 papers show delayed recognition. The strongest, 'Novel triazole hybrids of myrrhanone C, a natural polypodane triterpene: Synthesis, cytotoxic activity and cell based studies' (CSIR-IICT, 2016), averaged 3.6 citations/yr for 5 years, then jumped to 6.3/yr from 2021.</a:t>
+                      </a:r>
+                    </a:p>
+                  </a:txBody>
+                  <a:tcPr marL="54864" marR="54864" marT="27432" marB="27432" anchor="ctr">
+                    <a:solidFill>
+                      <a:srgbClr val="FFFFFF"/>
+                    </a:solidFill>
+                  </a:tcPr>
+                </a:tc>
               </a:tr>
-              <a:tr h="329184">
-                <a:tc>
-                  <a:txBody>
-                    <a:bodyPr wrap="square"/>
-                    <a:lstStyle/>
-                    <a:p>
-                      <a:pPr algn="l"/>
-                      <a:r>
-                        <a:rPr sz="1000">
-                          <a:solidFill>
-                            <a:srgbClr val="1F2A37"/>
-                          </a:solidFill>
-                          <a:latin typeface="Calibri"/>
-                        </a:rPr>
-                        <a:t>2</a:t>
+              <a:tr h="429768">
+                <a:tc>
+                  <a:txBody>
+                    <a:bodyPr wrap="square"/>
+                    <a:lstStyle/>
+                    <a:p>
+                      <a:pPr algn="l"/>
+                      <a:r>
+                        <a:rPr sz="850">
+                          <a:solidFill>
+                            <a:srgbClr val="1F2A37"/>
+                          </a:solidFill>
+                          <a:latin typeface="Calibri"/>
+                        </a:rPr>
+                        <a:t>8</a:t>
                       </a:r>
                     </a:p>
                   </a:txBody>
@@ -8105,13 +7422,13 @@
                     <a:p>
                       <a:pPr algn="l"/>
                       <a:r>
-                        <a:rPr sz="1000">
-                          <a:solidFill>
-                            <a:srgbClr val="1F2A37"/>
-                          </a:solidFill>
-                          <a:latin typeface="Calibri"/>
-                        </a:rPr>
-                        <a:t>Dr. Jagadeesh Babu Nanubolu</a:t>
+                        <a:rPr sz="850">
+                          <a:solidFill>
+                            <a:srgbClr val="1F2A37"/>
+                          </a:solidFill>
+                          <a:latin typeface="Calibri"/>
+                        </a:rPr>
+                        <a:t>How much output did COVID cost, and did research shift?</a:t>
                       </a:r>
                     </a:p>
                   </a:txBody>
@@ -8128,13 +7445,13 @@
                     <a:p>
                       <a:pPr algn="l"/>
                       <a:r>
-                        <a:rPr sz="1000">
-                          <a:solidFill>
-                            <a:srgbClr val="1F2A37"/>
-                          </a:solidFill>
-                          <a:latin typeface="Calibri"/>
-                        </a:rPr>
-                        <a:t>IICT</a:t>
+                        <a:rPr sz="850">
+                          <a:solidFill>
+                            <a:srgbClr val="1F2A37"/>
+                          </a:solidFill>
+                          <a:latin typeface="Calibri"/>
+                        </a:rPr>
+                        <a:t>Output was 1.8% above trend in 2020 and 12.7% above in 2021. COVID-related work peaked at 5.5% of CSIR-IICT's papers in 2021; the topic mix shifted 1.05× more than in a normal period.</a:t>
                       </a:r>
                     </a:p>
                   </a:txBody>
@@ -8144,20 +7461,93 @@
                     </a:solidFill>
                   </a:tcPr>
                 </a:tc>
-                <a:tc>
-                  <a:txBody>
-                    <a:bodyPr wrap="square"/>
-                    <a:lstStyle/>
-                    <a:p>
-                      <a:pPr algn="r"/>
-                      <a:r>
-                        <a:rPr sz="1000">
-                          <a:solidFill>
-                            <a:srgbClr val="1F2A37"/>
-                          </a:solidFill>
-                          <a:latin typeface="Calibri"/>
-                        </a:rPr>
-                        <a:t>285</a:t>
+              </a:tr>
+              <a:tr h="429768">
+                <a:tc>
+                  <a:txBody>
+                    <a:bodyPr wrap="square"/>
+                    <a:lstStyle/>
+                    <a:p>
+                      <a:pPr algn="l"/>
+                      <a:r>
+                        <a:rPr sz="850">
+                          <a:solidFill>
+                            <a:srgbClr val="1F2A37"/>
+                          </a:solidFill>
+                          <a:latin typeface="Calibri"/>
+                        </a:rPr>
+                        <a:t>9</a:t>
+                      </a:r>
+                    </a:p>
+                  </a:txBody>
+                  <a:tcPr marL="54864" marR="54864" marT="27432" marB="27432" anchor="ctr">
+                    <a:solidFill>
+                      <a:srgbClr val="FFFFFF"/>
+                    </a:solidFill>
+                  </a:tcPr>
+                </a:tc>
+                <a:tc>
+                  <a:txBody>
+                    <a:bodyPr wrap="square"/>
+                    <a:lstStyle/>
+                    <a:p>
+                      <a:pPr algn="l"/>
+                      <a:r>
+                        <a:rPr sz="850">
+                          <a:solidFill>
+                            <a:srgbClr val="1F2A37"/>
+                          </a:solidFill>
+                          <a:latin typeface="Calibri"/>
+                        </a:rPr>
+                        <a:t>How many of our scientists trained in India, worked abroad, and came back, and did time abroad change their research?</a:t>
+                      </a:r>
+                    </a:p>
+                  </a:txBody>
+                  <a:tcPr marL="54864" marR="54864" marT="27432" marB="27432" anchor="ctr">
+                    <a:solidFill>
+                      <a:srgbClr val="FFFFFF"/>
+                    </a:solidFill>
+                  </a:tcPr>
+                </a:tc>
+                <a:tc>
+                  <a:txBody>
+                    <a:bodyPr wrap="square"/>
+                    <a:lstStyle/>
+                    <a:p>
+                      <a:pPr algn="l"/>
+                      <a:r>
+                        <a:rPr sz="850">
+                          <a:solidFill>
+                            <a:srgbClr val="1F2A37"/>
+                          </a:solidFill>
+                          <a:latin typeface="Calibri"/>
+                        </a:rPr>
+                        <a:t>8.3% of classifiable CSIR scientists are returnees (NCL 13.2%, IICT 4.0%, CECRI 0.0%), mostly via US, DE. Returnees' papers show no significant difference in citations than home-grown peers of similar career age, and 9.0% vs 16.3% of their papers have foreign co-authors.</a:t>
+                      </a:r>
+                    </a:p>
+                  </a:txBody>
+                  <a:tcPr marL="54864" marR="54864" marT="27432" marB="27432" anchor="ctr">
+                    <a:solidFill>
+                      <a:srgbClr val="FFFFFF"/>
+                    </a:solidFill>
+                  </a:tcPr>
+                </a:tc>
+              </a:tr>
+              <a:tr h="429768">
+                <a:tc>
+                  <a:txBody>
+                    <a:bodyPr wrap="square"/>
+                    <a:lstStyle/>
+                    <a:p>
+                      <a:pPr algn="l"/>
+                      <a:r>
+                        <a:rPr sz="850">
+                          <a:solidFill>
+                            <a:srgbClr val="1F2A37"/>
+                          </a:solidFill>
+                          <a:latin typeface="Calibri"/>
+                        </a:rPr>
+                        <a:t>10</a:t>
                       </a:r>
                     </a:p>
                   </a:txBody>
@@ -8172,15 +7562,15 @@
                     <a:bodyPr wrap="square"/>
                     <a:lstStyle/>
                     <a:p>
-                      <a:pPr algn="r"/>
-                      <a:r>
-                        <a:rPr sz="1000">
-                          <a:solidFill>
-                            <a:srgbClr val="1F2A37"/>
-                          </a:solidFill>
-                          <a:latin typeface="Calibri"/>
-                        </a:rPr>
-                        <a:t>0.090</a:t>
+                      <a:pPr algn="l"/>
+                      <a:r>
+                        <a:rPr sz="850">
+                          <a:solidFill>
+                            <a:srgbClr val="1F2A37"/>
+                          </a:solidFill>
+                          <a:latin typeface="Calibri"/>
+                        </a:rPr>
+                        <a:t>How much of each lab's output depends on scientists close to retirement?</a:t>
                       </a:r>
                     </a:p>
                   </a:txBody>
@@ -8195,1342 +7585,15 @@
                     <a:bodyPr wrap="square"/>
                     <a:lstStyle/>
                     <a:p>
-                      <a:pPr algn="r"/>
-                      <a:r>
-                        <a:rPr sz="1000">
-                          <a:solidFill>
-                            <a:srgbClr val="1F2A37"/>
-                          </a:solidFill>
-                          <a:latin typeface="Calibri"/>
-                        </a:rPr>
-                        <a:t>#2</a:t>
-                      </a:r>
-                    </a:p>
-                  </a:txBody>
-                  <a:tcPr marL="54864" marR="54864" marT="27432" marB="27432" anchor="ctr">
-                    <a:solidFill>
-                      <a:srgbClr val="F2F4F7"/>
-                    </a:solidFill>
-                  </a:tcPr>
-                </a:tc>
-                <a:tc>
-                  <a:txBody>
-                    <a:bodyPr wrap="square"/>
-                    <a:lstStyle/>
-                    <a:p>
-                      <a:pPr algn="r"/>
-                      <a:r>
-                        <a:rPr sz="1000">
-                          <a:solidFill>
-                            <a:srgbClr val="1F2A37"/>
-                          </a:solidFill>
-                          <a:latin typeface="Calibri"/>
-                        </a:rPr>
-                        <a:t>18</a:t>
-                      </a:r>
-                    </a:p>
-                  </a:txBody>
-                  <a:tcPr marL="54864" marR="54864" marT="27432" marB="27432" anchor="ctr">
-                    <a:solidFill>
-                      <a:srgbClr val="F2F4F7"/>
-                    </a:solidFill>
-                  </a:tcPr>
-                </a:tc>
-              </a:tr>
-              <a:tr h="329184">
-                <a:tc>
-                  <a:txBody>
-                    <a:bodyPr wrap="square"/>
-                    <a:lstStyle/>
-                    <a:p>
-                      <a:pPr algn="l"/>
-                      <a:r>
-                        <a:rPr sz="1000">
-                          <a:solidFill>
-                            <a:srgbClr val="1F2A37"/>
-                          </a:solidFill>
-                          <a:latin typeface="Calibri"/>
-                        </a:rPr>
-                        <a:t>3</a:t>
-                      </a:r>
-                    </a:p>
-                  </a:txBody>
-                  <a:tcPr marL="54864" marR="54864" marT="27432" marB="27432" anchor="ctr">
-                    <a:solidFill>
-                      <a:srgbClr val="FFFFFF"/>
-                    </a:solidFill>
-                  </a:tcPr>
-                </a:tc>
-                <a:tc>
-                  <a:txBody>
-                    <a:bodyPr wrap="square"/>
-                    <a:lstStyle/>
-                    <a:p>
-                      <a:pPr algn="l"/>
-                      <a:r>
-                        <a:rPr sz="1000">
-                          <a:solidFill>
-                            <a:srgbClr val="1F2A37"/>
-                          </a:solidFill>
-                          <a:latin typeface="Calibri"/>
-                        </a:rPr>
-                        <a:t>Dr. Rajesh G. Gonnade</a:t>
-                      </a:r>
-                    </a:p>
-                  </a:txBody>
-                  <a:tcPr marL="54864" marR="54864" marT="27432" marB="27432" anchor="ctr">
-                    <a:solidFill>
-                      <a:srgbClr val="FFFFFF"/>
-                    </a:solidFill>
-                  </a:tcPr>
-                </a:tc>
-                <a:tc>
-                  <a:txBody>
-                    <a:bodyPr wrap="square"/>
-                    <a:lstStyle/>
-                    <a:p>
-                      <a:pPr algn="l"/>
-                      <a:r>
-                        <a:rPr sz="1000">
-                          <a:solidFill>
-                            <a:srgbClr val="1F2A37"/>
-                          </a:solidFill>
-                          <a:latin typeface="Calibri"/>
-                        </a:rPr>
-                        <a:t>NCL</a:t>
-                      </a:r>
-                    </a:p>
-                  </a:txBody>
-                  <a:tcPr marL="54864" marR="54864" marT="27432" marB="27432" anchor="ctr">
-                    <a:solidFill>
-                      <a:srgbClr val="FFFFFF"/>
-                    </a:solidFill>
-                  </a:tcPr>
-                </a:tc>
-                <a:tc>
-                  <a:txBody>
-                    <a:bodyPr wrap="square"/>
-                    <a:lstStyle/>
-                    <a:p>
-                      <a:pPr algn="r"/>
-                      <a:r>
-                        <a:rPr sz="1000">
-                          <a:solidFill>
-                            <a:srgbClr val="1F2A37"/>
-                          </a:solidFill>
-                          <a:latin typeface="Calibri"/>
-                        </a:rPr>
-                        <a:t>280</a:t>
-                      </a:r>
-                    </a:p>
-                  </a:txBody>
-                  <a:tcPr marL="54864" marR="54864" marT="27432" marB="27432" anchor="ctr">
-                    <a:solidFill>
-                      <a:srgbClr val="FFFFFF"/>
-                    </a:solidFill>
-                  </a:tcPr>
-                </a:tc>
-                <a:tc>
-                  <a:txBody>
-                    <a:bodyPr wrap="square"/>
-                    <a:lstStyle/>
-                    <a:p>
-                      <a:pPr algn="r"/>
-                      <a:r>
-                        <a:rPr sz="1000">
-                          <a:solidFill>
-                            <a:srgbClr val="1F2A37"/>
-                          </a:solidFill>
-                          <a:latin typeface="Calibri"/>
-                        </a:rPr>
-                        <a:t>0.061</a:t>
-                      </a:r>
-                    </a:p>
-                  </a:txBody>
-                  <a:tcPr marL="54864" marR="54864" marT="27432" marB="27432" anchor="ctr">
-                    <a:solidFill>
-                      <a:srgbClr val="FFFFFF"/>
-                    </a:solidFill>
-                  </a:tcPr>
-                </a:tc>
-                <a:tc>
-                  <a:txBody>
-                    <a:bodyPr wrap="square"/>
-                    <a:lstStyle/>
-                    <a:p>
-                      <a:pPr algn="r"/>
-                      <a:r>
-                        <a:rPr sz="1000">
-                          <a:solidFill>
-                            <a:srgbClr val="1F2A37"/>
-                          </a:solidFill>
-                          <a:latin typeface="Calibri"/>
-                        </a:rPr>
-                        <a:t>#5</a:t>
-                      </a:r>
-                    </a:p>
-                  </a:txBody>
-                  <a:tcPr marL="54864" marR="54864" marT="27432" marB="27432" anchor="ctr">
-                    <a:solidFill>
-                      <a:srgbClr val="FFFFFF"/>
-                    </a:solidFill>
-                  </a:tcPr>
-                </a:tc>
-                <a:tc>
-                  <a:txBody>
-                    <a:bodyPr wrap="square"/>
-                    <a:lstStyle/>
-                    <a:p>
-                      <a:pPr algn="r"/>
-                      <a:r>
-                        <a:rPr sz="1000">
-                          <a:solidFill>
-                            <a:srgbClr val="1F2A37"/>
-                          </a:solidFill>
-                          <a:latin typeface="Calibri"/>
-                        </a:rPr>
-                        <a:t>4</a:t>
-                      </a:r>
-                    </a:p>
-                  </a:txBody>
-                  <a:tcPr marL="54864" marR="54864" marT="27432" marB="27432" anchor="ctr">
-                    <a:solidFill>
-                      <a:srgbClr val="FFFFFF"/>
-                    </a:solidFill>
-                  </a:tcPr>
-                </a:tc>
-              </a:tr>
-              <a:tr h="329184">
-                <a:tc>
-                  <a:txBody>
-                    <a:bodyPr wrap="square"/>
-                    <a:lstStyle/>
-                    <a:p>
-                      <a:pPr algn="l"/>
-                      <a:r>
-                        <a:rPr sz="1000">
-                          <a:solidFill>
-                            <a:srgbClr val="1F2A37"/>
-                          </a:solidFill>
-                          <a:latin typeface="Calibri"/>
-                        </a:rPr>
-                        <a:t>4</a:t>
-                      </a:r>
-                    </a:p>
-                  </a:txBody>
-                  <a:tcPr marL="54864" marR="54864" marT="27432" marB="27432" anchor="ctr">
-                    <a:solidFill>
-                      <a:srgbClr val="F2F4F7"/>
-                    </a:solidFill>
-                  </a:tcPr>
-                </a:tc>
-                <a:tc>
-                  <a:txBody>
-                    <a:bodyPr wrap="square"/>
-                    <a:lstStyle/>
-                    <a:p>
-                      <a:pPr algn="l"/>
-                      <a:r>
-                        <a:rPr sz="1000">
-                          <a:solidFill>
-                            <a:srgbClr val="1F2A37"/>
-                          </a:solidFill>
-                          <a:latin typeface="Calibri"/>
-                        </a:rPr>
-                        <a:t>Dr. Sunil Misra</a:t>
-                      </a:r>
-                    </a:p>
-                  </a:txBody>
-                  <a:tcPr marL="54864" marR="54864" marT="27432" marB="27432" anchor="ctr">
-                    <a:solidFill>
-                      <a:srgbClr val="F2F4F7"/>
-                    </a:solidFill>
-                  </a:tcPr>
-                </a:tc>
-                <a:tc>
-                  <a:txBody>
-                    <a:bodyPr wrap="square"/>
-                    <a:lstStyle/>
-                    <a:p>
-                      <a:pPr algn="l"/>
-                      <a:r>
-                        <a:rPr sz="1000">
-                          <a:solidFill>
-                            <a:srgbClr val="1F2A37"/>
-                          </a:solidFill>
-                          <a:latin typeface="Calibri"/>
-                        </a:rPr>
-                        <a:t>IICT</a:t>
-                      </a:r>
-                    </a:p>
-                  </a:txBody>
-                  <a:tcPr marL="54864" marR="54864" marT="27432" marB="27432" anchor="ctr">
-                    <a:solidFill>
-                      <a:srgbClr val="F2F4F7"/>
-                    </a:solidFill>
-                  </a:tcPr>
-                </a:tc>
-                <a:tc>
-                  <a:txBody>
-                    <a:bodyPr wrap="square"/>
-                    <a:lstStyle/>
-                    <a:p>
-                      <a:pPr algn="r"/>
-                      <a:r>
-                        <a:rPr sz="1000">
-                          <a:solidFill>
-                            <a:srgbClr val="1F2A37"/>
-                          </a:solidFill>
-                          <a:latin typeface="Calibri"/>
-                        </a:rPr>
-                        <a:t>198</a:t>
-                      </a:r>
-                    </a:p>
-                  </a:txBody>
-                  <a:tcPr marL="54864" marR="54864" marT="27432" marB="27432" anchor="ctr">
-                    <a:solidFill>
-                      <a:srgbClr val="F2F4F7"/>
-                    </a:solidFill>
-                  </a:tcPr>
-                </a:tc>
-                <a:tc>
-                  <a:txBody>
-                    <a:bodyPr wrap="square"/>
-                    <a:lstStyle/>
-                    <a:p>
-                      <a:pPr algn="r"/>
-                      <a:r>
-                        <a:rPr sz="1000">
-                          <a:solidFill>
-                            <a:srgbClr val="1F2A37"/>
-                          </a:solidFill>
-                          <a:latin typeface="Calibri"/>
-                        </a:rPr>
-                        <a:t>0.055</a:t>
-                      </a:r>
-                    </a:p>
-                  </a:txBody>
-                  <a:tcPr marL="54864" marR="54864" marT="27432" marB="27432" anchor="ctr">
-                    <a:solidFill>
-                      <a:srgbClr val="F2F4F7"/>
-                    </a:solidFill>
-                  </a:tcPr>
-                </a:tc>
-                <a:tc>
-                  <a:txBody>
-                    <a:bodyPr wrap="square"/>
-                    <a:lstStyle/>
-                    <a:p>
-                      <a:pPr algn="r"/>
-                      <a:r>
-                        <a:rPr sz="1000">
-                          <a:solidFill>
-                            <a:srgbClr val="1F2A37"/>
-                          </a:solidFill>
-                          <a:latin typeface="Calibri"/>
-                        </a:rPr>
-                        <a:t>#7</a:t>
-                      </a:r>
-                    </a:p>
-                  </a:txBody>
-                  <a:tcPr marL="54864" marR="54864" marT="27432" marB="27432" anchor="ctr">
-                    <a:solidFill>
-                      <a:srgbClr val="F2F4F7"/>
-                    </a:solidFill>
-                  </a:tcPr>
-                </a:tc>
-                <a:tc>
-                  <a:txBody>
-                    <a:bodyPr wrap="square"/>
-                    <a:lstStyle/>
-                    <a:p>
-                      <a:pPr algn="r"/>
-                      <a:r>
-                        <a:rPr sz="1000">
-                          <a:solidFill>
-                            <a:srgbClr val="1F2A37"/>
-                          </a:solidFill>
-                          <a:latin typeface="Calibri"/>
-                        </a:rPr>
-                        <a:t>8</a:t>
-                      </a:r>
-                    </a:p>
-                  </a:txBody>
-                  <a:tcPr marL="54864" marR="54864" marT="27432" marB="27432" anchor="ctr">
-                    <a:solidFill>
-                      <a:srgbClr val="F2F4F7"/>
-                    </a:solidFill>
-                  </a:tcPr>
-                </a:tc>
-              </a:tr>
-              <a:tr h="329184">
-                <a:tc>
-                  <a:txBody>
-                    <a:bodyPr wrap="square"/>
-                    <a:lstStyle/>
-                    <a:p>
-                      <a:pPr algn="l"/>
-                      <a:r>
-                        <a:rPr sz="1000">
-                          <a:solidFill>
-                            <a:srgbClr val="1F2A37"/>
-                          </a:solidFill>
-                          <a:latin typeface="Calibri"/>
-                        </a:rPr>
-                        <a:t>5</a:t>
-                      </a:r>
-                    </a:p>
-                  </a:txBody>
-                  <a:tcPr marL="54864" marR="54864" marT="27432" marB="27432" anchor="ctr">
-                    <a:solidFill>
-                      <a:srgbClr val="FFFFFF"/>
-                    </a:solidFill>
-                  </a:tcPr>
-                </a:tc>
-                <a:tc>
-                  <a:txBody>
-                    <a:bodyPr wrap="square"/>
-                    <a:lstStyle/>
-                    <a:p>
-                      <a:pPr algn="l"/>
-                      <a:r>
-                        <a:rPr sz="1000">
-                          <a:solidFill>
-                            <a:srgbClr val="1F2A37"/>
-                          </a:solidFill>
-                          <a:latin typeface="Calibri"/>
-                        </a:rPr>
-                        <a:t>Dr. B.V. Subba Reddy</a:t>
-                      </a:r>
-                    </a:p>
-                  </a:txBody>
-                  <a:tcPr marL="54864" marR="54864" marT="27432" marB="27432" anchor="ctr">
-                    <a:solidFill>
-                      <a:srgbClr val="FFFFFF"/>
-                    </a:solidFill>
-                  </a:tcPr>
-                </a:tc>
-                <a:tc>
-                  <a:txBody>
-                    <a:bodyPr wrap="square"/>
-                    <a:lstStyle/>
-                    <a:p>
-                      <a:pPr algn="l"/>
-                      <a:r>
-                        <a:rPr sz="1000">
-                          <a:solidFill>
-                            <a:srgbClr val="1F2A37"/>
-                          </a:solidFill>
-                          <a:latin typeface="Calibri"/>
-                        </a:rPr>
-                        <a:t>IICT</a:t>
-                      </a:r>
-                    </a:p>
-                  </a:txBody>
-                  <a:tcPr marL="54864" marR="54864" marT="27432" marB="27432" anchor="ctr">
-                    <a:solidFill>
-                      <a:srgbClr val="FFFFFF"/>
-                    </a:solidFill>
-                  </a:tcPr>
-                </a:tc>
-                <a:tc>
-                  <a:txBody>
-                    <a:bodyPr wrap="square"/>
-                    <a:lstStyle/>
-                    <a:p>
-                      <a:pPr algn="r"/>
-                      <a:r>
-                        <a:rPr sz="1000">
-                          <a:solidFill>
-                            <a:srgbClr val="1F2A37"/>
-                          </a:solidFill>
-                          <a:latin typeface="Calibri"/>
-                        </a:rPr>
-                        <a:t>196</a:t>
-                      </a:r>
-                    </a:p>
-                  </a:txBody>
-                  <a:tcPr marL="54864" marR="54864" marT="27432" marB="27432" anchor="ctr">
-                    <a:solidFill>
-                      <a:srgbClr val="FFFFFF"/>
-                    </a:solidFill>
-                  </a:tcPr>
-                </a:tc>
-                <a:tc>
-                  <a:txBody>
-                    <a:bodyPr wrap="square"/>
-                    <a:lstStyle/>
-                    <a:p>
-                      <a:pPr algn="r"/>
-                      <a:r>
-                        <a:rPr sz="1000">
-                          <a:solidFill>
-                            <a:srgbClr val="1F2A37"/>
-                          </a:solidFill>
-                          <a:latin typeface="Calibri"/>
-                        </a:rPr>
-                        <a:t>0.057</a:t>
-                      </a:r>
-                    </a:p>
-                  </a:txBody>
-                  <a:tcPr marL="54864" marR="54864" marT="27432" marB="27432" anchor="ctr">
-                    <a:solidFill>
-                      <a:srgbClr val="FFFFFF"/>
-                    </a:solidFill>
-                  </a:tcPr>
-                </a:tc>
-                <a:tc>
-                  <a:txBody>
-                    <a:bodyPr wrap="square"/>
-                    <a:lstStyle/>
-                    <a:p>
-                      <a:pPr algn="r"/>
-                      <a:r>
-                        <a:rPr sz="1000">
-                          <a:solidFill>
-                            <a:srgbClr val="1F2A37"/>
-                          </a:solidFill>
-                          <a:latin typeface="Calibri"/>
-                        </a:rPr>
-                        <a:t>#6</a:t>
-                      </a:r>
-                    </a:p>
-                  </a:txBody>
-                  <a:tcPr marL="54864" marR="54864" marT="27432" marB="27432" anchor="ctr">
-                    <a:solidFill>
-                      <a:srgbClr val="FFFFFF"/>
-                    </a:solidFill>
-                  </a:tcPr>
-                </a:tc>
-                <a:tc>
-                  <a:txBody>
-                    <a:bodyPr wrap="square"/>
-                    <a:lstStyle/>
-                    <a:p>
-                      <a:pPr algn="r"/>
-                      <a:r>
-                        <a:rPr sz="1000">
-                          <a:solidFill>
-                            <a:srgbClr val="1F2A37"/>
-                          </a:solidFill>
-                          <a:latin typeface="Calibri"/>
-                        </a:rPr>
-                        <a:t>6</a:t>
-                      </a:r>
-                    </a:p>
-                  </a:txBody>
-                  <a:tcPr marL="54864" marR="54864" marT="27432" marB="27432" anchor="ctr">
-                    <a:solidFill>
-                      <a:srgbClr val="FFFFFF"/>
-                    </a:solidFill>
-                  </a:tcPr>
-                </a:tc>
-              </a:tr>
-              <a:tr h="329184">
-                <a:tc>
-                  <a:txBody>
-                    <a:bodyPr wrap="square"/>
-                    <a:lstStyle/>
-                    <a:p>
-                      <a:pPr algn="l"/>
-                      <a:r>
-                        <a:rPr sz="1000">
-                          <a:solidFill>
-                            <a:srgbClr val="1F2A37"/>
-                          </a:solidFill>
-                          <a:latin typeface="Calibri"/>
-                        </a:rPr>
-                        <a:t>6</a:t>
-                      </a:r>
-                    </a:p>
-                  </a:txBody>
-                  <a:tcPr marL="54864" marR="54864" marT="27432" marB="27432" anchor="ctr">
-                    <a:solidFill>
-                      <a:srgbClr val="F2F4F7"/>
-                    </a:solidFill>
-                  </a:tcPr>
-                </a:tc>
-                <a:tc>
-                  <a:txBody>
-                    <a:bodyPr wrap="square"/>
-                    <a:lstStyle/>
-                    <a:p>
-                      <a:pPr algn="l"/>
-                      <a:r>
-                        <a:rPr sz="1000">
-                          <a:solidFill>
-                            <a:srgbClr val="1F2A37"/>
-                          </a:solidFill>
-                          <a:latin typeface="Calibri"/>
-                        </a:rPr>
-                        <a:t>Dr. Kumar Vanka</a:t>
-                      </a:r>
-                    </a:p>
-                  </a:txBody>
-                  <a:tcPr marL="54864" marR="54864" marT="27432" marB="27432" anchor="ctr">
-                    <a:solidFill>
-                      <a:srgbClr val="F2F4F7"/>
-                    </a:solidFill>
-                  </a:tcPr>
-                </a:tc>
-                <a:tc>
-                  <a:txBody>
-                    <a:bodyPr wrap="square"/>
-                    <a:lstStyle/>
-                    <a:p>
-                      <a:pPr algn="l"/>
-                      <a:r>
-                        <a:rPr sz="1000">
-                          <a:solidFill>
-                            <a:srgbClr val="1F2A37"/>
-                          </a:solidFill>
-                          <a:latin typeface="Calibri"/>
-                        </a:rPr>
-                        <a:t>NCL</a:t>
-                      </a:r>
-                    </a:p>
-                  </a:txBody>
-                  <a:tcPr marL="54864" marR="54864" marT="27432" marB="27432" anchor="ctr">
-                    <a:solidFill>
-                      <a:srgbClr val="F2F4F7"/>
-                    </a:solidFill>
-                  </a:tcPr>
-                </a:tc>
-                <a:tc>
-                  <a:txBody>
-                    <a:bodyPr wrap="square"/>
-                    <a:lstStyle/>
-                    <a:p>
-                      <a:pPr algn="r"/>
-                      <a:r>
-                        <a:rPr sz="1000">
-                          <a:solidFill>
-                            <a:srgbClr val="1F2A37"/>
-                          </a:solidFill>
-                          <a:latin typeface="Calibri"/>
-                        </a:rPr>
-                        <a:t>195</a:t>
-                      </a:r>
-                    </a:p>
-                  </a:txBody>
-                  <a:tcPr marL="54864" marR="54864" marT="27432" marB="27432" anchor="ctr">
-                    <a:solidFill>
-                      <a:srgbClr val="F2F4F7"/>
-                    </a:solidFill>
-                  </a:tcPr>
-                </a:tc>
-                <a:tc>
-                  <a:txBody>
-                    <a:bodyPr wrap="square"/>
-                    <a:lstStyle/>
-                    <a:p>
-                      <a:pPr algn="r"/>
-                      <a:r>
-                        <a:rPr sz="1000">
-                          <a:solidFill>
-                            <a:srgbClr val="1F2A37"/>
-                          </a:solidFill>
-                          <a:latin typeface="Calibri"/>
-                        </a:rPr>
-                        <a:t>0.044</a:t>
-                      </a:r>
-                    </a:p>
-                  </a:txBody>
-                  <a:tcPr marL="54864" marR="54864" marT="27432" marB="27432" anchor="ctr">
-                    <a:solidFill>
-                      <a:srgbClr val="F2F4F7"/>
-                    </a:solidFill>
-                  </a:tcPr>
-                </a:tc>
-                <a:tc>
-                  <a:txBody>
-                    <a:bodyPr wrap="square"/>
-                    <a:lstStyle/>
-                    <a:p>
-                      <a:pPr algn="r"/>
-                      <a:r>
-                        <a:rPr sz="1000">
-                          <a:solidFill>
-                            <a:srgbClr val="1F2A37"/>
-                          </a:solidFill>
-                          <a:latin typeface="Calibri"/>
-                        </a:rPr>
-                        <a:t>#9</a:t>
-                      </a:r>
-                    </a:p>
-                  </a:txBody>
-                  <a:tcPr marL="54864" marR="54864" marT="27432" marB="27432" anchor="ctr">
-                    <a:solidFill>
-                      <a:srgbClr val="F2F4F7"/>
-                    </a:solidFill>
-                  </a:tcPr>
-                </a:tc>
-                <a:tc>
-                  <a:txBody>
-                    <a:bodyPr wrap="square"/>
-                    <a:lstStyle/>
-                    <a:p>
-                      <a:pPr algn="r"/>
-                      <a:r>
-                        <a:rPr sz="1000">
-                          <a:solidFill>
-                            <a:srgbClr val="1F2A37"/>
-                          </a:solidFill>
-                          <a:latin typeface="Calibri"/>
-                        </a:rPr>
-                        <a:t>4</a:t>
-                      </a:r>
-                    </a:p>
-                  </a:txBody>
-                  <a:tcPr marL="54864" marR="54864" marT="27432" marB="27432" anchor="ctr">
-                    <a:solidFill>
-                      <a:srgbClr val="F2F4F7"/>
-                    </a:solidFill>
-                  </a:tcPr>
-                </a:tc>
-              </a:tr>
-              <a:tr h="329184">
-                <a:tc>
-                  <a:txBody>
-                    <a:bodyPr wrap="square"/>
-                    <a:lstStyle/>
-                    <a:p>
-                      <a:pPr algn="l"/>
-                      <a:r>
-                        <a:rPr sz="1000">
-                          <a:solidFill>
-                            <a:srgbClr val="1F2A37"/>
-                          </a:solidFill>
-                          <a:latin typeface="Calibri"/>
-                        </a:rPr>
-                        <a:t>7</a:t>
-                      </a:r>
-                    </a:p>
-                  </a:txBody>
-                  <a:tcPr marL="54864" marR="54864" marT="27432" marB="27432" anchor="ctr">
-                    <a:solidFill>
-                      <a:srgbClr val="FFFFFF"/>
-                    </a:solidFill>
-                  </a:tcPr>
-                </a:tc>
-                <a:tc>
-                  <a:txBody>
-                    <a:bodyPr wrap="square"/>
-                    <a:lstStyle/>
-                    <a:p>
-                      <a:pPr algn="l"/>
-                      <a:r>
-                        <a:rPr sz="1000">
-                          <a:solidFill>
-                            <a:srgbClr val="1F2A37"/>
-                          </a:solidFill>
-                          <a:latin typeface="Calibri"/>
-                        </a:rPr>
-                        <a:t>Dr. Sreekumar Kurungot</a:t>
-                      </a:r>
-                    </a:p>
-                  </a:txBody>
-                  <a:tcPr marL="54864" marR="54864" marT="27432" marB="27432" anchor="ctr">
-                    <a:solidFill>
-                      <a:srgbClr val="FFFFFF"/>
-                    </a:solidFill>
-                  </a:tcPr>
-                </a:tc>
-                <a:tc>
-                  <a:txBody>
-                    <a:bodyPr wrap="square"/>
-                    <a:lstStyle/>
-                    <a:p>
-                      <a:pPr algn="l"/>
-                      <a:r>
-                        <a:rPr sz="1000">
-                          <a:solidFill>
-                            <a:srgbClr val="1F2A37"/>
-                          </a:solidFill>
-                          <a:latin typeface="Calibri"/>
-                        </a:rPr>
-                        <a:t>NCL</a:t>
-                      </a:r>
-                    </a:p>
-                  </a:txBody>
-                  <a:tcPr marL="54864" marR="54864" marT="27432" marB="27432" anchor="ctr">
-                    <a:solidFill>
-                      <a:srgbClr val="FFFFFF"/>
-                    </a:solidFill>
-                  </a:tcPr>
-                </a:tc>
-                <a:tc>
-                  <a:txBody>
-                    <a:bodyPr wrap="square"/>
-                    <a:lstStyle/>
-                    <a:p>
-                      <a:pPr algn="r"/>
-                      <a:r>
-                        <a:rPr sz="1000">
-                          <a:solidFill>
-                            <a:srgbClr val="1F2A37"/>
-                          </a:solidFill>
-                          <a:latin typeface="Calibri"/>
-                        </a:rPr>
-                        <a:t>154</a:t>
-                      </a:r>
-                    </a:p>
-                  </a:txBody>
-                  <a:tcPr marL="54864" marR="54864" marT="27432" marB="27432" anchor="ctr">
-                    <a:solidFill>
-                      <a:srgbClr val="FFFFFF"/>
-                    </a:solidFill>
-                  </a:tcPr>
-                </a:tc>
-                <a:tc>
-                  <a:txBody>
-                    <a:bodyPr wrap="square"/>
-                    <a:lstStyle/>
-                    <a:p>
-                      <a:pPr algn="r"/>
-                      <a:r>
-                        <a:rPr sz="1000">
-                          <a:solidFill>
-                            <a:srgbClr val="1F2A37"/>
-                          </a:solidFill>
-                          <a:latin typeface="Calibri"/>
-                        </a:rPr>
-                        <a:t>0.026</a:t>
-                      </a:r>
-                    </a:p>
-                  </a:txBody>
-                  <a:tcPr marL="54864" marR="54864" marT="27432" marB="27432" anchor="ctr">
-                    <a:solidFill>
-                      <a:srgbClr val="FFFFFF"/>
-                    </a:solidFill>
-                  </a:tcPr>
-                </a:tc>
-                <a:tc>
-                  <a:txBody>
-                    <a:bodyPr wrap="square"/>
-                    <a:lstStyle/>
-                    <a:p>
-                      <a:pPr algn="r"/>
-                      <a:r>
-                        <a:rPr sz="1000">
-                          <a:solidFill>
-                            <a:srgbClr val="1F2A37"/>
-                          </a:solidFill>
-                          <a:latin typeface="Calibri"/>
-                        </a:rPr>
-                        <a:t>—</a:t>
-                      </a:r>
-                    </a:p>
-                  </a:txBody>
-                  <a:tcPr marL="54864" marR="54864" marT="27432" marB="27432" anchor="ctr">
-                    <a:solidFill>
-                      <a:srgbClr val="FFFFFF"/>
-                    </a:solidFill>
-                  </a:tcPr>
-                </a:tc>
-                <a:tc>
-                  <a:txBody>
-                    <a:bodyPr wrap="square"/>
-                    <a:lstStyle/>
-                    <a:p>
-                      <a:pPr algn="r"/>
-                      <a:r>
-                        <a:rPr sz="1000">
-                          <a:solidFill>
-                            <a:srgbClr val="1F2A37"/>
-                          </a:solidFill>
-                          <a:latin typeface="Calibri"/>
-                        </a:rPr>
-                        <a:t>1</a:t>
-                      </a:r>
-                    </a:p>
-                  </a:txBody>
-                  <a:tcPr marL="54864" marR="54864" marT="27432" marB="27432" anchor="ctr">
-                    <a:solidFill>
-                      <a:srgbClr val="FFFFFF"/>
-                    </a:solidFill>
-                  </a:tcPr>
-                </a:tc>
-              </a:tr>
-              <a:tr h="329184">
-                <a:tc>
-                  <a:txBody>
-                    <a:bodyPr wrap="square"/>
-                    <a:lstStyle/>
-                    <a:p>
-                      <a:pPr algn="l"/>
-                      <a:r>
-                        <a:rPr sz="1000">
-                          <a:solidFill>
-                            <a:srgbClr val="1F2A37"/>
-                          </a:solidFill>
-                          <a:latin typeface="Calibri"/>
-                        </a:rPr>
-                        <a:t>8</a:t>
-                      </a:r>
-                    </a:p>
-                  </a:txBody>
-                  <a:tcPr marL="54864" marR="54864" marT="27432" marB="27432" anchor="ctr">
-                    <a:solidFill>
-                      <a:srgbClr val="F2F4F7"/>
-                    </a:solidFill>
-                  </a:tcPr>
-                </a:tc>
-                <a:tc>
-                  <a:txBody>
-                    <a:bodyPr wrap="square"/>
-                    <a:lstStyle/>
-                    <a:p>
-                      <a:pPr algn="l"/>
-                      <a:r>
-                        <a:rPr sz="1000">
-                          <a:solidFill>
-                            <a:srgbClr val="1F2A37"/>
-                          </a:solidFill>
-                          <a:latin typeface="Calibri"/>
-                        </a:rPr>
-                        <a:t>Chityal Ganesh Kumar</a:t>
-                      </a:r>
-                    </a:p>
-                  </a:txBody>
-                  <a:tcPr marL="54864" marR="54864" marT="27432" marB="27432" anchor="ctr">
-                    <a:solidFill>
-                      <a:srgbClr val="F2F4F7"/>
-                    </a:solidFill>
-                  </a:tcPr>
-                </a:tc>
-                <a:tc>
-                  <a:txBody>
-                    <a:bodyPr wrap="square"/>
-                    <a:lstStyle/>
-                    <a:p>
-                      <a:pPr algn="l"/>
-                      <a:r>
-                        <a:rPr sz="1000">
-                          <a:solidFill>
-                            <a:srgbClr val="1F2A37"/>
-                          </a:solidFill>
-                          <a:latin typeface="Calibri"/>
-                        </a:rPr>
-                        <a:t>IICT</a:t>
-                      </a:r>
-                    </a:p>
-                  </a:txBody>
-                  <a:tcPr marL="54864" marR="54864" marT="27432" marB="27432" anchor="ctr">
-                    <a:solidFill>
-                      <a:srgbClr val="F2F4F7"/>
-                    </a:solidFill>
-                  </a:tcPr>
-                </a:tc>
-                <a:tc>
-                  <a:txBody>
-                    <a:bodyPr wrap="square"/>
-                    <a:lstStyle/>
-                    <a:p>
-                      <a:pPr algn="r"/>
-                      <a:r>
-                        <a:rPr sz="1000">
-                          <a:solidFill>
-                            <a:srgbClr val="1F2A37"/>
-                          </a:solidFill>
-                          <a:latin typeface="Calibri"/>
-                        </a:rPr>
-                        <a:t>152</a:t>
-                      </a:r>
-                    </a:p>
-                  </a:txBody>
-                  <a:tcPr marL="54864" marR="54864" marT="27432" marB="27432" anchor="ctr">
-                    <a:solidFill>
-                      <a:srgbClr val="F2F4F7"/>
-                    </a:solidFill>
-                  </a:tcPr>
-                </a:tc>
-                <a:tc>
-                  <a:txBody>
-                    <a:bodyPr wrap="square"/>
-                    <a:lstStyle/>
-                    <a:p>
-                      <a:pPr algn="r"/>
-                      <a:r>
-                        <a:rPr sz="1000">
-                          <a:solidFill>
-                            <a:srgbClr val="1F2A37"/>
-                          </a:solidFill>
-                          <a:latin typeface="Calibri"/>
-                        </a:rPr>
-                        <a:t>0.012</a:t>
-                      </a:r>
-                    </a:p>
-                  </a:txBody>
-                  <a:tcPr marL="54864" marR="54864" marT="27432" marB="27432" anchor="ctr">
-                    <a:solidFill>
-                      <a:srgbClr val="F2F4F7"/>
-                    </a:solidFill>
-                  </a:tcPr>
-                </a:tc>
-                <a:tc>
-                  <a:txBody>
-                    <a:bodyPr wrap="square"/>
-                    <a:lstStyle/>
-                    <a:p>
-                      <a:pPr algn="r"/>
-                      <a:r>
-                        <a:rPr sz="1000">
-                          <a:solidFill>
-                            <a:srgbClr val="1F2A37"/>
-                          </a:solidFill>
-                          <a:latin typeface="Calibri"/>
-                        </a:rPr>
-                        <a:t>—</a:t>
-                      </a:r>
-                    </a:p>
-                  </a:txBody>
-                  <a:tcPr marL="54864" marR="54864" marT="27432" marB="27432" anchor="ctr">
-                    <a:solidFill>
-                      <a:srgbClr val="F2F4F7"/>
-                    </a:solidFill>
-                  </a:tcPr>
-                </a:tc>
-                <a:tc>
-                  <a:txBody>
-                    <a:bodyPr wrap="square"/>
-                    <a:lstStyle/>
-                    <a:p>
-                      <a:pPr algn="r"/>
-                      <a:r>
-                        <a:rPr sz="1000">
-                          <a:solidFill>
-                            <a:srgbClr val="1F2A37"/>
-                          </a:solidFill>
-                          <a:latin typeface="Calibri"/>
-                        </a:rPr>
-                        <a:t>9</a:t>
-                      </a:r>
-                    </a:p>
-                  </a:txBody>
-                  <a:tcPr marL="54864" marR="54864" marT="27432" marB="27432" anchor="ctr">
-                    <a:solidFill>
-                      <a:srgbClr val="F2F4F7"/>
-                    </a:solidFill>
-                  </a:tcPr>
-                </a:tc>
-              </a:tr>
-              <a:tr h="329184">
-                <a:tc>
-                  <a:txBody>
-                    <a:bodyPr wrap="square"/>
-                    <a:lstStyle/>
-                    <a:p>
-                      <a:pPr algn="l"/>
-                      <a:r>
-                        <a:rPr sz="1000">
-                          <a:solidFill>
-                            <a:srgbClr val="1F2A37"/>
-                          </a:solidFill>
-                          <a:latin typeface="Calibri"/>
-                        </a:rPr>
-                        <a:t>9</a:t>
-                      </a:r>
-                    </a:p>
-                  </a:txBody>
-                  <a:tcPr marL="54864" marR="54864" marT="27432" marB="27432" anchor="ctr">
-                    <a:solidFill>
-                      <a:srgbClr val="FFFFFF"/>
-                    </a:solidFill>
-                  </a:tcPr>
-                </a:tc>
-                <a:tc>
-                  <a:txBody>
-                    <a:bodyPr wrap="square"/>
-                    <a:lstStyle/>
-                    <a:p>
-                      <a:pPr algn="l"/>
-                      <a:r>
-                        <a:rPr sz="1000">
-                          <a:solidFill>
-                            <a:srgbClr val="1F2A37"/>
-                          </a:solidFill>
-                          <a:latin typeface="Calibri"/>
-                        </a:rPr>
-                        <a:t>Dr. Andugulapati Sai Balagi</a:t>
-                      </a:r>
-                    </a:p>
-                  </a:txBody>
-                  <a:tcPr marL="54864" marR="54864" marT="27432" marB="27432" anchor="ctr">
-                    <a:solidFill>
-                      <a:srgbClr val="FFFFFF"/>
-                    </a:solidFill>
-                  </a:tcPr>
-                </a:tc>
-                <a:tc>
-                  <a:txBody>
-                    <a:bodyPr wrap="square"/>
-                    <a:lstStyle/>
-                    <a:p>
-                      <a:pPr algn="l"/>
-                      <a:r>
-                        <a:rPr sz="1000">
-                          <a:solidFill>
-                            <a:srgbClr val="1F2A37"/>
-                          </a:solidFill>
-                          <a:latin typeface="Calibri"/>
-                        </a:rPr>
-                        <a:t>IICT</a:t>
-                      </a:r>
-                    </a:p>
-                  </a:txBody>
-                  <a:tcPr marL="54864" marR="54864" marT="27432" marB="27432" anchor="ctr">
-                    <a:solidFill>
-                      <a:srgbClr val="FFFFFF"/>
-                    </a:solidFill>
-                  </a:tcPr>
-                </a:tc>
-                <a:tc>
-                  <a:txBody>
-                    <a:bodyPr wrap="square"/>
-                    <a:lstStyle/>
-                    <a:p>
-                      <a:pPr algn="r"/>
-                      <a:r>
-                        <a:rPr sz="1000">
-                          <a:solidFill>
-                            <a:srgbClr val="1F2A37"/>
-                          </a:solidFill>
-                          <a:latin typeface="Calibri"/>
-                        </a:rPr>
-                        <a:t>151</a:t>
-                      </a:r>
-                    </a:p>
-                  </a:txBody>
-                  <a:tcPr marL="54864" marR="54864" marT="27432" marB="27432" anchor="ctr">
-                    <a:solidFill>
-                      <a:srgbClr val="FFFFFF"/>
-                    </a:solidFill>
-                  </a:tcPr>
-                </a:tc>
-                <a:tc>
-                  <a:txBody>
-                    <a:bodyPr wrap="square"/>
-                    <a:lstStyle/>
-                    <a:p>
-                      <a:pPr algn="r"/>
-                      <a:r>
-                        <a:rPr sz="1000">
-                          <a:solidFill>
-                            <a:srgbClr val="1F2A37"/>
-                          </a:solidFill>
-                          <a:latin typeface="Calibri"/>
-                        </a:rPr>
-                        <a:t>0.019</a:t>
-                      </a:r>
-                    </a:p>
-                  </a:txBody>
-                  <a:tcPr marL="54864" marR="54864" marT="27432" marB="27432" anchor="ctr">
-                    <a:solidFill>
-                      <a:srgbClr val="FFFFFF"/>
-                    </a:solidFill>
-                  </a:tcPr>
-                </a:tc>
-                <a:tc>
-                  <a:txBody>
-                    <a:bodyPr wrap="square"/>
-                    <a:lstStyle/>
-                    <a:p>
-                      <a:pPr algn="r"/>
-                      <a:r>
-                        <a:rPr sz="1000">
-                          <a:solidFill>
-                            <a:srgbClr val="1F2A37"/>
-                          </a:solidFill>
-                          <a:latin typeface="Calibri"/>
-                        </a:rPr>
-                        <a:t>—</a:t>
-                      </a:r>
-                    </a:p>
-                  </a:txBody>
-                  <a:tcPr marL="54864" marR="54864" marT="27432" marB="27432" anchor="ctr">
-                    <a:solidFill>
-                      <a:srgbClr val="FFFFFF"/>
-                    </a:solidFill>
-                  </a:tcPr>
-                </a:tc>
-                <a:tc>
-                  <a:txBody>
-                    <a:bodyPr wrap="square"/>
-                    <a:lstStyle/>
-                    <a:p>
-                      <a:pPr algn="r"/>
-                      <a:r>
-                        <a:rPr sz="1000">
-                          <a:solidFill>
-                            <a:srgbClr val="1F2A37"/>
-                          </a:solidFill>
-                          <a:latin typeface="Calibri"/>
-                        </a:rPr>
-                        <a:t>2</a:t>
-                      </a:r>
-                    </a:p>
-                  </a:txBody>
-                  <a:tcPr marL="54864" marR="54864" marT="27432" marB="27432" anchor="ctr">
-                    <a:solidFill>
-                      <a:srgbClr val="FFFFFF"/>
-                    </a:solidFill>
-                  </a:tcPr>
-                </a:tc>
-              </a:tr>
-              <a:tr h="329184">
-                <a:tc>
-                  <a:txBody>
-                    <a:bodyPr wrap="square"/>
-                    <a:lstStyle/>
-                    <a:p>
-                      <a:pPr algn="l"/>
-                      <a:r>
-                        <a:rPr sz="1000">
-                          <a:solidFill>
-                            <a:srgbClr val="1F2A37"/>
-                          </a:solidFill>
-                          <a:latin typeface="Calibri"/>
-                        </a:rPr>
-                        <a:t>10</a:t>
-                      </a:r>
-                    </a:p>
-                  </a:txBody>
-                  <a:tcPr marL="54864" marR="54864" marT="27432" marB="27432" anchor="ctr">
-                    <a:solidFill>
-                      <a:srgbClr val="F2F4F7"/>
-                    </a:solidFill>
-                  </a:tcPr>
-                </a:tc>
-                <a:tc>
-                  <a:txBody>
-                    <a:bodyPr wrap="square"/>
-                    <a:lstStyle/>
-                    <a:p>
-                      <a:pPr algn="l"/>
-                      <a:r>
-                        <a:rPr sz="1000">
-                          <a:solidFill>
-                            <a:srgbClr val="1F2A37"/>
-                          </a:solidFill>
-                          <a:latin typeface="Calibri"/>
-                        </a:rPr>
-                        <a:t>Ramakrishna Sistla</a:t>
-                      </a:r>
-                    </a:p>
-                  </a:txBody>
-                  <a:tcPr marL="54864" marR="54864" marT="27432" marB="27432" anchor="ctr">
-                    <a:solidFill>
-                      <a:srgbClr val="F2F4F7"/>
-                    </a:solidFill>
-                  </a:tcPr>
-                </a:tc>
-                <a:tc>
-                  <a:txBody>
-                    <a:bodyPr wrap="square"/>
-                    <a:lstStyle/>
-                    <a:p>
-                      <a:pPr algn="l"/>
-                      <a:r>
-                        <a:rPr sz="1000">
-                          <a:solidFill>
-                            <a:srgbClr val="1F2A37"/>
-                          </a:solidFill>
-                          <a:latin typeface="Calibri"/>
-                        </a:rPr>
-                        <a:t>IICT</a:t>
-                      </a:r>
-                    </a:p>
-                  </a:txBody>
-                  <a:tcPr marL="54864" marR="54864" marT="27432" marB="27432" anchor="ctr">
-                    <a:solidFill>
-                      <a:srgbClr val="F2F4F7"/>
-                    </a:solidFill>
-                  </a:tcPr>
-                </a:tc>
-                <a:tc>
-                  <a:txBody>
-                    <a:bodyPr wrap="square"/>
-                    <a:lstStyle/>
-                    <a:p>
-                      <a:pPr algn="r"/>
-                      <a:r>
-                        <a:rPr sz="1000">
-                          <a:solidFill>
-                            <a:srgbClr val="1F2A37"/>
-                          </a:solidFill>
-                          <a:latin typeface="Calibri"/>
-                        </a:rPr>
-                        <a:t>150</a:t>
-                      </a:r>
-                    </a:p>
-                  </a:txBody>
-                  <a:tcPr marL="54864" marR="54864" marT="27432" marB="27432" anchor="ctr">
-                    <a:solidFill>
-                      <a:srgbClr val="F2F4F7"/>
-                    </a:solidFill>
-                  </a:tcPr>
-                </a:tc>
-                <a:tc>
-                  <a:txBody>
-                    <a:bodyPr wrap="square"/>
-                    <a:lstStyle/>
-                    <a:p>
-                      <a:pPr algn="r"/>
-                      <a:r>
-                        <a:rPr sz="1000">
-                          <a:solidFill>
-                            <a:srgbClr val="1F2A37"/>
-                          </a:solidFill>
-                          <a:latin typeface="Calibri"/>
-                        </a:rPr>
-                        <a:t>0.064</a:t>
-                      </a:r>
-                    </a:p>
-                  </a:txBody>
-                  <a:tcPr marL="54864" marR="54864" marT="27432" marB="27432" anchor="ctr">
-                    <a:solidFill>
-                      <a:srgbClr val="F2F4F7"/>
-                    </a:solidFill>
-                  </a:tcPr>
-                </a:tc>
-                <a:tc>
-                  <a:txBody>
-                    <a:bodyPr wrap="square"/>
-                    <a:lstStyle/>
-                    <a:p>
-                      <a:pPr algn="r"/>
-                      <a:r>
-                        <a:rPr sz="1000">
-                          <a:solidFill>
-                            <a:srgbClr val="1F2A37"/>
-                          </a:solidFill>
-                          <a:latin typeface="Calibri"/>
-                        </a:rPr>
-                        <a:t>#4</a:t>
-                      </a:r>
-                    </a:p>
-                  </a:txBody>
-                  <a:tcPr marL="54864" marR="54864" marT="27432" marB="27432" anchor="ctr">
-                    <a:solidFill>
-                      <a:srgbClr val="F2F4F7"/>
-                    </a:solidFill>
-                  </a:tcPr>
-                </a:tc>
-                <a:tc>
-                  <a:txBody>
-                    <a:bodyPr wrap="square"/>
-                    <a:lstStyle/>
-                    <a:p>
-                      <a:pPr algn="r"/>
-                      <a:r>
-                        <a:rPr sz="1000">
-                          <a:solidFill>
-                            <a:srgbClr val="1F2A37"/>
-                          </a:solidFill>
-                          <a:latin typeface="Calibri"/>
-                        </a:rPr>
-                        <a:t>2</a:t>
+                      <a:pPr algn="l"/>
+                      <a:r>
+                        <a:rPr sz="850">
+                          <a:solidFill>
+                            <a:srgbClr val="1F2A37"/>
+                          </a:solidFill>
+                          <a:latin typeface="Calibri"/>
+                        </a:rPr>
+                        <a:t>20.0% of CSIR-IICT's recent papers (23.3% of its citations) are led solely by scientists likely to retire within ~5 years. Highest exposure: Energy &amp; Environmental Engg. (69.3%).</a:t>
                       </a:r>
                     </a:p>
                   </a:txBody>
@@ -9545,191 +7608,9 @@
           </a:graphicData>
         </a:graphic>
       </p:graphicFrame>
-      <p:graphicFrame>
-        <p:nvGraphicFramePr>
-          <p:cNvPr id="14" name="Community chart"/>
-          <p:cNvGraphicFramePr>
-            <a:graphicFrameLocks noGrp="1"/>
-          </p:cNvGraphicFramePr>
-          <p:nvPr/>
-        </p:nvGraphicFramePr>
-        <p:xfrm>
-          <a:off x="7589520" y="2468880"/>
-          <a:ext cx="4099255" cy="1965960"/>
-        </p:xfrm>
-        <a:graphic>
-          <a:graphicData uri="http://schemas.openxmlformats.org/drawingml/2006/chart">
-            <c:chart xmlns:c="http://schemas.openxmlformats.org/drawingml/2006/chart" r:id="rId2"/>
-          </a:graphicData>
-        </a:graphic>
-      </p:graphicFrame>
       <p:sp>
         <p:nvSpPr>
-          <p:cNvPr id="15" name="TextBox 14"/>
-          <p:cNvSpPr txBox="1"/>
-          <p:nvPr/>
-        </p:nvSpPr>
-        <p:spPr>
-          <a:xfrm>
-            <a:off x="7589520" y="4526280"/>
-            <a:ext cx="4099255" cy="1737360"/>
-          </a:xfrm>
-          <a:prstGeom prst="rect">
-            <a:avLst/>
-          </a:prstGeom>
-          <a:noFill/>
-        </p:spPr>
-        <p:txBody>
-          <a:bodyPr wrap="square" anchor="t" lIns="0" rIns="0" tIns="0" bIns="0">
-            <a:spAutoFit/>
-          </a:bodyPr>
-          <a:lstStyle/>
-          <a:p>
-            <a:pPr algn="l">
-              <a:spcAft>
-                <a:spcPts val="200"/>
-              </a:spcAft>
-            </a:pPr>
-            <a:r>
-              <a:rPr sz="1200" b="1">
-                <a:solidFill>
-                  <a:srgbClr val="1F2A37"/>
-                </a:solidFill>
-                <a:latin typeface="Calibri"/>
-              </a:rPr>
-              <a:t>Top brokers by betweenness</a:t>
-            </a:r>
-          </a:p>
-          <a:p>
-            <a:pPr algn="l">
-              <a:spcAft>
-                <a:spcPts val="200"/>
-              </a:spcAft>
-            </a:pPr>
-            <a:r>
-              <a:rPr sz="1100" b="1">
-                <a:solidFill>
-                  <a:srgbClr val="2B5C8F"/>
-                </a:solidFill>
-                <a:latin typeface="Calibri"/>
-              </a:rPr>
-              <a:t>Balasubramanian Sridhar </a:t>
-            </a:r>
-            <a:r>
-              <a:rPr sz="1100" b="0">
-                <a:solidFill>
-                  <a:srgbClr val="1F2A37"/>
-                </a:solidFill>
-                <a:latin typeface="Calibri"/>
-              </a:rPr>
-              <a:t>IICT · 0.096 · degree 380</a:t>
-            </a:r>
-          </a:p>
-          <a:p>
-            <a:pPr algn="l">
-              <a:spcAft>
-                <a:spcPts val="200"/>
-              </a:spcAft>
-            </a:pPr>
-            <a:r>
-              <a:rPr sz="1100" b="1">
-                <a:solidFill>
-                  <a:srgbClr val="2B5C8F"/>
-                </a:solidFill>
-                <a:latin typeface="Calibri"/>
-              </a:rPr>
-              <a:t>Dr. Jagadeesh Babu Nanubolu </a:t>
-            </a:r>
-            <a:r>
-              <a:rPr sz="1100" b="0">
-                <a:solidFill>
-                  <a:srgbClr val="1F2A37"/>
-                </a:solidFill>
-                <a:latin typeface="Calibri"/>
-              </a:rPr>
-              <a:t>IICT · 0.090 · degree 285</a:t>
-            </a:r>
-          </a:p>
-          <a:p>
-            <a:pPr algn="l">
-              <a:spcAft>
-                <a:spcPts val="200"/>
-              </a:spcAft>
-            </a:pPr>
-            <a:r>
-              <a:rPr sz="1100" b="1">
-                <a:solidFill>
-                  <a:srgbClr val="D95F02"/>
-                </a:solidFill>
-                <a:latin typeface="Calibri"/>
-              </a:rPr>
-              <a:t>Dr Subrata Kundu </a:t>
-            </a:r>
-            <a:r>
-              <a:rPr sz="1100" b="0">
-                <a:solidFill>
-                  <a:srgbClr val="1F2A37"/>
-                </a:solidFill>
-                <a:latin typeface="Calibri"/>
-              </a:rPr>
-              <a:t>CECRI · 0.072 · degree 137</a:t>
-            </a:r>
-          </a:p>
-          <a:p>
-            <a:pPr algn="l">
-              <a:spcAft>
-                <a:spcPts val="200"/>
-              </a:spcAft>
-            </a:pPr>
-            <a:r>
-              <a:rPr sz="1100" b="1">
-                <a:solidFill>
-                  <a:srgbClr val="2B5C8F"/>
-                </a:solidFill>
-                <a:latin typeface="Calibri"/>
-              </a:rPr>
-              <a:t>Ramakrishna Sistla </a:t>
-            </a:r>
-            <a:r>
-              <a:rPr sz="1100" b="0">
-                <a:solidFill>
-                  <a:srgbClr val="1F2A37"/>
-                </a:solidFill>
-                <a:latin typeface="Calibri"/>
-              </a:rPr>
-              <a:t>IICT · 0.064 · degree 150</a:t>
-            </a:r>
-          </a:p>
-          <a:p>
-            <a:pPr algn="l">
-              <a:spcAft>
-                <a:spcPts val="200"/>
-              </a:spcAft>
-            </a:pPr>
-            <a:r>
-              <a:rPr sz="1100" b="1">
-                <a:solidFill>
-                  <a:srgbClr val="1F2A37"/>
-                </a:solidFill>
-                <a:latin typeface="Calibri"/>
-              </a:rPr>
-              <a:t>Top Indian partners: </a:t>
-            </a:r>
-            <a:r>
-              <a:rPr sz="1100" b="0">
-                <a:solidFill>
-                  <a:srgbClr val="1F2A37"/>
-                </a:solidFill>
-                <a:latin typeface="Calibri"/>
-              </a:rPr>
-              <a:t>Academy of Scientific and Innovative Research (641); Savitribai Phule Pune University (375); Council of Scientific and Industrial Research (337)</a:t>
-            </a:r>
-          </a:p>
-        </p:txBody>
-      </p:sp>
-      <p:sp>
-        <p:nvSpPr>
-          <p:cNvPr id="16" name="Source"/>
+          <p:cNvPr id="6" name="Source"/>
           <p:cNvSpPr txBox="1"/>
           <p:nvPr/>
         </p:nvSpPr>
@@ -9761,7 +7642,7 @@
                 </a:solidFill>
                 <a:latin typeface="Calibri"/>
               </a:rPr>
-              <a:t>Source: stats/tables/network_summary.csv, network_authorship_*.csv, indian_partner_institutions.csv · interactive graphs: </a:t>
+              <a:t>Source: stats/tables/insights/*.json · interactive charts and methodology notes: </a:t>
             </a:r>
             <a:r>
               <a:rPr sz="1000">
@@ -9769,7 +7650,7 @@
                   <a:srgbClr val="1F5FA8"/>
                 </a:solidFill>
                 <a:latin typeface="Calibri"/>
-                <a:hlinkClick r:id="rId3"/>
+                <a:hlinkClick r:id="rId2"/>
               </a:rPr>
               <a:t>https://prathm01s.github.io/dpcn_almost_stable/</a:t>
             </a:r>
@@ -20194,7 +18075,7 @@
                 </a:solidFill>
                 <a:latin typeface="Cambria"/>
               </a:rPr>
-              <a:t>Citation network</a:t>
+              <a:t>Citation &amp; Authorship Network Topology</a:t>
             </a:r>
           </a:p>
         </p:txBody>
@@ -20233,7 +18114,7 @@
                 </a:solidFill>
                 <a:latin typeface="Calibri"/>
               </a:rPr>
-              <a:t>27,268 citation links among 10,988 corpus papers; 1,653 cross between labs. With other Indian institutions: 88,639 citations in, 87,292 out</a:t>
+              <a:t>27,268 citation links (1,653 cross-lab, in/out ratio 1.01); 7,864 authors in 130 Louvain communities (525 cross-lab links)</a:t>
             </a:r>
           </a:p>
         </p:txBody>
@@ -20285,8 +18166,8 @@
         </p:nvSpPr>
         <p:spPr>
           <a:xfrm>
-            <a:off x="502920" y="1463040"/>
-            <a:ext cx="2590724" cy="868680"/>
+            <a:off x="502920" y="1417320"/>
+            <a:ext cx="2625014" cy="868680"/>
           </a:xfrm>
           <a:prstGeom prst="roundRect">
             <a:avLst>
@@ -20331,8 +18212,8 @@
         </p:nvSpPr>
         <p:spPr>
           <a:xfrm>
-            <a:off x="667512" y="1572768"/>
-            <a:ext cx="2261540" cy="685800"/>
+            <a:off x="667512" y="1527048"/>
+            <a:ext cx="2295830" cy="685800"/>
           </a:xfrm>
           <a:prstGeom prst="rect">
             <a:avLst/>
@@ -20373,7 +18254,7 @@
                 </a:solidFill>
                 <a:latin typeface="Calibri"/>
               </a:rPr>
-              <a:t>papers in the in-corpus citation graph</a:t>
+              <a:t>corpus papers in citation graph (27,268 in-cluster links, 1,653 cross-lab)</a:t>
             </a:r>
           </a:p>
         </p:txBody>
@@ -20386,8 +18267,8 @@
         </p:nvSpPr>
         <p:spPr>
           <a:xfrm>
-            <a:off x="3367964" y="1463040"/>
-            <a:ext cx="2590724" cy="868680"/>
+            <a:off x="3356534" y="1417320"/>
+            <a:ext cx="2625014" cy="868680"/>
           </a:xfrm>
           <a:prstGeom prst="roundRect">
             <a:avLst>
@@ -20432,8 +18313,8 @@
         </p:nvSpPr>
         <p:spPr>
           <a:xfrm>
-            <a:off x="3532556" y="1572768"/>
-            <a:ext cx="2261540" cy="685800"/>
+            <a:off x="3521126" y="1527048"/>
+            <a:ext cx="2295830" cy="685800"/>
           </a:xfrm>
           <a:prstGeom prst="rect">
             <a:avLst/>
@@ -20458,7 +18339,7 @@
                 </a:solidFill>
                 <a:latin typeface="Calibri"/>
               </a:rPr>
-              <a:t>7,627</a:t>
+              <a:t>1.01</a:t>
             </a:r>
           </a:p>
           <a:p>
@@ -20474,7 +18355,7 @@
                 </a:solidFill>
                 <a:latin typeface="Calibri"/>
               </a:rPr>
-              <a:t>papers cited ≥1 time within corpus (max in-degree 129)</a:t>
+              <a:t>in / out citation ratio with other Indian insts (88,639 in, 87,292 out)</a:t>
             </a:r>
           </a:p>
         </p:txBody>
@@ -20487,8 +18368,8 @@
         </p:nvSpPr>
         <p:spPr>
           <a:xfrm>
-            <a:off x="6233008" y="1463040"/>
-            <a:ext cx="2590724" cy="868680"/>
+            <a:off x="6210148" y="1417320"/>
+            <a:ext cx="2625014" cy="868680"/>
           </a:xfrm>
           <a:prstGeom prst="roundRect">
             <a:avLst>
@@ -20533,8 +18414,8 @@
         </p:nvSpPr>
         <p:spPr>
           <a:xfrm>
-            <a:off x="6397600" y="1572768"/>
-            <a:ext cx="2261540" cy="685800"/>
+            <a:off x="6374740" y="1527048"/>
+            <a:ext cx="2295830" cy="685800"/>
           </a:xfrm>
           <a:prstGeom prst="rect">
             <a:avLst/>
@@ -20559,7 +18440,7 @@
                 </a:solidFill>
                 <a:latin typeface="Calibri"/>
               </a:rPr>
-              <a:t>1,653</a:t>
+              <a:t>7,864</a:t>
             </a:r>
           </a:p>
           <a:p>
@@ -20575,7 +18456,7 @@
                 </a:solidFill>
                 <a:latin typeface="Calibri"/>
               </a:rPr>
-              <a:t>citation links between the three labs</a:t>
+              <a:t>authors (35,423 co-author pairs, mean degree 9.0)</a:t>
             </a:r>
           </a:p>
         </p:txBody>
@@ -20588,8 +18469,8 @@
         </p:nvSpPr>
         <p:spPr>
           <a:xfrm>
-            <a:off x="9098051" y="1463040"/>
-            <a:ext cx="2590724" cy="868680"/>
+            <a:off x="9063761" y="1417320"/>
+            <a:ext cx="2625014" cy="868680"/>
           </a:xfrm>
           <a:prstGeom prst="roundRect">
             <a:avLst>
@@ -20634,8 +18515,8 @@
         </p:nvSpPr>
         <p:spPr>
           <a:xfrm>
-            <a:off x="9262643" y="1572768"/>
-            <a:ext cx="2261540" cy="685800"/>
+            <a:off x="9228353" y="1527048"/>
+            <a:ext cx="2295830" cy="685800"/>
           </a:xfrm>
           <a:prstGeom prst="rect">
             <a:avLst/>
@@ -20660,7 +18541,7 @@
                 </a:solidFill>
                 <a:latin typeface="Calibri"/>
               </a:rPr>
-              <a:t>1.01</a:t>
+              <a:t>130</a:t>
             </a:r>
           </a:p>
           <a:p>
@@ -20676,1609 +18557,21 @@
                 </a:solidFill>
                 <a:latin typeface="Calibri"/>
               </a:rPr>
-              <a:t>in / out citation ratio with other Indian institutions</a:t>
+              <a:t>Louvain communities (modularity 0.81, 525 cross-lab links)</a:t>
             </a:r>
           </a:p>
         </p:txBody>
       </p:sp>
-      <p:graphicFrame>
-        <p:nvGraphicFramePr>
-          <p:cNvPr id="13" name="PageRank table"/>
-          <p:cNvGraphicFramePr>
-            <a:graphicFrameLocks noGrp="1"/>
-          </p:cNvGraphicFramePr>
-          <p:nvPr/>
-        </p:nvGraphicFramePr>
-        <p:xfrm>
-          <a:off x="502920" y="2514600"/>
-          <a:ext cx="6812278" cy="3621024"/>
-        </p:xfrm>
-        <a:graphic>
-          <a:graphicData uri="http://schemas.openxmlformats.org/drawingml/2006/table">
-            <a:tbl>
-              <a:tblPr firstRow="1">
-                <a:tableStyleId>{5C22544A-7EE6-4342-B048-85BDC9FD1C3A}</a:tableStyleId>
-              </a:tblPr>
-              <a:tblGrid>
-                <a:gridCol w="272491"/>
-                <a:gridCol w="3996537"/>
-                <a:gridCol w="817473"/>
-                <a:gridCol w="499567"/>
-                <a:gridCol w="544982"/>
-                <a:gridCol w="681228"/>
-              </a:tblGrid>
-              <a:tr h="329184">
-                <a:tc>
-                  <a:txBody>
-                    <a:bodyPr wrap="square"/>
-                    <a:lstStyle/>
-                    <a:p>
-                      <a:pPr algn="l"/>
-                      <a:r>
-                        <a:rPr sz="1000" b="1">
-                          <a:solidFill>
-                            <a:srgbClr val="FFFFFF"/>
-                          </a:solidFill>
-                          <a:latin typeface="Calibri"/>
-                        </a:rPr>
-                        <a:t>#</a:t>
-                      </a:r>
-                    </a:p>
-                  </a:txBody>
-                  <a:tcPr marL="54864" marR="54864" marT="27432" marB="27432" anchor="ctr">
-                    <a:solidFill>
-                      <a:srgbClr val="14213D"/>
-                    </a:solidFill>
-                  </a:tcPr>
-                </a:tc>
-                <a:tc>
-                  <a:txBody>
-                    <a:bodyPr wrap="square"/>
-                    <a:lstStyle/>
-                    <a:p>
-                      <a:pPr algn="l"/>
-                      <a:r>
-                        <a:rPr sz="1000" b="1">
-                          <a:solidFill>
-                            <a:srgbClr val="FFFFFF"/>
-                          </a:solidFill>
-                          <a:latin typeface="Calibri"/>
-                        </a:rPr>
-                        <a:t>PageRank top 10</a:t>
-                      </a:r>
-                    </a:p>
-                  </a:txBody>
-                  <a:tcPr marL="54864" marR="54864" marT="27432" marB="27432" anchor="ctr">
-                    <a:solidFill>
-                      <a:srgbClr val="14213D"/>
-                    </a:solidFill>
-                  </a:tcPr>
-                </a:tc>
-                <a:tc>
-                  <a:txBody>
-                    <a:bodyPr wrap="square"/>
-                    <a:lstStyle/>
-                    <a:p>
-                      <a:pPr algn="l"/>
-                      <a:r>
-                        <a:rPr sz="1000" b="1">
-                          <a:solidFill>
-                            <a:srgbClr val="FFFFFF"/>
-                          </a:solidFill>
-                          <a:latin typeface="Calibri"/>
-                        </a:rPr>
-                        <a:t>Lab</a:t>
-                      </a:r>
-                    </a:p>
-                  </a:txBody>
-                  <a:tcPr marL="54864" marR="54864" marT="27432" marB="27432" anchor="ctr">
-                    <a:solidFill>
-                      <a:srgbClr val="14213D"/>
-                    </a:solidFill>
-                  </a:tcPr>
-                </a:tc>
-                <a:tc>
-                  <a:txBody>
-                    <a:bodyPr wrap="square"/>
-                    <a:lstStyle/>
-                    <a:p>
-                      <a:pPr algn="r"/>
-                      <a:r>
-                        <a:rPr sz="1000" b="1">
-                          <a:solidFill>
-                            <a:srgbClr val="FFFFFF"/>
-                          </a:solidFill>
-                          <a:latin typeface="Calibri"/>
-                        </a:rPr>
-                        <a:t>Year</a:t>
-                      </a:r>
-                    </a:p>
-                  </a:txBody>
-                  <a:tcPr marL="54864" marR="54864" marT="27432" marB="27432" anchor="ctr">
-                    <a:solidFill>
-                      <a:srgbClr val="14213D"/>
-                    </a:solidFill>
-                  </a:tcPr>
-                </a:tc>
-                <a:tc>
-                  <a:txBody>
-                    <a:bodyPr wrap="square"/>
-                    <a:lstStyle/>
-                    <a:p>
-                      <a:pPr algn="r"/>
-                      <a:r>
-                        <a:rPr sz="1000" b="1">
-                          <a:solidFill>
-                            <a:srgbClr val="FFFFFF"/>
-                          </a:solidFill>
-                          <a:latin typeface="Calibri"/>
-                        </a:rPr>
-                        <a:t>In-deg</a:t>
-                      </a:r>
-                    </a:p>
-                  </a:txBody>
-                  <a:tcPr marL="54864" marR="54864" marT="27432" marB="27432" anchor="ctr">
-                    <a:solidFill>
-                      <a:srgbClr val="14213D"/>
-                    </a:solidFill>
-                  </a:tcPr>
-                </a:tc>
-                <a:tc>
-                  <a:txBody>
-                    <a:bodyPr wrap="square"/>
-                    <a:lstStyle/>
-                    <a:p>
-                      <a:pPr algn="r"/>
-                      <a:r>
-                        <a:rPr sz="1000" b="1">
-                          <a:solidFill>
-                            <a:srgbClr val="FFFFFF"/>
-                          </a:solidFill>
-                          <a:latin typeface="Calibri"/>
-                        </a:rPr>
-                        <a:t>PR</a:t>
-                      </a:r>
-                    </a:p>
-                  </a:txBody>
-                  <a:tcPr marL="54864" marR="54864" marT="27432" marB="27432" anchor="ctr">
-                    <a:solidFill>
-                      <a:srgbClr val="14213D"/>
-                    </a:solidFill>
-                  </a:tcPr>
-                </a:tc>
-              </a:tr>
-              <a:tr h="329184">
-                <a:tc>
-                  <a:txBody>
-                    <a:bodyPr wrap="square"/>
-                    <a:lstStyle/>
-                    <a:p>
-                      <a:pPr algn="l"/>
-                      <a:r>
-                        <a:rPr sz="1000">
-                          <a:solidFill>
-                            <a:srgbClr val="1F2A37"/>
-                          </a:solidFill>
-                          <a:latin typeface="Calibri"/>
-                        </a:rPr>
-                        <a:t>1</a:t>
-                      </a:r>
-                    </a:p>
-                  </a:txBody>
-                  <a:tcPr marL="54864" marR="54864" marT="27432" marB="27432" anchor="ctr">
-                    <a:solidFill>
-                      <a:srgbClr val="FFFFFF"/>
-                    </a:solidFill>
-                  </a:tcPr>
-                </a:tc>
-                <a:tc>
-                  <a:txBody>
-                    <a:bodyPr wrap="square"/>
-                    <a:lstStyle/>
-                    <a:p>
-                      <a:pPr algn="l"/>
-                      <a:r>
-                        <a:rPr sz="1000">
-                          <a:solidFill>
-                            <a:srgbClr val="1F2A37"/>
-                          </a:solidFill>
-                          <a:latin typeface="Calibri"/>
-                        </a:rPr>
-                        <a:t>Recent Trends and Perspectives in Electrochemical Water…</a:t>
-                      </a:r>
-                    </a:p>
-                  </a:txBody>
-                  <a:tcPr marL="54864" marR="54864" marT="27432" marB="27432" anchor="ctr">
-                    <a:solidFill>
-                      <a:srgbClr val="FFFFFF"/>
-                    </a:solidFill>
-                  </a:tcPr>
-                </a:tc>
-                <a:tc>
-                  <a:txBody>
-                    <a:bodyPr wrap="square"/>
-                    <a:lstStyle/>
-                    <a:p>
-                      <a:pPr algn="l"/>
-                      <a:r>
-                        <a:rPr sz="1000">
-                          <a:solidFill>
-                            <a:srgbClr val="1F2A37"/>
-                          </a:solidFill>
-                          <a:latin typeface="Calibri"/>
-                        </a:rPr>
-                        <a:t>CECRI</a:t>
-                      </a:r>
-                    </a:p>
-                  </a:txBody>
-                  <a:tcPr marL="54864" marR="54864" marT="27432" marB="27432" anchor="ctr">
-                    <a:solidFill>
-                      <a:srgbClr val="FFFFFF"/>
-                    </a:solidFill>
-                  </a:tcPr>
-                </a:tc>
-                <a:tc>
-                  <a:txBody>
-                    <a:bodyPr wrap="square"/>
-                    <a:lstStyle/>
-                    <a:p>
-                      <a:pPr algn="r"/>
-                      <a:r>
-                        <a:rPr sz="1000">
-                          <a:solidFill>
-                            <a:srgbClr val="1F2A37"/>
-                          </a:solidFill>
-                          <a:latin typeface="Calibri"/>
-                        </a:rPr>
-                        <a:t>2016</a:t>
-                      </a:r>
-                    </a:p>
-                  </a:txBody>
-                  <a:tcPr marL="54864" marR="54864" marT="27432" marB="27432" anchor="ctr">
-                    <a:solidFill>
-                      <a:srgbClr val="FFFFFF"/>
-                    </a:solidFill>
-                  </a:tcPr>
-                </a:tc>
-                <a:tc>
-                  <a:txBody>
-                    <a:bodyPr wrap="square"/>
-                    <a:lstStyle/>
-                    <a:p>
-                      <a:pPr algn="r"/>
-                      <a:r>
-                        <a:rPr sz="1000">
-                          <a:solidFill>
-                            <a:srgbClr val="1F2A37"/>
-                          </a:solidFill>
-                          <a:latin typeface="Calibri"/>
-                        </a:rPr>
-                        <a:t>129</a:t>
-                      </a:r>
-                    </a:p>
-                  </a:txBody>
-                  <a:tcPr marL="54864" marR="54864" marT="27432" marB="27432" anchor="ctr">
-                    <a:solidFill>
-                      <a:srgbClr val="FFFFFF"/>
-                    </a:solidFill>
-                  </a:tcPr>
-                </a:tc>
-                <a:tc>
-                  <a:txBody>
-                    <a:bodyPr wrap="square"/>
-                    <a:lstStyle/>
-                    <a:p>
-                      <a:pPr algn="r"/>
-                      <a:r>
-                        <a:rPr sz="1000">
-                          <a:solidFill>
-                            <a:srgbClr val="1F2A37"/>
-                          </a:solidFill>
-                          <a:latin typeface="Calibri"/>
-                        </a:rPr>
-                        <a:t>0.0030</a:t>
-                      </a:r>
-                    </a:p>
-                  </a:txBody>
-                  <a:tcPr marL="54864" marR="54864" marT="27432" marB="27432" anchor="ctr">
-                    <a:solidFill>
-                      <a:srgbClr val="FFFFFF"/>
-                    </a:solidFill>
-                  </a:tcPr>
-                </a:tc>
-              </a:tr>
-              <a:tr h="329184">
-                <a:tc>
-                  <a:txBody>
-                    <a:bodyPr wrap="square"/>
-                    <a:lstStyle/>
-                    <a:p>
-                      <a:pPr algn="l"/>
-                      <a:r>
-                        <a:rPr sz="1000">
-                          <a:solidFill>
-                            <a:srgbClr val="1F2A37"/>
-                          </a:solidFill>
-                          <a:latin typeface="Calibri"/>
-                        </a:rPr>
-                        <a:t>2</a:t>
-                      </a:r>
-                    </a:p>
-                  </a:txBody>
-                  <a:tcPr marL="54864" marR="54864" marT="27432" marB="27432" anchor="ctr">
-                    <a:solidFill>
-                      <a:srgbClr val="F2F4F7"/>
-                    </a:solidFill>
-                  </a:tcPr>
-                </a:tc>
-                <a:tc>
-                  <a:txBody>
-                    <a:bodyPr wrap="square"/>
-                    <a:lstStyle/>
-                    <a:p>
-                      <a:pPr algn="l"/>
-                      <a:r>
-                        <a:rPr sz="1000">
-                          <a:solidFill>
-                            <a:srgbClr val="1F2A37"/>
-                          </a:solidFill>
-                          <a:latin typeface="Calibri"/>
-                        </a:rPr>
-                        <a:t>Pt Nanoparticle Anchored Molecular Self-Assemblies of D…</a:t>
-                      </a:r>
-                    </a:p>
-                  </a:txBody>
-                  <a:tcPr marL="54864" marR="54864" marT="27432" marB="27432" anchor="ctr">
-                    <a:solidFill>
-                      <a:srgbClr val="F2F4F7"/>
-                    </a:solidFill>
-                  </a:tcPr>
-                </a:tc>
-                <a:tc>
-                  <a:txBody>
-                    <a:bodyPr wrap="square"/>
-                    <a:lstStyle/>
-                    <a:p>
-                      <a:pPr algn="l"/>
-                      <a:r>
-                        <a:rPr sz="1000">
-                          <a:solidFill>
-                            <a:srgbClr val="1F2A37"/>
-                          </a:solidFill>
-                          <a:latin typeface="Calibri"/>
-                        </a:rPr>
-                        <a:t>CECRI</a:t>
-                      </a:r>
-                    </a:p>
-                  </a:txBody>
-                  <a:tcPr marL="54864" marR="54864" marT="27432" marB="27432" anchor="ctr">
-                    <a:solidFill>
-                      <a:srgbClr val="F2F4F7"/>
-                    </a:solidFill>
-                  </a:tcPr>
-                </a:tc>
-                <a:tc>
-                  <a:txBody>
-                    <a:bodyPr wrap="square"/>
-                    <a:lstStyle/>
-                    <a:p>
-                      <a:pPr algn="r"/>
-                      <a:r>
-                        <a:rPr sz="1000">
-                          <a:solidFill>
-                            <a:srgbClr val="1F2A37"/>
-                          </a:solidFill>
-                          <a:latin typeface="Calibri"/>
-                        </a:rPr>
-                        <a:t>2016</a:t>
-                      </a:r>
-                    </a:p>
-                  </a:txBody>
-                  <a:tcPr marL="54864" marR="54864" marT="27432" marB="27432" anchor="ctr">
-                    <a:solidFill>
-                      <a:srgbClr val="F2F4F7"/>
-                    </a:solidFill>
-                  </a:tcPr>
-                </a:tc>
-                <a:tc>
-                  <a:txBody>
-                    <a:bodyPr wrap="square"/>
-                    <a:lstStyle/>
-                    <a:p>
-                      <a:pPr algn="r"/>
-                      <a:r>
-                        <a:rPr sz="1000">
-                          <a:solidFill>
-                            <a:srgbClr val="1F2A37"/>
-                          </a:solidFill>
-                          <a:latin typeface="Calibri"/>
-                        </a:rPr>
-                        <a:t>41</a:t>
-                      </a:r>
-                    </a:p>
-                  </a:txBody>
-                  <a:tcPr marL="54864" marR="54864" marT="27432" marB="27432" anchor="ctr">
-                    <a:solidFill>
-                      <a:srgbClr val="F2F4F7"/>
-                    </a:solidFill>
-                  </a:tcPr>
-                </a:tc>
-                <a:tc>
-                  <a:txBody>
-                    <a:bodyPr wrap="square"/>
-                    <a:lstStyle/>
-                    <a:p>
-                      <a:pPr algn="r"/>
-                      <a:r>
-                        <a:rPr sz="1000">
-                          <a:solidFill>
-                            <a:srgbClr val="1F2A37"/>
-                          </a:solidFill>
-                          <a:latin typeface="Calibri"/>
-                        </a:rPr>
-                        <a:t>0.0028</a:t>
-                      </a:r>
-                    </a:p>
-                  </a:txBody>
-                  <a:tcPr marL="54864" marR="54864" marT="27432" marB="27432" anchor="ctr">
-                    <a:solidFill>
-                      <a:srgbClr val="F2F4F7"/>
-                    </a:solidFill>
-                  </a:tcPr>
-                </a:tc>
-              </a:tr>
-              <a:tr h="329184">
-                <a:tc>
-                  <a:txBody>
-                    <a:bodyPr wrap="square"/>
-                    <a:lstStyle/>
-                    <a:p>
-                      <a:pPr algn="l"/>
-                      <a:r>
-                        <a:rPr sz="1000">
-                          <a:solidFill>
-                            <a:srgbClr val="1F2A37"/>
-                          </a:solidFill>
-                          <a:latin typeface="Calibri"/>
-                        </a:rPr>
-                        <a:t>3</a:t>
-                      </a:r>
-                    </a:p>
-                  </a:txBody>
-                  <a:tcPr marL="54864" marR="54864" marT="27432" marB="27432" anchor="ctr">
-                    <a:solidFill>
-                      <a:srgbClr val="FFFFFF"/>
-                    </a:solidFill>
-                  </a:tcPr>
-                </a:tc>
-                <a:tc>
-                  <a:txBody>
-                    <a:bodyPr wrap="square"/>
-                    <a:lstStyle/>
-                    <a:p>
-                      <a:pPr algn="l"/>
-                      <a:r>
-                        <a:rPr sz="1000">
-                          <a:solidFill>
-                            <a:srgbClr val="1F2A37"/>
-                          </a:solidFill>
-                          <a:latin typeface="Calibri"/>
-                        </a:rPr>
-                        <a:t>Unprotected and interconnected Ru 0 nano-chain networks…</a:t>
-                      </a:r>
-                    </a:p>
-                  </a:txBody>
-                  <a:tcPr marL="54864" marR="54864" marT="27432" marB="27432" anchor="ctr">
-                    <a:solidFill>
-                      <a:srgbClr val="FFFFFF"/>
-                    </a:solidFill>
-                  </a:tcPr>
-                </a:tc>
-                <a:tc>
-                  <a:txBody>
-                    <a:bodyPr wrap="square"/>
-                    <a:lstStyle/>
-                    <a:p>
-                      <a:pPr algn="l"/>
-                      <a:r>
-                        <a:rPr sz="1000">
-                          <a:solidFill>
-                            <a:srgbClr val="1F2A37"/>
-                          </a:solidFill>
-                          <a:latin typeface="Calibri"/>
-                        </a:rPr>
-                        <a:t>CECRI</a:t>
-                      </a:r>
-                    </a:p>
-                  </a:txBody>
-                  <a:tcPr marL="54864" marR="54864" marT="27432" marB="27432" anchor="ctr">
-                    <a:solidFill>
-                      <a:srgbClr val="FFFFFF"/>
-                    </a:solidFill>
-                  </a:tcPr>
-                </a:tc>
-                <a:tc>
-                  <a:txBody>
-                    <a:bodyPr wrap="square"/>
-                    <a:lstStyle/>
-                    <a:p>
-                      <a:pPr algn="r"/>
-                      <a:r>
-                        <a:rPr sz="1000">
-                          <a:solidFill>
-                            <a:srgbClr val="1F2A37"/>
-                          </a:solidFill>
-                          <a:latin typeface="Calibri"/>
-                        </a:rPr>
-                        <a:t>2016</a:t>
-                      </a:r>
-                    </a:p>
-                  </a:txBody>
-                  <a:tcPr marL="54864" marR="54864" marT="27432" marB="27432" anchor="ctr">
-                    <a:solidFill>
-                      <a:srgbClr val="FFFFFF"/>
-                    </a:solidFill>
-                  </a:tcPr>
-                </a:tc>
-                <a:tc>
-                  <a:txBody>
-                    <a:bodyPr wrap="square"/>
-                    <a:lstStyle/>
-                    <a:p>
-                      <a:pPr algn="r"/>
-                      <a:r>
-                        <a:rPr sz="1000">
-                          <a:solidFill>
-                            <a:srgbClr val="1F2A37"/>
-                          </a:solidFill>
-                          <a:latin typeface="Calibri"/>
-                        </a:rPr>
-                        <a:t>30</a:t>
-                      </a:r>
-                    </a:p>
-                  </a:txBody>
-                  <a:tcPr marL="54864" marR="54864" marT="27432" marB="27432" anchor="ctr">
-                    <a:solidFill>
-                      <a:srgbClr val="FFFFFF"/>
-                    </a:solidFill>
-                  </a:tcPr>
-                </a:tc>
-                <a:tc>
-                  <a:txBody>
-                    <a:bodyPr wrap="square"/>
-                    <a:lstStyle/>
-                    <a:p>
-                      <a:pPr algn="r"/>
-                      <a:r>
-                        <a:rPr sz="1000">
-                          <a:solidFill>
-                            <a:srgbClr val="1F2A37"/>
-                          </a:solidFill>
-                          <a:latin typeface="Calibri"/>
-                        </a:rPr>
-                        <a:t>0.0027</a:t>
-                      </a:r>
-                    </a:p>
-                  </a:txBody>
-                  <a:tcPr marL="54864" marR="54864" marT="27432" marB="27432" anchor="ctr">
-                    <a:solidFill>
-                      <a:srgbClr val="FFFFFF"/>
-                    </a:solidFill>
-                  </a:tcPr>
-                </a:tc>
-              </a:tr>
-              <a:tr h="329184">
-                <a:tc>
-                  <a:txBody>
-                    <a:bodyPr wrap="square"/>
-                    <a:lstStyle/>
-                    <a:p>
-                      <a:pPr algn="l"/>
-                      <a:r>
-                        <a:rPr sz="1000">
-                          <a:solidFill>
-                            <a:srgbClr val="1F2A37"/>
-                          </a:solidFill>
-                          <a:latin typeface="Calibri"/>
-                        </a:rPr>
-                        <a:t>4</a:t>
-                      </a:r>
-                    </a:p>
-                  </a:txBody>
-                  <a:tcPr marL="54864" marR="54864" marT="27432" marB="27432" anchor="ctr">
-                    <a:solidFill>
-                      <a:srgbClr val="F2F4F7"/>
-                    </a:solidFill>
-                  </a:tcPr>
-                </a:tc>
-                <a:tc>
-                  <a:txBody>
-                    <a:bodyPr wrap="square"/>
-                    <a:lstStyle/>
-                    <a:p>
-                      <a:pPr algn="l"/>
-                      <a:r>
-                        <a:rPr sz="1000">
-                          <a:solidFill>
-                            <a:srgbClr val="1F2A37"/>
-                          </a:solidFill>
-                          <a:latin typeface="Calibri"/>
-                        </a:rPr>
-                        <a:t>Functional Naphthalene Diimides: Synthesis, Properties,…</a:t>
-                      </a:r>
-                    </a:p>
-                  </a:txBody>
-                  <a:tcPr marL="54864" marR="54864" marT="27432" marB="27432" anchor="ctr">
-                    <a:solidFill>
-                      <a:srgbClr val="F2F4F7"/>
-                    </a:solidFill>
-                  </a:tcPr>
-                </a:tc>
-                <a:tc>
-                  <a:txBody>
-                    <a:bodyPr wrap="square"/>
-                    <a:lstStyle/>
-                    <a:p>
-                      <a:pPr algn="l"/>
-                      <a:r>
-                        <a:rPr sz="1000">
-                          <a:solidFill>
-                            <a:srgbClr val="1F2A37"/>
-                          </a:solidFill>
-                          <a:latin typeface="Calibri"/>
-                        </a:rPr>
-                        <a:t>IICT</a:t>
-                      </a:r>
-                    </a:p>
-                  </a:txBody>
-                  <a:tcPr marL="54864" marR="54864" marT="27432" marB="27432" anchor="ctr">
-                    <a:solidFill>
-                      <a:srgbClr val="F2F4F7"/>
-                    </a:solidFill>
-                  </a:tcPr>
-                </a:tc>
-                <a:tc>
-                  <a:txBody>
-                    <a:bodyPr wrap="square"/>
-                    <a:lstStyle/>
-                    <a:p>
-                      <a:pPr algn="r"/>
-                      <a:r>
-                        <a:rPr sz="1000">
-                          <a:solidFill>
-                            <a:srgbClr val="1F2A37"/>
-                          </a:solidFill>
-                          <a:latin typeface="Calibri"/>
-                        </a:rPr>
-                        <a:t>2016</a:t>
-                      </a:r>
-                    </a:p>
-                  </a:txBody>
-                  <a:tcPr marL="54864" marR="54864" marT="27432" marB="27432" anchor="ctr">
-                    <a:solidFill>
-                      <a:srgbClr val="F2F4F7"/>
-                    </a:solidFill>
-                  </a:tcPr>
-                </a:tc>
-                <a:tc>
-                  <a:txBody>
-                    <a:bodyPr wrap="square"/>
-                    <a:lstStyle/>
-                    <a:p>
-                      <a:pPr algn="r"/>
-                      <a:r>
-                        <a:rPr sz="1000">
-                          <a:solidFill>
-                            <a:srgbClr val="1F2A37"/>
-                          </a:solidFill>
-                          <a:latin typeface="Calibri"/>
-                        </a:rPr>
-                        <a:t>53</a:t>
-                      </a:r>
-                    </a:p>
-                  </a:txBody>
-                  <a:tcPr marL="54864" marR="54864" marT="27432" marB="27432" anchor="ctr">
-                    <a:solidFill>
-                      <a:srgbClr val="F2F4F7"/>
-                    </a:solidFill>
-                  </a:tcPr>
-                </a:tc>
-                <a:tc>
-                  <a:txBody>
-                    <a:bodyPr wrap="square"/>
-                    <a:lstStyle/>
-                    <a:p>
-                      <a:pPr algn="r"/>
-                      <a:r>
-                        <a:rPr sz="1000">
-                          <a:solidFill>
-                            <a:srgbClr val="1F2A37"/>
-                          </a:solidFill>
-                          <a:latin typeface="Calibri"/>
-                        </a:rPr>
-                        <a:t>0.0020</a:t>
-                      </a:r>
-                    </a:p>
-                  </a:txBody>
-                  <a:tcPr marL="54864" marR="54864" marT="27432" marB="27432" anchor="ctr">
-                    <a:solidFill>
-                      <a:srgbClr val="F2F4F7"/>
-                    </a:solidFill>
-                  </a:tcPr>
-                </a:tc>
-              </a:tr>
-              <a:tr h="329184">
-                <a:tc>
-                  <a:txBody>
-                    <a:bodyPr wrap="square"/>
-                    <a:lstStyle/>
-                    <a:p>
-                      <a:pPr algn="l"/>
-                      <a:r>
-                        <a:rPr sz="1000">
-                          <a:solidFill>
-                            <a:srgbClr val="1F2A37"/>
-                          </a:solidFill>
-                          <a:latin typeface="Calibri"/>
-                        </a:rPr>
-                        <a:t>5</a:t>
-                      </a:r>
-                    </a:p>
-                  </a:txBody>
-                  <a:tcPr marL="54864" marR="54864" marT="27432" marB="27432" anchor="ctr">
-                    <a:solidFill>
-                      <a:srgbClr val="FFFFFF"/>
-                    </a:solidFill>
-                  </a:tcPr>
-                </a:tc>
-                <a:tc>
-                  <a:txBody>
-                    <a:bodyPr wrap="square"/>
-                    <a:lstStyle/>
-                    <a:p>
-                      <a:pPr algn="l"/>
-                      <a:r>
-                        <a:rPr sz="1000">
-                          <a:solidFill>
-                            <a:srgbClr val="1F2A37"/>
-                          </a:solidFill>
-                          <a:latin typeface="Calibri"/>
-                        </a:rPr>
-                        <a:t>Precision and correctness in the evaluation of electroc…</a:t>
-                      </a:r>
-                    </a:p>
-                  </a:txBody>
-                  <a:tcPr marL="54864" marR="54864" marT="27432" marB="27432" anchor="ctr">
-                    <a:solidFill>
-                      <a:srgbClr val="FFFFFF"/>
-                    </a:solidFill>
-                  </a:tcPr>
-                </a:tc>
-                <a:tc>
-                  <a:txBody>
-                    <a:bodyPr wrap="square"/>
-                    <a:lstStyle/>
-                    <a:p>
-                      <a:pPr algn="l"/>
-                      <a:r>
-                        <a:rPr sz="1000">
-                          <a:solidFill>
-                            <a:srgbClr val="1F2A37"/>
-                          </a:solidFill>
-                          <a:latin typeface="Calibri"/>
-                        </a:rPr>
-                        <a:t>CECRI</a:t>
-                      </a:r>
-                    </a:p>
-                  </a:txBody>
-                  <a:tcPr marL="54864" marR="54864" marT="27432" marB="27432" anchor="ctr">
-                    <a:solidFill>
-                      <a:srgbClr val="FFFFFF"/>
-                    </a:solidFill>
-                  </a:tcPr>
-                </a:tc>
-                <a:tc>
-                  <a:txBody>
-                    <a:bodyPr wrap="square"/>
-                    <a:lstStyle/>
-                    <a:p>
-                      <a:pPr algn="r"/>
-                      <a:r>
-                        <a:rPr sz="1000">
-                          <a:solidFill>
-                            <a:srgbClr val="1F2A37"/>
-                          </a:solidFill>
-                          <a:latin typeface="Calibri"/>
-                        </a:rPr>
-                        <a:t>2018</a:t>
-                      </a:r>
-                    </a:p>
-                  </a:txBody>
-                  <a:tcPr marL="54864" marR="54864" marT="27432" marB="27432" anchor="ctr">
-                    <a:solidFill>
-                      <a:srgbClr val="FFFFFF"/>
-                    </a:solidFill>
-                  </a:tcPr>
-                </a:tc>
-                <a:tc>
-                  <a:txBody>
-                    <a:bodyPr wrap="square"/>
-                    <a:lstStyle/>
-                    <a:p>
-                      <a:pPr algn="r"/>
-                      <a:r>
-                        <a:rPr sz="1000">
-                          <a:solidFill>
-                            <a:srgbClr val="1F2A37"/>
-                          </a:solidFill>
-                          <a:latin typeface="Calibri"/>
-                        </a:rPr>
-                        <a:t>110</a:t>
-                      </a:r>
-                    </a:p>
-                  </a:txBody>
-                  <a:tcPr marL="54864" marR="54864" marT="27432" marB="27432" anchor="ctr">
-                    <a:solidFill>
-                      <a:srgbClr val="FFFFFF"/>
-                    </a:solidFill>
-                  </a:tcPr>
-                </a:tc>
-                <a:tc>
-                  <a:txBody>
-                    <a:bodyPr wrap="square"/>
-                    <a:lstStyle/>
-                    <a:p>
-                      <a:pPr algn="r"/>
-                      <a:r>
-                        <a:rPr sz="1000">
-                          <a:solidFill>
-                            <a:srgbClr val="1F2A37"/>
-                          </a:solidFill>
-                          <a:latin typeface="Calibri"/>
-                        </a:rPr>
-                        <a:t>0.0018</a:t>
-                      </a:r>
-                    </a:p>
-                  </a:txBody>
-                  <a:tcPr marL="54864" marR="54864" marT="27432" marB="27432" anchor="ctr">
-                    <a:solidFill>
-                      <a:srgbClr val="FFFFFF"/>
-                    </a:solidFill>
-                  </a:tcPr>
-                </a:tc>
-              </a:tr>
-              <a:tr h="329184">
-                <a:tc>
-                  <a:txBody>
-                    <a:bodyPr wrap="square"/>
-                    <a:lstStyle/>
-                    <a:p>
-                      <a:pPr algn="l"/>
-                      <a:r>
-                        <a:rPr sz="1000">
-                          <a:solidFill>
-                            <a:srgbClr val="1F2A37"/>
-                          </a:solidFill>
-                          <a:latin typeface="Calibri"/>
-                        </a:rPr>
-                        <a:t>6</a:t>
-                      </a:r>
-                    </a:p>
-                  </a:txBody>
-                  <a:tcPr marL="54864" marR="54864" marT="27432" marB="27432" anchor="ctr">
-                    <a:solidFill>
-                      <a:srgbClr val="F2F4F7"/>
-                    </a:solidFill>
-                  </a:tcPr>
-                </a:tc>
-                <a:tc>
-                  <a:txBody>
-                    <a:bodyPr wrap="square"/>
-                    <a:lstStyle/>
-                    <a:p>
-                      <a:pPr algn="l"/>
-                      <a:r>
-                        <a:rPr sz="1000">
-                          <a:solidFill>
-                            <a:srgbClr val="1F2A37"/>
-                          </a:solidFill>
-                          <a:latin typeface="Calibri"/>
-                        </a:rPr>
-                        <a:t>Waste biorefinery models towards sustainable circular b…</a:t>
-                      </a:r>
-                    </a:p>
-                  </a:txBody>
-                  <a:tcPr marL="54864" marR="54864" marT="27432" marB="27432" anchor="ctr">
-                    <a:solidFill>
-                      <a:srgbClr val="F2F4F7"/>
-                    </a:solidFill>
-                  </a:tcPr>
-                </a:tc>
-                <a:tc>
-                  <a:txBody>
-                    <a:bodyPr wrap="square"/>
-                    <a:lstStyle/>
-                    <a:p>
-                      <a:pPr algn="l"/>
-                      <a:r>
-                        <a:rPr sz="1000">
-                          <a:solidFill>
-                            <a:srgbClr val="1F2A37"/>
-                          </a:solidFill>
-                          <a:latin typeface="Calibri"/>
-                        </a:rPr>
-                        <a:t>IICT</a:t>
-                      </a:r>
-                    </a:p>
-                  </a:txBody>
-                  <a:tcPr marL="54864" marR="54864" marT="27432" marB="27432" anchor="ctr">
-                    <a:solidFill>
-                      <a:srgbClr val="F2F4F7"/>
-                    </a:solidFill>
-                  </a:tcPr>
-                </a:tc>
-                <a:tc>
-                  <a:txBody>
-                    <a:bodyPr wrap="square"/>
-                    <a:lstStyle/>
-                    <a:p>
-                      <a:pPr algn="r"/>
-                      <a:r>
-                        <a:rPr sz="1000">
-                          <a:solidFill>
-                            <a:srgbClr val="1F2A37"/>
-                          </a:solidFill>
-                          <a:latin typeface="Calibri"/>
-                        </a:rPr>
-                        <a:t>2016</a:t>
-                      </a:r>
-                    </a:p>
-                  </a:txBody>
-                  <a:tcPr marL="54864" marR="54864" marT="27432" marB="27432" anchor="ctr">
-                    <a:solidFill>
-                      <a:srgbClr val="F2F4F7"/>
-                    </a:solidFill>
-                  </a:tcPr>
-                </a:tc>
-                <a:tc>
-                  <a:txBody>
-                    <a:bodyPr wrap="square"/>
-                    <a:lstStyle/>
-                    <a:p>
-                      <a:pPr algn="r"/>
-                      <a:r>
-                        <a:rPr sz="1000">
-                          <a:solidFill>
-                            <a:srgbClr val="1F2A37"/>
-                          </a:solidFill>
-                          <a:latin typeface="Calibri"/>
-                        </a:rPr>
-                        <a:t>71</a:t>
-                      </a:r>
-                    </a:p>
-                  </a:txBody>
-                  <a:tcPr marL="54864" marR="54864" marT="27432" marB="27432" anchor="ctr">
-                    <a:solidFill>
-                      <a:srgbClr val="F2F4F7"/>
-                    </a:solidFill>
-                  </a:tcPr>
-                </a:tc>
-                <a:tc>
-                  <a:txBody>
-                    <a:bodyPr wrap="square"/>
-                    <a:lstStyle/>
-                    <a:p>
-                      <a:pPr algn="r"/>
-                      <a:r>
-                        <a:rPr sz="1000">
-                          <a:solidFill>
-                            <a:srgbClr val="1F2A37"/>
-                          </a:solidFill>
-                          <a:latin typeface="Calibri"/>
-                        </a:rPr>
-                        <a:t>0.0017</a:t>
-                      </a:r>
-                    </a:p>
-                  </a:txBody>
-                  <a:tcPr marL="54864" marR="54864" marT="27432" marB="27432" anchor="ctr">
-                    <a:solidFill>
-                      <a:srgbClr val="F2F4F7"/>
-                    </a:solidFill>
-                  </a:tcPr>
-                </a:tc>
-              </a:tr>
-              <a:tr h="329184">
-                <a:tc>
-                  <a:txBody>
-                    <a:bodyPr wrap="square"/>
-                    <a:lstStyle/>
-                    <a:p>
-                      <a:pPr algn="l"/>
-                      <a:r>
-                        <a:rPr sz="1000">
-                          <a:solidFill>
-                            <a:srgbClr val="1F2A37"/>
-                          </a:solidFill>
-                          <a:latin typeface="Calibri"/>
-                        </a:rPr>
-                        <a:t>7</a:t>
-                      </a:r>
-                    </a:p>
-                  </a:txBody>
-                  <a:tcPr marL="54864" marR="54864" marT="27432" marB="27432" anchor="ctr">
-                    <a:solidFill>
-                      <a:srgbClr val="FFFFFF"/>
-                    </a:solidFill>
-                  </a:tcPr>
-                </a:tc>
-                <a:tc>
-                  <a:txBody>
-                    <a:bodyPr wrap="square"/>
-                    <a:lstStyle/>
-                    <a:p>
-                      <a:pPr algn="l"/>
-                      <a:r>
-                        <a:rPr sz="1000">
-                          <a:solidFill>
-                            <a:srgbClr val="1F2A37"/>
-                          </a:solidFill>
-                          <a:latin typeface="Calibri"/>
-                        </a:rPr>
-                        <a:t>Regulation of acidogenic metabolism towards enhanced sh…</a:t>
-                      </a:r>
-                    </a:p>
-                  </a:txBody>
-                  <a:tcPr marL="54864" marR="54864" marT="27432" marB="27432" anchor="ctr">
-                    <a:solidFill>
-                      <a:srgbClr val="FFFFFF"/>
-                    </a:solidFill>
-                  </a:tcPr>
-                </a:tc>
-                <a:tc>
-                  <a:txBody>
-                    <a:bodyPr wrap="square"/>
-                    <a:lstStyle/>
-                    <a:p>
-                      <a:pPr algn="l"/>
-                      <a:r>
-                        <a:rPr sz="1000">
-                          <a:solidFill>
-                            <a:srgbClr val="1F2A37"/>
-                          </a:solidFill>
-                          <a:latin typeface="Calibri"/>
-                        </a:rPr>
-                        <a:t>IICT</a:t>
-                      </a:r>
-                    </a:p>
-                  </a:txBody>
-                  <a:tcPr marL="54864" marR="54864" marT="27432" marB="27432" anchor="ctr">
-                    <a:solidFill>
-                      <a:srgbClr val="FFFFFF"/>
-                    </a:solidFill>
-                  </a:tcPr>
-                </a:tc>
-                <a:tc>
-                  <a:txBody>
-                    <a:bodyPr wrap="square"/>
-                    <a:lstStyle/>
-                    <a:p>
-                      <a:pPr algn="r"/>
-                      <a:r>
-                        <a:rPr sz="1000">
-                          <a:solidFill>
-                            <a:srgbClr val="1F2A37"/>
-                          </a:solidFill>
-                          <a:latin typeface="Calibri"/>
-                        </a:rPr>
-                        <a:t>2016</a:t>
-                      </a:r>
-                    </a:p>
-                  </a:txBody>
-                  <a:tcPr marL="54864" marR="54864" marT="27432" marB="27432" anchor="ctr">
-                    <a:solidFill>
-                      <a:srgbClr val="FFFFFF"/>
-                    </a:solidFill>
-                  </a:tcPr>
-                </a:tc>
-                <a:tc>
-                  <a:txBody>
-                    <a:bodyPr wrap="square"/>
-                    <a:lstStyle/>
-                    <a:p>
-                      <a:pPr algn="r"/>
-                      <a:r>
-                        <a:rPr sz="1000">
-                          <a:solidFill>
-                            <a:srgbClr val="1F2A37"/>
-                          </a:solidFill>
-                          <a:latin typeface="Calibri"/>
-                        </a:rPr>
-                        <a:t>40</a:t>
-                      </a:r>
-                    </a:p>
-                  </a:txBody>
-                  <a:tcPr marL="54864" marR="54864" marT="27432" marB="27432" anchor="ctr">
-                    <a:solidFill>
-                      <a:srgbClr val="FFFFFF"/>
-                    </a:solidFill>
-                  </a:tcPr>
-                </a:tc>
-                <a:tc>
-                  <a:txBody>
-                    <a:bodyPr wrap="square"/>
-                    <a:lstStyle/>
-                    <a:p>
-                      <a:pPr algn="r"/>
-                      <a:r>
-                        <a:rPr sz="1000">
-                          <a:solidFill>
-                            <a:srgbClr val="1F2A37"/>
-                          </a:solidFill>
-                          <a:latin typeface="Calibri"/>
-                        </a:rPr>
-                        <a:t>0.0016</a:t>
-                      </a:r>
-                    </a:p>
-                  </a:txBody>
-                  <a:tcPr marL="54864" marR="54864" marT="27432" marB="27432" anchor="ctr">
-                    <a:solidFill>
-                      <a:srgbClr val="FFFFFF"/>
-                    </a:solidFill>
-                  </a:tcPr>
-                </a:tc>
-              </a:tr>
-              <a:tr h="329184">
-                <a:tc>
-                  <a:txBody>
-                    <a:bodyPr wrap="square"/>
-                    <a:lstStyle/>
-                    <a:p>
-                      <a:pPr algn="l"/>
-                      <a:r>
-                        <a:rPr sz="1000">
-                          <a:solidFill>
-                            <a:srgbClr val="1F2A37"/>
-                          </a:solidFill>
-                          <a:latin typeface="Calibri"/>
-                        </a:rPr>
-                        <a:t>8</a:t>
-                      </a:r>
-                    </a:p>
-                  </a:txBody>
-                  <a:tcPr marL="54864" marR="54864" marT="27432" marB="27432" anchor="ctr">
-                    <a:solidFill>
-                      <a:srgbClr val="F2F4F7"/>
-                    </a:solidFill>
-                  </a:tcPr>
-                </a:tc>
-                <a:tc>
-                  <a:txBody>
-                    <a:bodyPr wrap="square"/>
-                    <a:lstStyle/>
-                    <a:p>
-                      <a:pPr algn="l"/>
-                      <a:r>
-                        <a:rPr sz="1000">
-                          <a:solidFill>
-                            <a:srgbClr val="1F2A37"/>
-                          </a:solidFill>
-                          <a:latin typeface="Calibri"/>
-                        </a:rPr>
-                        <a:t>Pharmaceutical cocrystals: walking the talk</a:t>
-                      </a:r>
-                    </a:p>
-                  </a:txBody>
-                  <a:tcPr marL="54864" marR="54864" marT="27432" marB="27432" anchor="ctr">
-                    <a:solidFill>
-                      <a:srgbClr val="F2F4F7"/>
-                    </a:solidFill>
-                  </a:tcPr>
-                </a:tc>
-                <a:tc>
-                  <a:txBody>
-                    <a:bodyPr wrap="square"/>
-                    <a:lstStyle/>
-                    <a:p>
-                      <a:pPr algn="l"/>
-                      <a:r>
-                        <a:rPr sz="1000">
-                          <a:solidFill>
-                            <a:srgbClr val="1F2A37"/>
-                          </a:solidFill>
-                          <a:latin typeface="Calibri"/>
-                        </a:rPr>
-                        <a:t>NCL</a:t>
-                      </a:r>
-                    </a:p>
-                  </a:txBody>
-                  <a:tcPr marL="54864" marR="54864" marT="27432" marB="27432" anchor="ctr">
-                    <a:solidFill>
-                      <a:srgbClr val="F2F4F7"/>
-                    </a:solidFill>
-                  </a:tcPr>
-                </a:tc>
-                <a:tc>
-                  <a:txBody>
-                    <a:bodyPr wrap="square"/>
-                    <a:lstStyle/>
-                    <a:p>
-                      <a:pPr algn="r"/>
-                      <a:r>
-                        <a:rPr sz="1000">
-                          <a:solidFill>
-                            <a:srgbClr val="1F2A37"/>
-                          </a:solidFill>
-                          <a:latin typeface="Calibri"/>
-                        </a:rPr>
-                        <a:t>2016</a:t>
-                      </a:r>
-                    </a:p>
-                  </a:txBody>
-                  <a:tcPr marL="54864" marR="54864" marT="27432" marB="27432" anchor="ctr">
-                    <a:solidFill>
-                      <a:srgbClr val="F2F4F7"/>
-                    </a:solidFill>
-                  </a:tcPr>
-                </a:tc>
-                <a:tc>
-                  <a:txBody>
-                    <a:bodyPr wrap="square"/>
-                    <a:lstStyle/>
-                    <a:p>
-                      <a:pPr algn="r"/>
-                      <a:r>
-                        <a:rPr sz="1000">
-                          <a:solidFill>
-                            <a:srgbClr val="1F2A37"/>
-                          </a:solidFill>
-                          <a:latin typeface="Calibri"/>
-                        </a:rPr>
-                        <a:t>36</a:t>
-                      </a:r>
-                    </a:p>
-                  </a:txBody>
-                  <a:tcPr marL="54864" marR="54864" marT="27432" marB="27432" anchor="ctr">
-                    <a:solidFill>
-                      <a:srgbClr val="F2F4F7"/>
-                    </a:solidFill>
-                  </a:tcPr>
-                </a:tc>
-                <a:tc>
-                  <a:txBody>
-                    <a:bodyPr wrap="square"/>
-                    <a:lstStyle/>
-                    <a:p>
-                      <a:pPr algn="r"/>
-                      <a:r>
-                        <a:rPr sz="1000">
-                          <a:solidFill>
-                            <a:srgbClr val="1F2A37"/>
-                          </a:solidFill>
-                          <a:latin typeface="Calibri"/>
-                        </a:rPr>
-                        <a:t>0.0016</a:t>
-                      </a:r>
-                    </a:p>
-                  </a:txBody>
-                  <a:tcPr marL="54864" marR="54864" marT="27432" marB="27432" anchor="ctr">
-                    <a:solidFill>
-                      <a:srgbClr val="F2F4F7"/>
-                    </a:solidFill>
-                  </a:tcPr>
-                </a:tc>
-              </a:tr>
-              <a:tr h="329184">
-                <a:tc>
-                  <a:txBody>
-                    <a:bodyPr wrap="square"/>
-                    <a:lstStyle/>
-                    <a:p>
-                      <a:pPr algn="l"/>
-                      <a:r>
-                        <a:rPr sz="1000">
-                          <a:solidFill>
-                            <a:srgbClr val="1F2A37"/>
-                          </a:solidFill>
-                          <a:latin typeface="Calibri"/>
-                        </a:rPr>
-                        <a:t>9</a:t>
-                      </a:r>
-                    </a:p>
-                  </a:txBody>
-                  <a:tcPr marL="54864" marR="54864" marT="27432" marB="27432" anchor="ctr">
-                    <a:solidFill>
-                      <a:srgbClr val="FFFFFF"/>
-                    </a:solidFill>
-                  </a:tcPr>
-                </a:tc>
-                <a:tc>
-                  <a:txBody>
-                    <a:bodyPr wrap="square"/>
-                    <a:lstStyle/>
-                    <a:p>
-                      <a:pPr algn="l"/>
-                      <a:r>
-                        <a:rPr sz="1000">
-                          <a:solidFill>
-                            <a:srgbClr val="1F2A37"/>
-                          </a:solidFill>
-                          <a:latin typeface="Calibri"/>
-                        </a:rPr>
-                        <a:t>Facile and scalable route to sheets-on-sheet mesoporous…</a:t>
-                      </a:r>
-                    </a:p>
-                  </a:txBody>
-                  <a:tcPr marL="54864" marR="54864" marT="27432" marB="27432" anchor="ctr">
-                    <a:solidFill>
-                      <a:srgbClr val="FFFFFF"/>
-                    </a:solidFill>
-                  </a:tcPr>
-                </a:tc>
-                <a:tc>
-                  <a:txBody>
-                    <a:bodyPr wrap="square"/>
-                    <a:lstStyle/>
-                    <a:p>
-                      <a:pPr algn="l"/>
-                      <a:r>
-                        <a:rPr sz="1000">
-                          <a:solidFill>
-                            <a:srgbClr val="1F2A37"/>
-                          </a:solidFill>
-                          <a:latin typeface="Calibri"/>
-                        </a:rPr>
-                        <a:t>CECRI</a:t>
-                      </a:r>
-                    </a:p>
-                  </a:txBody>
-                  <a:tcPr marL="54864" marR="54864" marT="27432" marB="27432" anchor="ctr">
-                    <a:solidFill>
-                      <a:srgbClr val="FFFFFF"/>
-                    </a:solidFill>
-                  </a:tcPr>
-                </a:tc>
-                <a:tc>
-                  <a:txBody>
-                    <a:bodyPr wrap="square"/>
-                    <a:lstStyle/>
-                    <a:p>
-                      <a:pPr algn="r"/>
-                      <a:r>
-                        <a:rPr sz="1000">
-                          <a:solidFill>
-                            <a:srgbClr val="1F2A37"/>
-                          </a:solidFill>
-                          <a:latin typeface="Calibri"/>
-                        </a:rPr>
-                        <a:t>2016</a:t>
-                      </a:r>
-                    </a:p>
-                  </a:txBody>
-                  <a:tcPr marL="54864" marR="54864" marT="27432" marB="27432" anchor="ctr">
-                    <a:solidFill>
-                      <a:srgbClr val="FFFFFF"/>
-                    </a:solidFill>
-                  </a:tcPr>
-                </a:tc>
-                <a:tc>
-                  <a:txBody>
-                    <a:bodyPr wrap="square"/>
-                    <a:lstStyle/>
-                    <a:p>
-                      <a:pPr algn="r"/>
-                      <a:r>
-                        <a:rPr sz="1000">
-                          <a:solidFill>
-                            <a:srgbClr val="1F2A37"/>
-                          </a:solidFill>
-                          <a:latin typeface="Calibri"/>
-                        </a:rPr>
-                        <a:t>18</a:t>
-                      </a:r>
-                    </a:p>
-                  </a:txBody>
-                  <a:tcPr marL="54864" marR="54864" marT="27432" marB="27432" anchor="ctr">
-                    <a:solidFill>
-                      <a:srgbClr val="FFFFFF"/>
-                    </a:solidFill>
-                  </a:tcPr>
-                </a:tc>
-                <a:tc>
-                  <a:txBody>
-                    <a:bodyPr wrap="square"/>
-                    <a:lstStyle/>
-                    <a:p>
-                      <a:pPr algn="r"/>
-                      <a:r>
-                        <a:rPr sz="1000">
-                          <a:solidFill>
-                            <a:srgbClr val="1F2A37"/>
-                          </a:solidFill>
-                          <a:latin typeface="Calibri"/>
-                        </a:rPr>
-                        <a:t>0.0015</a:t>
-                      </a:r>
-                    </a:p>
-                  </a:txBody>
-                  <a:tcPr marL="54864" marR="54864" marT="27432" marB="27432" anchor="ctr">
-                    <a:solidFill>
-                      <a:srgbClr val="FFFFFF"/>
-                    </a:solidFill>
-                  </a:tcPr>
-                </a:tc>
-              </a:tr>
-              <a:tr h="329184">
-                <a:tc>
-                  <a:txBody>
-                    <a:bodyPr wrap="square"/>
-                    <a:lstStyle/>
-                    <a:p>
-                      <a:pPr algn="l"/>
-                      <a:r>
-                        <a:rPr sz="1000">
-                          <a:solidFill>
-                            <a:srgbClr val="1F2A37"/>
-                          </a:solidFill>
-                          <a:latin typeface="Calibri"/>
-                        </a:rPr>
-                        <a:t>10</a:t>
-                      </a:r>
-                    </a:p>
-                  </a:txBody>
-                  <a:tcPr marL="54864" marR="54864" marT="27432" marB="27432" anchor="ctr">
-                    <a:solidFill>
-                      <a:srgbClr val="F2F4F7"/>
-                    </a:solidFill>
-                  </a:tcPr>
-                </a:tc>
-                <a:tc>
-                  <a:txBody>
-                    <a:bodyPr wrap="square"/>
-                    <a:lstStyle/>
-                    <a:p>
-                      <a:pPr algn="l"/>
-                      <a:r>
-                        <a:rPr sz="1000">
-                          <a:solidFill>
-                            <a:srgbClr val="1F2A37"/>
-                          </a:solidFill>
-                          <a:latin typeface="Calibri"/>
-                        </a:rPr>
-                        <a:t>Recent advances in N-heterocyclic carbene (NHC)-catalys…</a:t>
-                      </a:r>
-                    </a:p>
-                  </a:txBody>
-                  <a:tcPr marL="54864" marR="54864" marT="27432" marB="27432" anchor="ctr">
-                    <a:solidFill>
-                      <a:srgbClr val="F2F4F7"/>
-                    </a:solidFill>
-                  </a:tcPr>
-                </a:tc>
-                <a:tc>
-                  <a:txBody>
-                    <a:bodyPr wrap="square"/>
-                    <a:lstStyle/>
-                    <a:p>
-                      <a:pPr algn="l"/>
-                      <a:r>
-                        <a:rPr sz="1000">
-                          <a:solidFill>
-                            <a:srgbClr val="1F2A37"/>
-                          </a:solidFill>
-                          <a:latin typeface="Calibri"/>
-                        </a:rPr>
-                        <a:t>NCL</a:t>
-                      </a:r>
-                    </a:p>
-                  </a:txBody>
-                  <a:tcPr marL="54864" marR="54864" marT="27432" marB="27432" anchor="ctr">
-                    <a:solidFill>
-                      <a:srgbClr val="F2F4F7"/>
-                    </a:solidFill>
-                  </a:tcPr>
-                </a:tc>
-                <a:tc>
-                  <a:txBody>
-                    <a:bodyPr wrap="square"/>
-                    <a:lstStyle/>
-                    <a:p>
-                      <a:pPr algn="r"/>
-                      <a:r>
-                        <a:rPr sz="1000">
-                          <a:solidFill>
-                            <a:srgbClr val="1F2A37"/>
-                          </a:solidFill>
-                          <a:latin typeface="Calibri"/>
-                        </a:rPr>
-                        <a:t>2016</a:t>
-                      </a:r>
-                    </a:p>
-                  </a:txBody>
-                  <a:tcPr marL="54864" marR="54864" marT="27432" marB="27432" anchor="ctr">
-                    <a:solidFill>
-                      <a:srgbClr val="F2F4F7"/>
-                    </a:solidFill>
-                  </a:tcPr>
-                </a:tc>
-                <a:tc>
-                  <a:txBody>
-                    <a:bodyPr wrap="square"/>
-                    <a:lstStyle/>
-                    <a:p>
-                      <a:pPr algn="r"/>
-                      <a:r>
-                        <a:rPr sz="1000">
-                          <a:solidFill>
-                            <a:srgbClr val="1F2A37"/>
-                          </a:solidFill>
-                          <a:latin typeface="Calibri"/>
-                        </a:rPr>
-                        <a:t>28</a:t>
-                      </a:r>
-                    </a:p>
-                  </a:txBody>
-                  <a:tcPr marL="54864" marR="54864" marT="27432" marB="27432" anchor="ctr">
-                    <a:solidFill>
-                      <a:srgbClr val="F2F4F7"/>
-                    </a:solidFill>
-                  </a:tcPr>
-                </a:tc>
-                <a:tc>
-                  <a:txBody>
-                    <a:bodyPr wrap="square"/>
-                    <a:lstStyle/>
-                    <a:p>
-                      <a:pPr algn="r"/>
-                      <a:r>
-                        <a:rPr sz="1000">
-                          <a:solidFill>
-                            <a:srgbClr val="1F2A37"/>
-                          </a:solidFill>
-                          <a:latin typeface="Calibri"/>
-                        </a:rPr>
-                        <a:t>0.0015</a:t>
-                      </a:r>
-                    </a:p>
-                  </a:txBody>
-                  <a:tcPr marL="54864" marR="54864" marT="27432" marB="27432" anchor="ctr">
-                    <a:solidFill>
-                      <a:srgbClr val="F2F4F7"/>
-                    </a:solidFill>
-                  </a:tcPr>
-                </a:tc>
-              </a:tr>
-            </a:tbl>
-          </a:graphicData>
-        </a:graphic>
-      </p:graphicFrame>
-      <p:graphicFrame>
-        <p:nvGraphicFramePr>
-          <p:cNvPr id="14" name="In-degree chart"/>
-          <p:cNvGraphicFramePr>
-            <a:graphicFrameLocks noGrp="1"/>
-          </p:cNvGraphicFramePr>
-          <p:nvPr/>
-        </p:nvGraphicFramePr>
-        <p:xfrm>
-          <a:off x="7589520" y="2468880"/>
-          <a:ext cx="4099255" cy="1965960"/>
-        </p:xfrm>
-        <a:graphic>
-          <a:graphicData uri="http://schemas.openxmlformats.org/drawingml/2006/chart">
-            <c:chart xmlns:c="http://schemas.openxmlformats.org/drawingml/2006/chart" r:id="rId2"/>
-          </a:graphicData>
-        </a:graphic>
-      </p:graphicFrame>
       <p:sp>
         <p:nvSpPr>
-          <p:cNvPr id="15" name="TextBox 14"/>
+          <p:cNvPr id="13" name="TextBox 12"/>
           <p:cNvSpPr txBox="1"/>
           <p:nvPr/>
         </p:nvSpPr>
         <p:spPr>
           <a:xfrm>
-            <a:off x="7589520" y="4526280"/>
-            <a:ext cx="4099255" cy="274320"/>
+            <a:off x="502920" y="2423160"/>
+            <a:ext cx="5432908" cy="274320"/>
           </a:xfrm>
           <a:prstGeom prst="rect">
             <a:avLst/>
@@ -22303,7 +18596,1056 @@
                 </a:solidFill>
                 <a:latin typeface="Calibri"/>
               </a:rPr>
-              <a:t>Citation flow with other Indian institutions</a:t>
+              <a:t>Directed Citation Network: Top PageRank Papers</a:t>
+            </a:r>
+          </a:p>
+        </p:txBody>
+      </p:sp>
+      <p:graphicFrame>
+        <p:nvGraphicFramePr>
+          <p:cNvPr id="14" name="PageRank table"/>
+          <p:cNvGraphicFramePr>
+            <a:graphicFrameLocks noGrp="1"/>
+          </p:cNvGraphicFramePr>
+          <p:nvPr/>
+        </p:nvGraphicFramePr>
+        <p:xfrm>
+          <a:off x="502920" y="2724912"/>
+          <a:ext cx="5432906" cy="1984248"/>
+        </p:xfrm>
+        <a:graphic>
+          <a:graphicData uri="http://schemas.openxmlformats.org/drawingml/2006/table">
+            <a:tbl>
+              <a:tblPr firstRow="1">
+                <a:tableStyleId>{5C22544A-7EE6-4342-B048-85BDC9FD1C3A}</a:tableStyleId>
+              </a:tblPr>
+              <a:tblGrid>
+                <a:gridCol w="273928"/>
+                <a:gridCol w="2921900"/>
+                <a:gridCol w="684820"/>
+                <a:gridCol w="502201"/>
+                <a:gridCol w="502201"/>
+                <a:gridCol w="547856"/>
+              </a:tblGrid>
+              <a:tr h="283464">
+                <a:tc>
+                  <a:txBody>
+                    <a:bodyPr wrap="square"/>
+                    <a:lstStyle/>
+                    <a:p>
+                      <a:pPr algn="l"/>
+                      <a:r>
+                        <a:rPr sz="950" b="1">
+                          <a:solidFill>
+                            <a:srgbClr val="FFFFFF"/>
+                          </a:solidFill>
+                          <a:latin typeface="Calibri"/>
+                        </a:rPr>
+                        <a:t>#</a:t>
+                      </a:r>
+                    </a:p>
+                  </a:txBody>
+                  <a:tcPr marL="54864" marR="54864" marT="27432" marB="27432" anchor="ctr">
+                    <a:solidFill>
+                      <a:srgbClr val="14213D"/>
+                    </a:solidFill>
+                  </a:tcPr>
+                </a:tc>
+                <a:tc>
+                  <a:txBody>
+                    <a:bodyPr wrap="square"/>
+                    <a:lstStyle/>
+                    <a:p>
+                      <a:pPr algn="l"/>
+                      <a:r>
+                        <a:rPr sz="950" b="1">
+                          <a:solidFill>
+                            <a:srgbClr val="FFFFFF"/>
+                          </a:solidFill>
+                          <a:latin typeface="Calibri"/>
+                        </a:rPr>
+                        <a:t>PageRank top papers</a:t>
+                      </a:r>
+                    </a:p>
+                  </a:txBody>
+                  <a:tcPr marL="54864" marR="54864" marT="27432" marB="27432" anchor="ctr">
+                    <a:solidFill>
+                      <a:srgbClr val="14213D"/>
+                    </a:solidFill>
+                  </a:tcPr>
+                </a:tc>
+                <a:tc>
+                  <a:txBody>
+                    <a:bodyPr wrap="square"/>
+                    <a:lstStyle/>
+                    <a:p>
+                      <a:pPr algn="l"/>
+                      <a:r>
+                        <a:rPr sz="950" b="1">
+                          <a:solidFill>
+                            <a:srgbClr val="FFFFFF"/>
+                          </a:solidFill>
+                          <a:latin typeface="Calibri"/>
+                        </a:rPr>
+                        <a:t>Lab</a:t>
+                      </a:r>
+                    </a:p>
+                  </a:txBody>
+                  <a:tcPr marL="54864" marR="54864" marT="27432" marB="27432" anchor="ctr">
+                    <a:solidFill>
+                      <a:srgbClr val="14213D"/>
+                    </a:solidFill>
+                  </a:tcPr>
+                </a:tc>
+                <a:tc>
+                  <a:txBody>
+                    <a:bodyPr wrap="square"/>
+                    <a:lstStyle/>
+                    <a:p>
+                      <a:pPr algn="r"/>
+                      <a:r>
+                        <a:rPr sz="950" b="1">
+                          <a:solidFill>
+                            <a:srgbClr val="FFFFFF"/>
+                          </a:solidFill>
+                          <a:latin typeface="Calibri"/>
+                        </a:rPr>
+                        <a:t>Year</a:t>
+                      </a:r>
+                    </a:p>
+                  </a:txBody>
+                  <a:tcPr marL="54864" marR="54864" marT="27432" marB="27432" anchor="ctr">
+                    <a:solidFill>
+                      <a:srgbClr val="14213D"/>
+                    </a:solidFill>
+                  </a:tcPr>
+                </a:tc>
+                <a:tc>
+                  <a:txBody>
+                    <a:bodyPr wrap="square"/>
+                    <a:lstStyle/>
+                    <a:p>
+                      <a:pPr algn="r"/>
+                      <a:r>
+                        <a:rPr sz="950" b="1">
+                          <a:solidFill>
+                            <a:srgbClr val="FFFFFF"/>
+                          </a:solidFill>
+                          <a:latin typeface="Calibri"/>
+                        </a:rPr>
+                        <a:t>In-deg</a:t>
+                      </a:r>
+                    </a:p>
+                  </a:txBody>
+                  <a:tcPr marL="54864" marR="54864" marT="27432" marB="27432" anchor="ctr">
+                    <a:solidFill>
+                      <a:srgbClr val="14213D"/>
+                    </a:solidFill>
+                  </a:tcPr>
+                </a:tc>
+                <a:tc>
+                  <a:txBody>
+                    <a:bodyPr wrap="square"/>
+                    <a:lstStyle/>
+                    <a:p>
+                      <a:pPr algn="r"/>
+                      <a:r>
+                        <a:rPr sz="950" b="1">
+                          <a:solidFill>
+                            <a:srgbClr val="FFFFFF"/>
+                          </a:solidFill>
+                          <a:latin typeface="Calibri"/>
+                        </a:rPr>
+                        <a:t>PR</a:t>
+                      </a:r>
+                    </a:p>
+                  </a:txBody>
+                  <a:tcPr marL="54864" marR="54864" marT="27432" marB="27432" anchor="ctr">
+                    <a:solidFill>
+                      <a:srgbClr val="14213D"/>
+                    </a:solidFill>
+                  </a:tcPr>
+                </a:tc>
+              </a:tr>
+              <a:tr h="283464">
+                <a:tc>
+                  <a:txBody>
+                    <a:bodyPr wrap="square"/>
+                    <a:lstStyle/>
+                    <a:p>
+                      <a:pPr algn="l"/>
+                      <a:r>
+                        <a:rPr sz="950">
+                          <a:solidFill>
+                            <a:srgbClr val="1F2A37"/>
+                          </a:solidFill>
+                          <a:latin typeface="Calibri"/>
+                        </a:rPr>
+                        <a:t>1</a:t>
+                      </a:r>
+                    </a:p>
+                  </a:txBody>
+                  <a:tcPr marL="54864" marR="54864" marT="27432" marB="27432" anchor="ctr">
+                    <a:solidFill>
+                      <a:srgbClr val="FFFFFF"/>
+                    </a:solidFill>
+                  </a:tcPr>
+                </a:tc>
+                <a:tc>
+                  <a:txBody>
+                    <a:bodyPr wrap="square"/>
+                    <a:lstStyle/>
+                    <a:p>
+                      <a:pPr algn="l"/>
+                      <a:r>
+                        <a:rPr sz="950">
+                          <a:solidFill>
+                            <a:srgbClr val="1F2A37"/>
+                          </a:solidFill>
+                          <a:latin typeface="Calibri"/>
+                        </a:rPr>
+                        <a:t>Recent Trends and Perspectives in Elect…</a:t>
+                      </a:r>
+                    </a:p>
+                  </a:txBody>
+                  <a:tcPr marL="54864" marR="54864" marT="27432" marB="27432" anchor="ctr">
+                    <a:solidFill>
+                      <a:srgbClr val="FFFFFF"/>
+                    </a:solidFill>
+                  </a:tcPr>
+                </a:tc>
+                <a:tc>
+                  <a:txBody>
+                    <a:bodyPr wrap="square"/>
+                    <a:lstStyle/>
+                    <a:p>
+                      <a:pPr algn="l"/>
+                      <a:r>
+                        <a:rPr sz="950">
+                          <a:solidFill>
+                            <a:srgbClr val="1F2A37"/>
+                          </a:solidFill>
+                          <a:latin typeface="Calibri"/>
+                        </a:rPr>
+                        <a:t>CECRI</a:t>
+                      </a:r>
+                    </a:p>
+                  </a:txBody>
+                  <a:tcPr marL="54864" marR="54864" marT="27432" marB="27432" anchor="ctr">
+                    <a:solidFill>
+                      <a:srgbClr val="FFFFFF"/>
+                    </a:solidFill>
+                  </a:tcPr>
+                </a:tc>
+                <a:tc>
+                  <a:txBody>
+                    <a:bodyPr wrap="square"/>
+                    <a:lstStyle/>
+                    <a:p>
+                      <a:pPr algn="r"/>
+                      <a:r>
+                        <a:rPr sz="950">
+                          <a:solidFill>
+                            <a:srgbClr val="1F2A37"/>
+                          </a:solidFill>
+                          <a:latin typeface="Calibri"/>
+                        </a:rPr>
+                        <a:t>2016</a:t>
+                      </a:r>
+                    </a:p>
+                  </a:txBody>
+                  <a:tcPr marL="54864" marR="54864" marT="27432" marB="27432" anchor="ctr">
+                    <a:solidFill>
+                      <a:srgbClr val="FFFFFF"/>
+                    </a:solidFill>
+                  </a:tcPr>
+                </a:tc>
+                <a:tc>
+                  <a:txBody>
+                    <a:bodyPr wrap="square"/>
+                    <a:lstStyle/>
+                    <a:p>
+                      <a:pPr algn="r"/>
+                      <a:r>
+                        <a:rPr sz="950">
+                          <a:solidFill>
+                            <a:srgbClr val="1F2A37"/>
+                          </a:solidFill>
+                          <a:latin typeface="Calibri"/>
+                        </a:rPr>
+                        <a:t>129</a:t>
+                      </a:r>
+                    </a:p>
+                  </a:txBody>
+                  <a:tcPr marL="54864" marR="54864" marT="27432" marB="27432" anchor="ctr">
+                    <a:solidFill>
+                      <a:srgbClr val="FFFFFF"/>
+                    </a:solidFill>
+                  </a:tcPr>
+                </a:tc>
+                <a:tc>
+                  <a:txBody>
+                    <a:bodyPr wrap="square"/>
+                    <a:lstStyle/>
+                    <a:p>
+                      <a:pPr algn="r"/>
+                      <a:r>
+                        <a:rPr sz="950">
+                          <a:solidFill>
+                            <a:srgbClr val="1F2A37"/>
+                          </a:solidFill>
+                          <a:latin typeface="Calibri"/>
+                        </a:rPr>
+                        <a:t>0.0030</a:t>
+                      </a:r>
+                    </a:p>
+                  </a:txBody>
+                  <a:tcPr marL="54864" marR="54864" marT="27432" marB="27432" anchor="ctr">
+                    <a:solidFill>
+                      <a:srgbClr val="FFFFFF"/>
+                    </a:solidFill>
+                  </a:tcPr>
+                </a:tc>
+              </a:tr>
+              <a:tr h="283464">
+                <a:tc>
+                  <a:txBody>
+                    <a:bodyPr wrap="square"/>
+                    <a:lstStyle/>
+                    <a:p>
+                      <a:pPr algn="l"/>
+                      <a:r>
+                        <a:rPr sz="950">
+                          <a:solidFill>
+                            <a:srgbClr val="1F2A37"/>
+                          </a:solidFill>
+                          <a:latin typeface="Calibri"/>
+                        </a:rPr>
+                        <a:t>2</a:t>
+                      </a:r>
+                    </a:p>
+                  </a:txBody>
+                  <a:tcPr marL="54864" marR="54864" marT="27432" marB="27432" anchor="ctr">
+                    <a:solidFill>
+                      <a:srgbClr val="F2F4F7"/>
+                    </a:solidFill>
+                  </a:tcPr>
+                </a:tc>
+                <a:tc>
+                  <a:txBody>
+                    <a:bodyPr wrap="square"/>
+                    <a:lstStyle/>
+                    <a:p>
+                      <a:pPr algn="l"/>
+                      <a:r>
+                        <a:rPr sz="950">
+                          <a:solidFill>
+                            <a:srgbClr val="1F2A37"/>
+                          </a:solidFill>
+                          <a:latin typeface="Calibri"/>
+                        </a:rPr>
+                        <a:t>Pt Nanoparticle Anchored Molecular Self…</a:t>
+                      </a:r>
+                    </a:p>
+                  </a:txBody>
+                  <a:tcPr marL="54864" marR="54864" marT="27432" marB="27432" anchor="ctr">
+                    <a:solidFill>
+                      <a:srgbClr val="F2F4F7"/>
+                    </a:solidFill>
+                  </a:tcPr>
+                </a:tc>
+                <a:tc>
+                  <a:txBody>
+                    <a:bodyPr wrap="square"/>
+                    <a:lstStyle/>
+                    <a:p>
+                      <a:pPr algn="l"/>
+                      <a:r>
+                        <a:rPr sz="950">
+                          <a:solidFill>
+                            <a:srgbClr val="1F2A37"/>
+                          </a:solidFill>
+                          <a:latin typeface="Calibri"/>
+                        </a:rPr>
+                        <a:t>CECRI</a:t>
+                      </a:r>
+                    </a:p>
+                  </a:txBody>
+                  <a:tcPr marL="54864" marR="54864" marT="27432" marB="27432" anchor="ctr">
+                    <a:solidFill>
+                      <a:srgbClr val="F2F4F7"/>
+                    </a:solidFill>
+                  </a:tcPr>
+                </a:tc>
+                <a:tc>
+                  <a:txBody>
+                    <a:bodyPr wrap="square"/>
+                    <a:lstStyle/>
+                    <a:p>
+                      <a:pPr algn="r"/>
+                      <a:r>
+                        <a:rPr sz="950">
+                          <a:solidFill>
+                            <a:srgbClr val="1F2A37"/>
+                          </a:solidFill>
+                          <a:latin typeface="Calibri"/>
+                        </a:rPr>
+                        <a:t>2016</a:t>
+                      </a:r>
+                    </a:p>
+                  </a:txBody>
+                  <a:tcPr marL="54864" marR="54864" marT="27432" marB="27432" anchor="ctr">
+                    <a:solidFill>
+                      <a:srgbClr val="F2F4F7"/>
+                    </a:solidFill>
+                  </a:tcPr>
+                </a:tc>
+                <a:tc>
+                  <a:txBody>
+                    <a:bodyPr wrap="square"/>
+                    <a:lstStyle/>
+                    <a:p>
+                      <a:pPr algn="r"/>
+                      <a:r>
+                        <a:rPr sz="950">
+                          <a:solidFill>
+                            <a:srgbClr val="1F2A37"/>
+                          </a:solidFill>
+                          <a:latin typeface="Calibri"/>
+                        </a:rPr>
+                        <a:t>41</a:t>
+                      </a:r>
+                    </a:p>
+                  </a:txBody>
+                  <a:tcPr marL="54864" marR="54864" marT="27432" marB="27432" anchor="ctr">
+                    <a:solidFill>
+                      <a:srgbClr val="F2F4F7"/>
+                    </a:solidFill>
+                  </a:tcPr>
+                </a:tc>
+                <a:tc>
+                  <a:txBody>
+                    <a:bodyPr wrap="square"/>
+                    <a:lstStyle/>
+                    <a:p>
+                      <a:pPr algn="r"/>
+                      <a:r>
+                        <a:rPr sz="950">
+                          <a:solidFill>
+                            <a:srgbClr val="1F2A37"/>
+                          </a:solidFill>
+                          <a:latin typeface="Calibri"/>
+                        </a:rPr>
+                        <a:t>0.0028</a:t>
+                      </a:r>
+                    </a:p>
+                  </a:txBody>
+                  <a:tcPr marL="54864" marR="54864" marT="27432" marB="27432" anchor="ctr">
+                    <a:solidFill>
+                      <a:srgbClr val="F2F4F7"/>
+                    </a:solidFill>
+                  </a:tcPr>
+                </a:tc>
+              </a:tr>
+              <a:tr h="283464">
+                <a:tc>
+                  <a:txBody>
+                    <a:bodyPr wrap="square"/>
+                    <a:lstStyle/>
+                    <a:p>
+                      <a:pPr algn="l"/>
+                      <a:r>
+                        <a:rPr sz="950">
+                          <a:solidFill>
+                            <a:srgbClr val="1F2A37"/>
+                          </a:solidFill>
+                          <a:latin typeface="Calibri"/>
+                        </a:rPr>
+                        <a:t>3</a:t>
+                      </a:r>
+                    </a:p>
+                  </a:txBody>
+                  <a:tcPr marL="54864" marR="54864" marT="27432" marB="27432" anchor="ctr">
+                    <a:solidFill>
+                      <a:srgbClr val="FFFFFF"/>
+                    </a:solidFill>
+                  </a:tcPr>
+                </a:tc>
+                <a:tc>
+                  <a:txBody>
+                    <a:bodyPr wrap="square"/>
+                    <a:lstStyle/>
+                    <a:p>
+                      <a:pPr algn="l"/>
+                      <a:r>
+                        <a:rPr sz="950">
+                          <a:solidFill>
+                            <a:srgbClr val="1F2A37"/>
+                          </a:solidFill>
+                          <a:latin typeface="Calibri"/>
+                        </a:rPr>
+                        <a:t>Unprotected and interconnected Ru 0 nan…</a:t>
+                      </a:r>
+                    </a:p>
+                  </a:txBody>
+                  <a:tcPr marL="54864" marR="54864" marT="27432" marB="27432" anchor="ctr">
+                    <a:solidFill>
+                      <a:srgbClr val="FFFFFF"/>
+                    </a:solidFill>
+                  </a:tcPr>
+                </a:tc>
+                <a:tc>
+                  <a:txBody>
+                    <a:bodyPr wrap="square"/>
+                    <a:lstStyle/>
+                    <a:p>
+                      <a:pPr algn="l"/>
+                      <a:r>
+                        <a:rPr sz="950">
+                          <a:solidFill>
+                            <a:srgbClr val="1F2A37"/>
+                          </a:solidFill>
+                          <a:latin typeface="Calibri"/>
+                        </a:rPr>
+                        <a:t>CECRI</a:t>
+                      </a:r>
+                    </a:p>
+                  </a:txBody>
+                  <a:tcPr marL="54864" marR="54864" marT="27432" marB="27432" anchor="ctr">
+                    <a:solidFill>
+                      <a:srgbClr val="FFFFFF"/>
+                    </a:solidFill>
+                  </a:tcPr>
+                </a:tc>
+                <a:tc>
+                  <a:txBody>
+                    <a:bodyPr wrap="square"/>
+                    <a:lstStyle/>
+                    <a:p>
+                      <a:pPr algn="r"/>
+                      <a:r>
+                        <a:rPr sz="950">
+                          <a:solidFill>
+                            <a:srgbClr val="1F2A37"/>
+                          </a:solidFill>
+                          <a:latin typeface="Calibri"/>
+                        </a:rPr>
+                        <a:t>2016</a:t>
+                      </a:r>
+                    </a:p>
+                  </a:txBody>
+                  <a:tcPr marL="54864" marR="54864" marT="27432" marB="27432" anchor="ctr">
+                    <a:solidFill>
+                      <a:srgbClr val="FFFFFF"/>
+                    </a:solidFill>
+                  </a:tcPr>
+                </a:tc>
+                <a:tc>
+                  <a:txBody>
+                    <a:bodyPr wrap="square"/>
+                    <a:lstStyle/>
+                    <a:p>
+                      <a:pPr algn="r"/>
+                      <a:r>
+                        <a:rPr sz="950">
+                          <a:solidFill>
+                            <a:srgbClr val="1F2A37"/>
+                          </a:solidFill>
+                          <a:latin typeface="Calibri"/>
+                        </a:rPr>
+                        <a:t>30</a:t>
+                      </a:r>
+                    </a:p>
+                  </a:txBody>
+                  <a:tcPr marL="54864" marR="54864" marT="27432" marB="27432" anchor="ctr">
+                    <a:solidFill>
+                      <a:srgbClr val="FFFFFF"/>
+                    </a:solidFill>
+                  </a:tcPr>
+                </a:tc>
+                <a:tc>
+                  <a:txBody>
+                    <a:bodyPr wrap="square"/>
+                    <a:lstStyle/>
+                    <a:p>
+                      <a:pPr algn="r"/>
+                      <a:r>
+                        <a:rPr sz="950">
+                          <a:solidFill>
+                            <a:srgbClr val="1F2A37"/>
+                          </a:solidFill>
+                          <a:latin typeface="Calibri"/>
+                        </a:rPr>
+                        <a:t>0.0027</a:t>
+                      </a:r>
+                    </a:p>
+                  </a:txBody>
+                  <a:tcPr marL="54864" marR="54864" marT="27432" marB="27432" anchor="ctr">
+                    <a:solidFill>
+                      <a:srgbClr val="FFFFFF"/>
+                    </a:solidFill>
+                  </a:tcPr>
+                </a:tc>
+              </a:tr>
+              <a:tr h="283464">
+                <a:tc>
+                  <a:txBody>
+                    <a:bodyPr wrap="square"/>
+                    <a:lstStyle/>
+                    <a:p>
+                      <a:pPr algn="l"/>
+                      <a:r>
+                        <a:rPr sz="950">
+                          <a:solidFill>
+                            <a:srgbClr val="1F2A37"/>
+                          </a:solidFill>
+                          <a:latin typeface="Calibri"/>
+                        </a:rPr>
+                        <a:t>4</a:t>
+                      </a:r>
+                    </a:p>
+                  </a:txBody>
+                  <a:tcPr marL="54864" marR="54864" marT="27432" marB="27432" anchor="ctr">
+                    <a:solidFill>
+                      <a:srgbClr val="F2F4F7"/>
+                    </a:solidFill>
+                  </a:tcPr>
+                </a:tc>
+                <a:tc>
+                  <a:txBody>
+                    <a:bodyPr wrap="square"/>
+                    <a:lstStyle/>
+                    <a:p>
+                      <a:pPr algn="l"/>
+                      <a:r>
+                        <a:rPr sz="950">
+                          <a:solidFill>
+                            <a:srgbClr val="1F2A37"/>
+                          </a:solidFill>
+                          <a:latin typeface="Calibri"/>
+                        </a:rPr>
+                        <a:t>Functional Naphthalene Diimides: Synthe…</a:t>
+                      </a:r>
+                    </a:p>
+                  </a:txBody>
+                  <a:tcPr marL="54864" marR="54864" marT="27432" marB="27432" anchor="ctr">
+                    <a:solidFill>
+                      <a:srgbClr val="F2F4F7"/>
+                    </a:solidFill>
+                  </a:tcPr>
+                </a:tc>
+                <a:tc>
+                  <a:txBody>
+                    <a:bodyPr wrap="square"/>
+                    <a:lstStyle/>
+                    <a:p>
+                      <a:pPr algn="l"/>
+                      <a:r>
+                        <a:rPr sz="950">
+                          <a:solidFill>
+                            <a:srgbClr val="1F2A37"/>
+                          </a:solidFill>
+                          <a:latin typeface="Calibri"/>
+                        </a:rPr>
+                        <a:t>IICT</a:t>
+                      </a:r>
+                    </a:p>
+                  </a:txBody>
+                  <a:tcPr marL="54864" marR="54864" marT="27432" marB="27432" anchor="ctr">
+                    <a:solidFill>
+                      <a:srgbClr val="F2F4F7"/>
+                    </a:solidFill>
+                  </a:tcPr>
+                </a:tc>
+                <a:tc>
+                  <a:txBody>
+                    <a:bodyPr wrap="square"/>
+                    <a:lstStyle/>
+                    <a:p>
+                      <a:pPr algn="r"/>
+                      <a:r>
+                        <a:rPr sz="950">
+                          <a:solidFill>
+                            <a:srgbClr val="1F2A37"/>
+                          </a:solidFill>
+                          <a:latin typeface="Calibri"/>
+                        </a:rPr>
+                        <a:t>2016</a:t>
+                      </a:r>
+                    </a:p>
+                  </a:txBody>
+                  <a:tcPr marL="54864" marR="54864" marT="27432" marB="27432" anchor="ctr">
+                    <a:solidFill>
+                      <a:srgbClr val="F2F4F7"/>
+                    </a:solidFill>
+                  </a:tcPr>
+                </a:tc>
+                <a:tc>
+                  <a:txBody>
+                    <a:bodyPr wrap="square"/>
+                    <a:lstStyle/>
+                    <a:p>
+                      <a:pPr algn="r"/>
+                      <a:r>
+                        <a:rPr sz="950">
+                          <a:solidFill>
+                            <a:srgbClr val="1F2A37"/>
+                          </a:solidFill>
+                          <a:latin typeface="Calibri"/>
+                        </a:rPr>
+                        <a:t>53</a:t>
+                      </a:r>
+                    </a:p>
+                  </a:txBody>
+                  <a:tcPr marL="54864" marR="54864" marT="27432" marB="27432" anchor="ctr">
+                    <a:solidFill>
+                      <a:srgbClr val="F2F4F7"/>
+                    </a:solidFill>
+                  </a:tcPr>
+                </a:tc>
+                <a:tc>
+                  <a:txBody>
+                    <a:bodyPr wrap="square"/>
+                    <a:lstStyle/>
+                    <a:p>
+                      <a:pPr algn="r"/>
+                      <a:r>
+                        <a:rPr sz="950">
+                          <a:solidFill>
+                            <a:srgbClr val="1F2A37"/>
+                          </a:solidFill>
+                          <a:latin typeface="Calibri"/>
+                        </a:rPr>
+                        <a:t>0.0020</a:t>
+                      </a:r>
+                    </a:p>
+                  </a:txBody>
+                  <a:tcPr marL="54864" marR="54864" marT="27432" marB="27432" anchor="ctr">
+                    <a:solidFill>
+                      <a:srgbClr val="F2F4F7"/>
+                    </a:solidFill>
+                  </a:tcPr>
+                </a:tc>
+              </a:tr>
+              <a:tr h="283464">
+                <a:tc>
+                  <a:txBody>
+                    <a:bodyPr wrap="square"/>
+                    <a:lstStyle/>
+                    <a:p>
+                      <a:pPr algn="l"/>
+                      <a:r>
+                        <a:rPr sz="950">
+                          <a:solidFill>
+                            <a:srgbClr val="1F2A37"/>
+                          </a:solidFill>
+                          <a:latin typeface="Calibri"/>
+                        </a:rPr>
+                        <a:t>5</a:t>
+                      </a:r>
+                    </a:p>
+                  </a:txBody>
+                  <a:tcPr marL="54864" marR="54864" marT="27432" marB="27432" anchor="ctr">
+                    <a:solidFill>
+                      <a:srgbClr val="FFFFFF"/>
+                    </a:solidFill>
+                  </a:tcPr>
+                </a:tc>
+                <a:tc>
+                  <a:txBody>
+                    <a:bodyPr wrap="square"/>
+                    <a:lstStyle/>
+                    <a:p>
+                      <a:pPr algn="l"/>
+                      <a:r>
+                        <a:rPr sz="950">
+                          <a:solidFill>
+                            <a:srgbClr val="1F2A37"/>
+                          </a:solidFill>
+                          <a:latin typeface="Calibri"/>
+                        </a:rPr>
+                        <a:t>Precision and correctness in the evalua…</a:t>
+                      </a:r>
+                    </a:p>
+                  </a:txBody>
+                  <a:tcPr marL="54864" marR="54864" marT="27432" marB="27432" anchor="ctr">
+                    <a:solidFill>
+                      <a:srgbClr val="FFFFFF"/>
+                    </a:solidFill>
+                  </a:tcPr>
+                </a:tc>
+                <a:tc>
+                  <a:txBody>
+                    <a:bodyPr wrap="square"/>
+                    <a:lstStyle/>
+                    <a:p>
+                      <a:pPr algn="l"/>
+                      <a:r>
+                        <a:rPr sz="950">
+                          <a:solidFill>
+                            <a:srgbClr val="1F2A37"/>
+                          </a:solidFill>
+                          <a:latin typeface="Calibri"/>
+                        </a:rPr>
+                        <a:t>CECRI</a:t>
+                      </a:r>
+                    </a:p>
+                  </a:txBody>
+                  <a:tcPr marL="54864" marR="54864" marT="27432" marB="27432" anchor="ctr">
+                    <a:solidFill>
+                      <a:srgbClr val="FFFFFF"/>
+                    </a:solidFill>
+                  </a:tcPr>
+                </a:tc>
+                <a:tc>
+                  <a:txBody>
+                    <a:bodyPr wrap="square"/>
+                    <a:lstStyle/>
+                    <a:p>
+                      <a:pPr algn="r"/>
+                      <a:r>
+                        <a:rPr sz="950">
+                          <a:solidFill>
+                            <a:srgbClr val="1F2A37"/>
+                          </a:solidFill>
+                          <a:latin typeface="Calibri"/>
+                        </a:rPr>
+                        <a:t>2018</a:t>
+                      </a:r>
+                    </a:p>
+                  </a:txBody>
+                  <a:tcPr marL="54864" marR="54864" marT="27432" marB="27432" anchor="ctr">
+                    <a:solidFill>
+                      <a:srgbClr val="FFFFFF"/>
+                    </a:solidFill>
+                  </a:tcPr>
+                </a:tc>
+                <a:tc>
+                  <a:txBody>
+                    <a:bodyPr wrap="square"/>
+                    <a:lstStyle/>
+                    <a:p>
+                      <a:pPr algn="r"/>
+                      <a:r>
+                        <a:rPr sz="950">
+                          <a:solidFill>
+                            <a:srgbClr val="1F2A37"/>
+                          </a:solidFill>
+                          <a:latin typeface="Calibri"/>
+                        </a:rPr>
+                        <a:t>110</a:t>
+                      </a:r>
+                    </a:p>
+                  </a:txBody>
+                  <a:tcPr marL="54864" marR="54864" marT="27432" marB="27432" anchor="ctr">
+                    <a:solidFill>
+                      <a:srgbClr val="FFFFFF"/>
+                    </a:solidFill>
+                  </a:tcPr>
+                </a:tc>
+                <a:tc>
+                  <a:txBody>
+                    <a:bodyPr wrap="square"/>
+                    <a:lstStyle/>
+                    <a:p>
+                      <a:pPr algn="r"/>
+                      <a:r>
+                        <a:rPr sz="950">
+                          <a:solidFill>
+                            <a:srgbClr val="1F2A37"/>
+                          </a:solidFill>
+                          <a:latin typeface="Calibri"/>
+                        </a:rPr>
+                        <a:t>0.0018</a:t>
+                      </a:r>
+                    </a:p>
+                  </a:txBody>
+                  <a:tcPr marL="54864" marR="54864" marT="27432" marB="27432" anchor="ctr">
+                    <a:solidFill>
+                      <a:srgbClr val="FFFFFF"/>
+                    </a:solidFill>
+                  </a:tcPr>
+                </a:tc>
+              </a:tr>
+              <a:tr h="283464">
+                <a:tc>
+                  <a:txBody>
+                    <a:bodyPr wrap="square"/>
+                    <a:lstStyle/>
+                    <a:p>
+                      <a:pPr algn="l"/>
+                      <a:r>
+                        <a:rPr sz="950">
+                          <a:solidFill>
+                            <a:srgbClr val="1F2A37"/>
+                          </a:solidFill>
+                          <a:latin typeface="Calibri"/>
+                        </a:rPr>
+                        <a:t>6</a:t>
+                      </a:r>
+                    </a:p>
+                  </a:txBody>
+                  <a:tcPr marL="54864" marR="54864" marT="27432" marB="27432" anchor="ctr">
+                    <a:solidFill>
+                      <a:srgbClr val="F2F4F7"/>
+                    </a:solidFill>
+                  </a:tcPr>
+                </a:tc>
+                <a:tc>
+                  <a:txBody>
+                    <a:bodyPr wrap="square"/>
+                    <a:lstStyle/>
+                    <a:p>
+                      <a:pPr algn="l"/>
+                      <a:r>
+                        <a:rPr sz="950">
+                          <a:solidFill>
+                            <a:srgbClr val="1F2A37"/>
+                          </a:solidFill>
+                          <a:latin typeface="Calibri"/>
+                        </a:rPr>
+                        <a:t>Waste biorefinery models towards sustai…</a:t>
+                      </a:r>
+                    </a:p>
+                  </a:txBody>
+                  <a:tcPr marL="54864" marR="54864" marT="27432" marB="27432" anchor="ctr">
+                    <a:solidFill>
+                      <a:srgbClr val="F2F4F7"/>
+                    </a:solidFill>
+                  </a:tcPr>
+                </a:tc>
+                <a:tc>
+                  <a:txBody>
+                    <a:bodyPr wrap="square"/>
+                    <a:lstStyle/>
+                    <a:p>
+                      <a:pPr algn="l"/>
+                      <a:r>
+                        <a:rPr sz="950">
+                          <a:solidFill>
+                            <a:srgbClr val="1F2A37"/>
+                          </a:solidFill>
+                          <a:latin typeface="Calibri"/>
+                        </a:rPr>
+                        <a:t>IICT</a:t>
+                      </a:r>
+                    </a:p>
+                  </a:txBody>
+                  <a:tcPr marL="54864" marR="54864" marT="27432" marB="27432" anchor="ctr">
+                    <a:solidFill>
+                      <a:srgbClr val="F2F4F7"/>
+                    </a:solidFill>
+                  </a:tcPr>
+                </a:tc>
+                <a:tc>
+                  <a:txBody>
+                    <a:bodyPr wrap="square"/>
+                    <a:lstStyle/>
+                    <a:p>
+                      <a:pPr algn="r"/>
+                      <a:r>
+                        <a:rPr sz="950">
+                          <a:solidFill>
+                            <a:srgbClr val="1F2A37"/>
+                          </a:solidFill>
+                          <a:latin typeface="Calibri"/>
+                        </a:rPr>
+                        <a:t>2016</a:t>
+                      </a:r>
+                    </a:p>
+                  </a:txBody>
+                  <a:tcPr marL="54864" marR="54864" marT="27432" marB="27432" anchor="ctr">
+                    <a:solidFill>
+                      <a:srgbClr val="F2F4F7"/>
+                    </a:solidFill>
+                  </a:tcPr>
+                </a:tc>
+                <a:tc>
+                  <a:txBody>
+                    <a:bodyPr wrap="square"/>
+                    <a:lstStyle/>
+                    <a:p>
+                      <a:pPr algn="r"/>
+                      <a:r>
+                        <a:rPr sz="950">
+                          <a:solidFill>
+                            <a:srgbClr val="1F2A37"/>
+                          </a:solidFill>
+                          <a:latin typeface="Calibri"/>
+                        </a:rPr>
+                        <a:t>71</a:t>
+                      </a:r>
+                    </a:p>
+                  </a:txBody>
+                  <a:tcPr marL="54864" marR="54864" marT="27432" marB="27432" anchor="ctr">
+                    <a:solidFill>
+                      <a:srgbClr val="F2F4F7"/>
+                    </a:solidFill>
+                  </a:tcPr>
+                </a:tc>
+                <a:tc>
+                  <a:txBody>
+                    <a:bodyPr wrap="square"/>
+                    <a:lstStyle/>
+                    <a:p>
+                      <a:pPr algn="r"/>
+                      <a:r>
+                        <a:rPr sz="950">
+                          <a:solidFill>
+                            <a:srgbClr val="1F2A37"/>
+                          </a:solidFill>
+                          <a:latin typeface="Calibri"/>
+                        </a:rPr>
+                        <a:t>0.0017</a:t>
+                      </a:r>
+                    </a:p>
+                  </a:txBody>
+                  <a:tcPr marL="54864" marR="54864" marT="27432" marB="27432" anchor="ctr">
+                    <a:solidFill>
+                      <a:srgbClr val="F2F4F7"/>
+                    </a:solidFill>
+                  </a:tcPr>
+                </a:tc>
+              </a:tr>
+            </a:tbl>
+          </a:graphicData>
+        </a:graphic>
+      </p:graphicFrame>
+      <p:sp>
+        <p:nvSpPr>
+          <p:cNvPr id="15" name="TextBox 14"/>
+          <p:cNvSpPr txBox="1"/>
+          <p:nvPr/>
+        </p:nvSpPr>
+        <p:spPr>
+          <a:xfrm>
+            <a:off x="502920" y="4645152"/>
+            <a:ext cx="5432908" cy="256032"/>
+          </a:xfrm>
+          <a:prstGeom prst="rect">
+            <a:avLst/>
+          </a:prstGeom>
+          <a:noFill/>
+        </p:spPr>
+        <p:txBody>
+          <a:bodyPr wrap="square" anchor="t" lIns="0" rIns="0" tIns="0" bIns="0">
+            <a:spAutoFit/>
+          </a:bodyPr>
+          <a:lstStyle/>
+          <a:p>
+            <a:pPr algn="l">
+              <a:spcAft>
+                <a:spcPts val="200"/>
+              </a:spcAft>
+            </a:pPr>
+            <a:r>
+              <a:rPr sz="1150" b="1">
+                <a:solidFill>
+                  <a:srgbClr val="1F2A37"/>
+                </a:solidFill>
+                <a:latin typeface="Calibri"/>
+              </a:rPr>
+              <a:t>Citation Flow with Other Indian Institutions</a:t>
             </a:r>
           </a:p>
         </p:txBody>
@@ -22317,8 +19659,8 @@
           <p:nvPr/>
         </p:nvGraphicFramePr>
         <p:xfrm>
-          <a:off x="7589520" y="4800600"/>
-          <a:ext cx="4099253" cy="1097280"/>
+          <a:off x="502920" y="4901184"/>
+          <a:ext cx="5432905" cy="1133856"/>
         </p:xfrm>
         <a:graphic>
           <a:graphicData uri="http://schemas.openxmlformats.org/drawingml/2006/table">
@@ -22327,21 +19669,21 @@
                 <a:tableStyleId>{5C22544A-7EE6-4342-B048-85BDC9FD1C3A}</a:tableStyleId>
               </a:tblPr>
               <a:tblGrid>
-                <a:gridCol w="728756"/>
-                <a:gridCol w="1002040"/>
-                <a:gridCol w="910945"/>
-                <a:gridCol w="637661"/>
-                <a:gridCol w="819851"/>
+                <a:gridCol w="867439"/>
+                <a:gridCol w="1187021"/>
+                <a:gridCol w="1187021"/>
+                <a:gridCol w="913093"/>
+                <a:gridCol w="1278331"/>
               </a:tblGrid>
-              <a:tr h="274320">
-                <a:tc>
-                  <a:txBody>
-                    <a:bodyPr wrap="square"/>
-                    <a:lstStyle/>
-                    <a:p>
-                      <a:pPr algn="l"/>
-                      <a:r>
-                        <a:rPr sz="1000" b="1">
+              <a:tr h="283464">
+                <a:tc>
+                  <a:txBody>
+                    <a:bodyPr wrap="square"/>
+                    <a:lstStyle/>
+                    <a:p>
+                      <a:pPr algn="l"/>
+                      <a:r>
+                        <a:rPr sz="950" b="1">
                           <a:solidFill>
                             <a:srgbClr val="FFFFFF"/>
                           </a:solidFill>
@@ -22364,7 +19706,7 @@
                     <a:p>
                       <a:pPr algn="r"/>
                       <a:r>
-                        <a:rPr sz="1000" b="1">
+                        <a:rPr sz="950" b="1">
                           <a:solidFill>
                             <a:srgbClr val="FFFFFF"/>
                           </a:solidFill>
@@ -22387,7 +19729,7 @@
                     <a:p>
                       <a:pPr algn="r"/>
                       <a:r>
-                        <a:rPr sz="1000" b="1">
+                        <a:rPr sz="950" b="1">
                           <a:solidFill>
                             <a:srgbClr val="FFFFFF"/>
                           </a:solidFill>
@@ -22410,7 +19752,7 @@
                     <a:p>
                       <a:pPr algn="r"/>
                       <a:r>
-                        <a:rPr sz="1000" b="1">
+                        <a:rPr sz="950" b="1">
                           <a:solidFill>
                             <a:srgbClr val="FFFFFF"/>
                           </a:solidFill>
@@ -22433,7 +19775,7 @@
                     <a:p>
                       <a:pPr algn="r"/>
                       <a:r>
-                        <a:rPr sz="1000" b="1">
+                        <a:rPr sz="950" b="1">
                           <a:solidFill>
                             <a:srgbClr val="FFFFFF"/>
                           </a:solidFill>
@@ -22450,15 +19792,15 @@
                   </a:tcPr>
                 </a:tc>
               </a:tr>
-              <a:tr h="274320">
-                <a:tc>
-                  <a:txBody>
-                    <a:bodyPr wrap="square"/>
-                    <a:lstStyle/>
-                    <a:p>
-                      <a:pPr algn="l"/>
-                      <a:r>
-                        <a:rPr sz="1000" b="1">
+              <a:tr h="283464">
+                <a:tc>
+                  <a:txBody>
+                    <a:bodyPr wrap="square"/>
+                    <a:lstStyle/>
+                    <a:p>
+                      <a:pPr algn="l"/>
+                      <a:r>
+                        <a:rPr sz="950" b="1">
                           <a:solidFill>
                             <a:srgbClr val="2B5C8F"/>
                           </a:solidFill>
@@ -22481,7 +19823,7 @@
                     <a:p>
                       <a:pPr algn="r"/>
                       <a:r>
-                        <a:rPr sz="1000">
+                        <a:rPr sz="950">
                           <a:solidFill>
                             <a:srgbClr val="1F2A37"/>
                           </a:solidFill>
@@ -22504,7 +19846,7 @@
                     <a:p>
                       <a:pPr algn="r"/>
                       <a:r>
-                        <a:rPr sz="1000">
+                        <a:rPr sz="950">
                           <a:solidFill>
                             <a:srgbClr val="1F2A37"/>
                           </a:solidFill>
@@ -22527,7 +19869,7 @@
                     <a:p>
                       <a:pPr algn="r"/>
                       <a:r>
-                        <a:rPr sz="1000">
+                        <a:rPr sz="950">
                           <a:solidFill>
                             <a:srgbClr val="1F2A37"/>
                           </a:solidFill>
@@ -22550,7 +19892,7 @@
                     <a:p>
                       <a:pPr algn="r"/>
                       <a:r>
-                        <a:rPr sz="1000">
+                        <a:rPr sz="950">
                           <a:solidFill>
                             <a:srgbClr val="1F2A37"/>
                           </a:solidFill>
@@ -22567,15 +19909,15 @@
                   </a:tcPr>
                 </a:tc>
               </a:tr>
-              <a:tr h="274320">
-                <a:tc>
-                  <a:txBody>
-                    <a:bodyPr wrap="square"/>
-                    <a:lstStyle/>
-                    <a:p>
-                      <a:pPr algn="l"/>
-                      <a:r>
-                        <a:rPr sz="1000" b="1">
+              <a:tr h="283464">
+                <a:tc>
+                  <a:txBody>
+                    <a:bodyPr wrap="square"/>
+                    <a:lstStyle/>
+                    <a:p>
+                      <a:pPr algn="l"/>
+                      <a:r>
+                        <a:rPr sz="950" b="1">
                           <a:solidFill>
                             <a:srgbClr val="2E7D32"/>
                           </a:solidFill>
@@ -22598,7 +19940,7 @@
                     <a:p>
                       <a:pPr algn="r"/>
                       <a:r>
-                        <a:rPr sz="1000">
+                        <a:rPr sz="950">
                           <a:solidFill>
                             <a:srgbClr val="1F2A37"/>
                           </a:solidFill>
@@ -22621,7 +19963,7 @@
                     <a:p>
                       <a:pPr algn="r"/>
                       <a:r>
-                        <a:rPr sz="1000">
+                        <a:rPr sz="950">
                           <a:solidFill>
                             <a:srgbClr val="1F2A37"/>
                           </a:solidFill>
@@ -22644,7 +19986,7 @@
                     <a:p>
                       <a:pPr algn="r"/>
                       <a:r>
-                        <a:rPr sz="1000">
+                        <a:rPr sz="950">
                           <a:solidFill>
                             <a:srgbClr val="1F2A37"/>
                           </a:solidFill>
@@ -22667,7 +20009,7 @@
                     <a:p>
                       <a:pPr algn="r"/>
                       <a:r>
-                        <a:rPr sz="1000">
+                        <a:rPr sz="950">
                           <a:solidFill>
                             <a:srgbClr val="1F2A37"/>
                           </a:solidFill>
@@ -22684,15 +20026,15 @@
                   </a:tcPr>
                 </a:tc>
               </a:tr>
-              <a:tr h="274320">
-                <a:tc>
-                  <a:txBody>
-                    <a:bodyPr wrap="square"/>
-                    <a:lstStyle/>
-                    <a:p>
-                      <a:pPr algn="l"/>
-                      <a:r>
-                        <a:rPr sz="1000" b="1">
+              <a:tr h="283464">
+                <a:tc>
+                  <a:txBody>
+                    <a:bodyPr wrap="square"/>
+                    <a:lstStyle/>
+                    <a:p>
+                      <a:pPr algn="l"/>
+                      <a:r>
+                        <a:rPr sz="950" b="1">
                           <a:solidFill>
                             <a:srgbClr val="D95F02"/>
                           </a:solidFill>
@@ -22715,7 +20057,7 @@
                     <a:p>
                       <a:pPr algn="r"/>
                       <a:r>
-                        <a:rPr sz="1000">
+                        <a:rPr sz="950">
                           <a:solidFill>
                             <a:srgbClr val="1F2A37"/>
                           </a:solidFill>
@@ -22738,7 +20080,7 @@
                     <a:p>
                       <a:pPr algn="r"/>
                       <a:r>
-                        <a:rPr sz="1000">
+                        <a:rPr sz="950">
                           <a:solidFill>
                             <a:srgbClr val="1F2A37"/>
                           </a:solidFill>
@@ -22761,7 +20103,7 @@
                     <a:p>
                       <a:pPr algn="r"/>
                       <a:r>
-                        <a:rPr sz="1000">
+                        <a:rPr sz="950">
                           <a:solidFill>
                             <a:srgbClr val="1F2A37"/>
                           </a:solidFill>
@@ -22784,7 +20126,7 @@
                     <a:p>
                       <a:pPr algn="r"/>
                       <a:r>
-                        <a:rPr sz="1000">
+                        <a:rPr sz="950">
                           <a:solidFill>
                             <a:srgbClr val="1F2A37"/>
                           </a:solidFill>
@@ -22807,7 +20149,1357 @@
       </p:graphicFrame>
       <p:sp>
         <p:nvSpPr>
-          <p:cNvPr id="17" name="Source"/>
+          <p:cNvPr id="17" name="TextBox 16"/>
+          <p:cNvSpPr txBox="1"/>
+          <p:nvPr/>
+        </p:nvSpPr>
+        <p:spPr>
+          <a:xfrm>
+            <a:off x="6255868" y="2423160"/>
+            <a:ext cx="5432908" cy="274320"/>
+          </a:xfrm>
+          <a:prstGeom prst="rect">
+            <a:avLst/>
+          </a:prstGeom>
+          <a:noFill/>
+        </p:spPr>
+        <p:txBody>
+          <a:bodyPr wrap="square" anchor="t" lIns="0" rIns="0" tIns="0" bIns="0">
+            <a:spAutoFit/>
+          </a:bodyPr>
+          <a:lstStyle/>
+          <a:p>
+            <a:pPr algn="l">
+              <a:spcAft>
+                <a:spcPts val="200"/>
+              </a:spcAft>
+            </a:pPr>
+            <a:r>
+              <a:rPr sz="1200" b="1">
+                <a:solidFill>
+                  <a:srgbClr val="1F2A37"/>
+                </a:solidFill>
+                <a:latin typeface="Calibri"/>
+              </a:rPr>
+              <a:t>Undirected Authorship Network: Top Degree Collaborators</a:t>
+            </a:r>
+          </a:p>
+        </p:txBody>
+      </p:sp>
+      <p:graphicFrame>
+        <p:nvGraphicFramePr>
+          <p:cNvPr id="18" name="Degree table"/>
+          <p:cNvGraphicFramePr>
+            <a:graphicFrameLocks noGrp="1"/>
+          </p:cNvGraphicFramePr>
+          <p:nvPr/>
+        </p:nvGraphicFramePr>
+        <p:xfrm>
+          <a:off x="6255868" y="2724912"/>
+          <a:ext cx="5432904" cy="1984248"/>
+        </p:xfrm>
+        <a:graphic>
+          <a:graphicData uri="http://schemas.openxmlformats.org/drawingml/2006/table">
+            <a:tbl>
+              <a:tblPr firstRow="1">
+                <a:tableStyleId>{5C22544A-7EE6-4342-B048-85BDC9FD1C3A}</a:tableStyleId>
+              </a:tblPr>
+              <a:tblGrid>
+                <a:gridCol w="273928"/>
+                <a:gridCol w="1917496"/>
+                <a:gridCol w="639165"/>
+                <a:gridCol w="639165"/>
+                <a:gridCol w="821784"/>
+                <a:gridCol w="639165"/>
+                <a:gridCol w="502201"/>
+              </a:tblGrid>
+              <a:tr h="283464">
+                <a:tc>
+                  <a:txBody>
+                    <a:bodyPr wrap="square"/>
+                    <a:lstStyle/>
+                    <a:p>
+                      <a:pPr algn="l"/>
+                      <a:r>
+                        <a:rPr sz="950" b="1">
+                          <a:solidFill>
+                            <a:srgbClr val="FFFFFF"/>
+                          </a:solidFill>
+                          <a:latin typeface="Calibri"/>
+                        </a:rPr>
+                        <a:t>#</a:t>
+                      </a:r>
+                    </a:p>
+                  </a:txBody>
+                  <a:tcPr marL="54864" marR="54864" marT="27432" marB="27432" anchor="ctr">
+                    <a:solidFill>
+                      <a:srgbClr val="14213D"/>
+                    </a:solidFill>
+                  </a:tcPr>
+                </a:tc>
+                <a:tc>
+                  <a:txBody>
+                    <a:bodyPr wrap="square"/>
+                    <a:lstStyle/>
+                    <a:p>
+                      <a:pPr algn="l"/>
+                      <a:r>
+                        <a:rPr sz="950" b="1">
+                          <a:solidFill>
+                            <a:srgbClr val="FFFFFF"/>
+                          </a:solidFill>
+                          <a:latin typeface="Calibri"/>
+                        </a:rPr>
+                        <a:t>Most collaborative</a:t>
+                      </a:r>
+                    </a:p>
+                  </a:txBody>
+                  <a:tcPr marL="54864" marR="54864" marT="27432" marB="27432" anchor="ctr">
+                    <a:solidFill>
+                      <a:srgbClr val="14213D"/>
+                    </a:solidFill>
+                  </a:tcPr>
+                </a:tc>
+                <a:tc>
+                  <a:txBody>
+                    <a:bodyPr wrap="square"/>
+                    <a:lstStyle/>
+                    <a:p>
+                      <a:pPr algn="l"/>
+                      <a:r>
+                        <a:rPr sz="950" b="1">
+                          <a:solidFill>
+                            <a:srgbClr val="FFFFFF"/>
+                          </a:solidFill>
+                          <a:latin typeface="Calibri"/>
+                        </a:rPr>
+                        <a:t>Lab</a:t>
+                      </a:r>
+                    </a:p>
+                  </a:txBody>
+                  <a:tcPr marL="54864" marR="54864" marT="27432" marB="27432" anchor="ctr">
+                    <a:solidFill>
+                      <a:srgbClr val="14213D"/>
+                    </a:solidFill>
+                  </a:tcPr>
+                </a:tc>
+                <a:tc>
+                  <a:txBody>
+                    <a:bodyPr wrap="square"/>
+                    <a:lstStyle/>
+                    <a:p>
+                      <a:pPr algn="r"/>
+                      <a:r>
+                        <a:rPr sz="950" b="1">
+                          <a:solidFill>
+                            <a:srgbClr val="FFFFFF"/>
+                          </a:solidFill>
+                          <a:latin typeface="Calibri"/>
+                        </a:rPr>
+                        <a:t>Degree</a:t>
+                      </a:r>
+                    </a:p>
+                  </a:txBody>
+                  <a:tcPr marL="54864" marR="54864" marT="27432" marB="27432" anchor="ctr">
+                    <a:solidFill>
+                      <a:srgbClr val="14213D"/>
+                    </a:solidFill>
+                  </a:tcPr>
+                </a:tc>
+                <a:tc>
+                  <a:txBody>
+                    <a:bodyPr wrap="square"/>
+                    <a:lstStyle/>
+                    <a:p>
+                      <a:pPr algn="r"/>
+                      <a:r>
+                        <a:rPr sz="950" b="1">
+                          <a:solidFill>
+                            <a:srgbClr val="FFFFFF"/>
+                          </a:solidFill>
+                          <a:latin typeface="Calibri"/>
+                        </a:rPr>
+                        <a:t>Betweenness</a:t>
+                      </a:r>
+                    </a:p>
+                  </a:txBody>
+                  <a:tcPr marL="54864" marR="54864" marT="27432" marB="27432" anchor="ctr">
+                    <a:solidFill>
+                      <a:srgbClr val="14213D"/>
+                    </a:solidFill>
+                  </a:tcPr>
+                </a:tc>
+                <a:tc>
+                  <a:txBody>
+                    <a:bodyPr wrap="square"/>
+                    <a:lstStyle/>
+                    <a:p>
+                      <a:pPr algn="r"/>
+                      <a:r>
+                        <a:rPr sz="950" b="1">
+                          <a:solidFill>
+                            <a:srgbClr val="FFFFFF"/>
+                          </a:solidFill>
+                          <a:latin typeface="Calibri"/>
+                        </a:rPr>
+                        <a:t>Btw rank</a:t>
+                      </a:r>
+                    </a:p>
+                  </a:txBody>
+                  <a:tcPr marL="54864" marR="54864" marT="27432" marB="27432" anchor="ctr">
+                    <a:solidFill>
+                      <a:srgbClr val="14213D"/>
+                    </a:solidFill>
+                  </a:tcPr>
+                </a:tc>
+                <a:tc>
+                  <a:txBody>
+                    <a:bodyPr wrap="square"/>
+                    <a:lstStyle/>
+                    <a:p>
+                      <a:pPr algn="r"/>
+                      <a:r>
+                        <a:rPr sz="950" b="1">
+                          <a:solidFill>
+                            <a:srgbClr val="FFFFFF"/>
+                          </a:solidFill>
+                          <a:latin typeface="Calibri"/>
+                        </a:rPr>
+                        <a:t>Comm.</a:t>
+                      </a:r>
+                    </a:p>
+                  </a:txBody>
+                  <a:tcPr marL="54864" marR="54864" marT="27432" marB="27432" anchor="ctr">
+                    <a:solidFill>
+                      <a:srgbClr val="14213D"/>
+                    </a:solidFill>
+                  </a:tcPr>
+                </a:tc>
+              </a:tr>
+              <a:tr h="283464">
+                <a:tc>
+                  <a:txBody>
+                    <a:bodyPr wrap="square"/>
+                    <a:lstStyle/>
+                    <a:p>
+                      <a:pPr algn="l"/>
+                      <a:r>
+                        <a:rPr sz="950">
+                          <a:solidFill>
+                            <a:srgbClr val="1F2A37"/>
+                          </a:solidFill>
+                          <a:latin typeface="Calibri"/>
+                        </a:rPr>
+                        <a:t>1</a:t>
+                      </a:r>
+                    </a:p>
+                  </a:txBody>
+                  <a:tcPr marL="54864" marR="54864" marT="27432" marB="27432" anchor="ctr">
+                    <a:solidFill>
+                      <a:srgbClr val="FFFFFF"/>
+                    </a:solidFill>
+                  </a:tcPr>
+                </a:tc>
+                <a:tc>
+                  <a:txBody>
+                    <a:bodyPr wrap="square"/>
+                    <a:lstStyle/>
+                    <a:p>
+                      <a:pPr algn="l"/>
+                      <a:r>
+                        <a:rPr sz="950">
+                          <a:solidFill>
+                            <a:srgbClr val="1F2A37"/>
+                          </a:solidFill>
+                          <a:latin typeface="Calibri"/>
+                        </a:rPr>
+                        <a:t>Balasubramanian Sridhar</a:t>
+                      </a:r>
+                    </a:p>
+                  </a:txBody>
+                  <a:tcPr marL="54864" marR="54864" marT="27432" marB="27432" anchor="ctr">
+                    <a:solidFill>
+                      <a:srgbClr val="FFFFFF"/>
+                    </a:solidFill>
+                  </a:tcPr>
+                </a:tc>
+                <a:tc>
+                  <a:txBody>
+                    <a:bodyPr wrap="square"/>
+                    <a:lstStyle/>
+                    <a:p>
+                      <a:pPr algn="l"/>
+                      <a:r>
+                        <a:rPr sz="950">
+                          <a:solidFill>
+                            <a:srgbClr val="1F2A37"/>
+                          </a:solidFill>
+                          <a:latin typeface="Calibri"/>
+                        </a:rPr>
+                        <a:t>IICT</a:t>
+                      </a:r>
+                    </a:p>
+                  </a:txBody>
+                  <a:tcPr marL="54864" marR="54864" marT="27432" marB="27432" anchor="ctr">
+                    <a:solidFill>
+                      <a:srgbClr val="FFFFFF"/>
+                    </a:solidFill>
+                  </a:tcPr>
+                </a:tc>
+                <a:tc>
+                  <a:txBody>
+                    <a:bodyPr wrap="square"/>
+                    <a:lstStyle/>
+                    <a:p>
+                      <a:pPr algn="r"/>
+                      <a:r>
+                        <a:rPr sz="950">
+                          <a:solidFill>
+                            <a:srgbClr val="1F2A37"/>
+                          </a:solidFill>
+                          <a:latin typeface="Calibri"/>
+                        </a:rPr>
+                        <a:t>380</a:t>
+                      </a:r>
+                    </a:p>
+                  </a:txBody>
+                  <a:tcPr marL="54864" marR="54864" marT="27432" marB="27432" anchor="ctr">
+                    <a:solidFill>
+                      <a:srgbClr val="FFFFFF"/>
+                    </a:solidFill>
+                  </a:tcPr>
+                </a:tc>
+                <a:tc>
+                  <a:txBody>
+                    <a:bodyPr wrap="square"/>
+                    <a:lstStyle/>
+                    <a:p>
+                      <a:pPr algn="r"/>
+                      <a:r>
+                        <a:rPr sz="950">
+                          <a:solidFill>
+                            <a:srgbClr val="1F2A37"/>
+                          </a:solidFill>
+                          <a:latin typeface="Calibri"/>
+                        </a:rPr>
+                        <a:t>0.096</a:t>
+                      </a:r>
+                    </a:p>
+                  </a:txBody>
+                  <a:tcPr marL="54864" marR="54864" marT="27432" marB="27432" anchor="ctr">
+                    <a:solidFill>
+                      <a:srgbClr val="FFFFFF"/>
+                    </a:solidFill>
+                  </a:tcPr>
+                </a:tc>
+                <a:tc>
+                  <a:txBody>
+                    <a:bodyPr wrap="square"/>
+                    <a:lstStyle/>
+                    <a:p>
+                      <a:pPr algn="r"/>
+                      <a:r>
+                        <a:rPr sz="950">
+                          <a:solidFill>
+                            <a:srgbClr val="1F2A37"/>
+                          </a:solidFill>
+                          <a:latin typeface="Calibri"/>
+                        </a:rPr>
+                        <a:t>#1</a:t>
+                      </a:r>
+                    </a:p>
+                  </a:txBody>
+                  <a:tcPr marL="54864" marR="54864" marT="27432" marB="27432" anchor="ctr">
+                    <a:solidFill>
+                      <a:srgbClr val="FFFFFF"/>
+                    </a:solidFill>
+                  </a:tcPr>
+                </a:tc>
+                <a:tc>
+                  <a:txBody>
+                    <a:bodyPr wrap="square"/>
+                    <a:lstStyle/>
+                    <a:p>
+                      <a:pPr algn="r"/>
+                      <a:r>
+                        <a:rPr sz="950">
+                          <a:solidFill>
+                            <a:srgbClr val="1F2A37"/>
+                          </a:solidFill>
+                          <a:latin typeface="Calibri"/>
+                        </a:rPr>
+                        <a:t>6</a:t>
+                      </a:r>
+                    </a:p>
+                  </a:txBody>
+                  <a:tcPr marL="54864" marR="54864" marT="27432" marB="27432" anchor="ctr">
+                    <a:solidFill>
+                      <a:srgbClr val="FFFFFF"/>
+                    </a:solidFill>
+                  </a:tcPr>
+                </a:tc>
+              </a:tr>
+              <a:tr h="283464">
+                <a:tc>
+                  <a:txBody>
+                    <a:bodyPr wrap="square"/>
+                    <a:lstStyle/>
+                    <a:p>
+                      <a:pPr algn="l"/>
+                      <a:r>
+                        <a:rPr sz="950">
+                          <a:solidFill>
+                            <a:srgbClr val="1F2A37"/>
+                          </a:solidFill>
+                          <a:latin typeface="Calibri"/>
+                        </a:rPr>
+                        <a:t>2</a:t>
+                      </a:r>
+                    </a:p>
+                  </a:txBody>
+                  <a:tcPr marL="54864" marR="54864" marT="27432" marB="27432" anchor="ctr">
+                    <a:solidFill>
+                      <a:srgbClr val="F2F4F7"/>
+                    </a:solidFill>
+                  </a:tcPr>
+                </a:tc>
+                <a:tc>
+                  <a:txBody>
+                    <a:bodyPr wrap="square"/>
+                    <a:lstStyle/>
+                    <a:p>
+                      <a:pPr algn="l"/>
+                      <a:r>
+                        <a:rPr sz="950">
+                          <a:solidFill>
+                            <a:srgbClr val="1F2A37"/>
+                          </a:solidFill>
+                          <a:latin typeface="Calibri"/>
+                        </a:rPr>
+                        <a:t>Dr. Jagadeesh Babu Nanub…</a:t>
+                      </a:r>
+                    </a:p>
+                  </a:txBody>
+                  <a:tcPr marL="54864" marR="54864" marT="27432" marB="27432" anchor="ctr">
+                    <a:solidFill>
+                      <a:srgbClr val="F2F4F7"/>
+                    </a:solidFill>
+                  </a:tcPr>
+                </a:tc>
+                <a:tc>
+                  <a:txBody>
+                    <a:bodyPr wrap="square"/>
+                    <a:lstStyle/>
+                    <a:p>
+                      <a:pPr algn="l"/>
+                      <a:r>
+                        <a:rPr sz="950">
+                          <a:solidFill>
+                            <a:srgbClr val="1F2A37"/>
+                          </a:solidFill>
+                          <a:latin typeface="Calibri"/>
+                        </a:rPr>
+                        <a:t>IICT</a:t>
+                      </a:r>
+                    </a:p>
+                  </a:txBody>
+                  <a:tcPr marL="54864" marR="54864" marT="27432" marB="27432" anchor="ctr">
+                    <a:solidFill>
+                      <a:srgbClr val="F2F4F7"/>
+                    </a:solidFill>
+                  </a:tcPr>
+                </a:tc>
+                <a:tc>
+                  <a:txBody>
+                    <a:bodyPr wrap="square"/>
+                    <a:lstStyle/>
+                    <a:p>
+                      <a:pPr algn="r"/>
+                      <a:r>
+                        <a:rPr sz="950">
+                          <a:solidFill>
+                            <a:srgbClr val="1F2A37"/>
+                          </a:solidFill>
+                          <a:latin typeface="Calibri"/>
+                        </a:rPr>
+                        <a:t>285</a:t>
+                      </a:r>
+                    </a:p>
+                  </a:txBody>
+                  <a:tcPr marL="54864" marR="54864" marT="27432" marB="27432" anchor="ctr">
+                    <a:solidFill>
+                      <a:srgbClr val="F2F4F7"/>
+                    </a:solidFill>
+                  </a:tcPr>
+                </a:tc>
+                <a:tc>
+                  <a:txBody>
+                    <a:bodyPr wrap="square"/>
+                    <a:lstStyle/>
+                    <a:p>
+                      <a:pPr algn="r"/>
+                      <a:r>
+                        <a:rPr sz="950">
+                          <a:solidFill>
+                            <a:srgbClr val="1F2A37"/>
+                          </a:solidFill>
+                          <a:latin typeface="Calibri"/>
+                        </a:rPr>
+                        <a:t>0.090</a:t>
+                      </a:r>
+                    </a:p>
+                  </a:txBody>
+                  <a:tcPr marL="54864" marR="54864" marT="27432" marB="27432" anchor="ctr">
+                    <a:solidFill>
+                      <a:srgbClr val="F2F4F7"/>
+                    </a:solidFill>
+                  </a:tcPr>
+                </a:tc>
+                <a:tc>
+                  <a:txBody>
+                    <a:bodyPr wrap="square"/>
+                    <a:lstStyle/>
+                    <a:p>
+                      <a:pPr algn="r"/>
+                      <a:r>
+                        <a:rPr sz="950">
+                          <a:solidFill>
+                            <a:srgbClr val="1F2A37"/>
+                          </a:solidFill>
+                          <a:latin typeface="Calibri"/>
+                        </a:rPr>
+                        <a:t>#2</a:t>
+                      </a:r>
+                    </a:p>
+                  </a:txBody>
+                  <a:tcPr marL="54864" marR="54864" marT="27432" marB="27432" anchor="ctr">
+                    <a:solidFill>
+                      <a:srgbClr val="F2F4F7"/>
+                    </a:solidFill>
+                  </a:tcPr>
+                </a:tc>
+                <a:tc>
+                  <a:txBody>
+                    <a:bodyPr wrap="square"/>
+                    <a:lstStyle/>
+                    <a:p>
+                      <a:pPr algn="r"/>
+                      <a:r>
+                        <a:rPr sz="950">
+                          <a:solidFill>
+                            <a:srgbClr val="1F2A37"/>
+                          </a:solidFill>
+                          <a:latin typeface="Calibri"/>
+                        </a:rPr>
+                        <a:t>18</a:t>
+                      </a:r>
+                    </a:p>
+                  </a:txBody>
+                  <a:tcPr marL="54864" marR="54864" marT="27432" marB="27432" anchor="ctr">
+                    <a:solidFill>
+                      <a:srgbClr val="F2F4F7"/>
+                    </a:solidFill>
+                  </a:tcPr>
+                </a:tc>
+              </a:tr>
+              <a:tr h="283464">
+                <a:tc>
+                  <a:txBody>
+                    <a:bodyPr wrap="square"/>
+                    <a:lstStyle/>
+                    <a:p>
+                      <a:pPr algn="l"/>
+                      <a:r>
+                        <a:rPr sz="950">
+                          <a:solidFill>
+                            <a:srgbClr val="1F2A37"/>
+                          </a:solidFill>
+                          <a:latin typeface="Calibri"/>
+                        </a:rPr>
+                        <a:t>3</a:t>
+                      </a:r>
+                    </a:p>
+                  </a:txBody>
+                  <a:tcPr marL="54864" marR="54864" marT="27432" marB="27432" anchor="ctr">
+                    <a:solidFill>
+                      <a:srgbClr val="FFFFFF"/>
+                    </a:solidFill>
+                  </a:tcPr>
+                </a:tc>
+                <a:tc>
+                  <a:txBody>
+                    <a:bodyPr wrap="square"/>
+                    <a:lstStyle/>
+                    <a:p>
+                      <a:pPr algn="l"/>
+                      <a:r>
+                        <a:rPr sz="950">
+                          <a:solidFill>
+                            <a:srgbClr val="1F2A37"/>
+                          </a:solidFill>
+                          <a:latin typeface="Calibri"/>
+                        </a:rPr>
+                        <a:t>Dr. Rajesh G. Gonnade</a:t>
+                      </a:r>
+                    </a:p>
+                  </a:txBody>
+                  <a:tcPr marL="54864" marR="54864" marT="27432" marB="27432" anchor="ctr">
+                    <a:solidFill>
+                      <a:srgbClr val="FFFFFF"/>
+                    </a:solidFill>
+                  </a:tcPr>
+                </a:tc>
+                <a:tc>
+                  <a:txBody>
+                    <a:bodyPr wrap="square"/>
+                    <a:lstStyle/>
+                    <a:p>
+                      <a:pPr algn="l"/>
+                      <a:r>
+                        <a:rPr sz="950">
+                          <a:solidFill>
+                            <a:srgbClr val="1F2A37"/>
+                          </a:solidFill>
+                          <a:latin typeface="Calibri"/>
+                        </a:rPr>
+                        <a:t>NCL</a:t>
+                      </a:r>
+                    </a:p>
+                  </a:txBody>
+                  <a:tcPr marL="54864" marR="54864" marT="27432" marB="27432" anchor="ctr">
+                    <a:solidFill>
+                      <a:srgbClr val="FFFFFF"/>
+                    </a:solidFill>
+                  </a:tcPr>
+                </a:tc>
+                <a:tc>
+                  <a:txBody>
+                    <a:bodyPr wrap="square"/>
+                    <a:lstStyle/>
+                    <a:p>
+                      <a:pPr algn="r"/>
+                      <a:r>
+                        <a:rPr sz="950">
+                          <a:solidFill>
+                            <a:srgbClr val="1F2A37"/>
+                          </a:solidFill>
+                          <a:latin typeface="Calibri"/>
+                        </a:rPr>
+                        <a:t>280</a:t>
+                      </a:r>
+                    </a:p>
+                  </a:txBody>
+                  <a:tcPr marL="54864" marR="54864" marT="27432" marB="27432" anchor="ctr">
+                    <a:solidFill>
+                      <a:srgbClr val="FFFFFF"/>
+                    </a:solidFill>
+                  </a:tcPr>
+                </a:tc>
+                <a:tc>
+                  <a:txBody>
+                    <a:bodyPr wrap="square"/>
+                    <a:lstStyle/>
+                    <a:p>
+                      <a:pPr algn="r"/>
+                      <a:r>
+                        <a:rPr sz="950">
+                          <a:solidFill>
+                            <a:srgbClr val="1F2A37"/>
+                          </a:solidFill>
+                          <a:latin typeface="Calibri"/>
+                        </a:rPr>
+                        <a:t>0.061</a:t>
+                      </a:r>
+                    </a:p>
+                  </a:txBody>
+                  <a:tcPr marL="54864" marR="54864" marT="27432" marB="27432" anchor="ctr">
+                    <a:solidFill>
+                      <a:srgbClr val="FFFFFF"/>
+                    </a:solidFill>
+                  </a:tcPr>
+                </a:tc>
+                <a:tc>
+                  <a:txBody>
+                    <a:bodyPr wrap="square"/>
+                    <a:lstStyle/>
+                    <a:p>
+                      <a:pPr algn="r"/>
+                      <a:r>
+                        <a:rPr sz="950">
+                          <a:solidFill>
+                            <a:srgbClr val="1F2A37"/>
+                          </a:solidFill>
+                          <a:latin typeface="Calibri"/>
+                        </a:rPr>
+                        <a:t>#5</a:t>
+                      </a:r>
+                    </a:p>
+                  </a:txBody>
+                  <a:tcPr marL="54864" marR="54864" marT="27432" marB="27432" anchor="ctr">
+                    <a:solidFill>
+                      <a:srgbClr val="FFFFFF"/>
+                    </a:solidFill>
+                  </a:tcPr>
+                </a:tc>
+                <a:tc>
+                  <a:txBody>
+                    <a:bodyPr wrap="square"/>
+                    <a:lstStyle/>
+                    <a:p>
+                      <a:pPr algn="r"/>
+                      <a:r>
+                        <a:rPr sz="950">
+                          <a:solidFill>
+                            <a:srgbClr val="1F2A37"/>
+                          </a:solidFill>
+                          <a:latin typeface="Calibri"/>
+                        </a:rPr>
+                        <a:t>4</a:t>
+                      </a:r>
+                    </a:p>
+                  </a:txBody>
+                  <a:tcPr marL="54864" marR="54864" marT="27432" marB="27432" anchor="ctr">
+                    <a:solidFill>
+                      <a:srgbClr val="FFFFFF"/>
+                    </a:solidFill>
+                  </a:tcPr>
+                </a:tc>
+              </a:tr>
+              <a:tr h="283464">
+                <a:tc>
+                  <a:txBody>
+                    <a:bodyPr wrap="square"/>
+                    <a:lstStyle/>
+                    <a:p>
+                      <a:pPr algn="l"/>
+                      <a:r>
+                        <a:rPr sz="950">
+                          <a:solidFill>
+                            <a:srgbClr val="1F2A37"/>
+                          </a:solidFill>
+                          <a:latin typeface="Calibri"/>
+                        </a:rPr>
+                        <a:t>4</a:t>
+                      </a:r>
+                    </a:p>
+                  </a:txBody>
+                  <a:tcPr marL="54864" marR="54864" marT="27432" marB="27432" anchor="ctr">
+                    <a:solidFill>
+                      <a:srgbClr val="F2F4F7"/>
+                    </a:solidFill>
+                  </a:tcPr>
+                </a:tc>
+                <a:tc>
+                  <a:txBody>
+                    <a:bodyPr wrap="square"/>
+                    <a:lstStyle/>
+                    <a:p>
+                      <a:pPr algn="l"/>
+                      <a:r>
+                        <a:rPr sz="950">
+                          <a:solidFill>
+                            <a:srgbClr val="1F2A37"/>
+                          </a:solidFill>
+                          <a:latin typeface="Calibri"/>
+                        </a:rPr>
+                        <a:t>Dr. Sunil Misra</a:t>
+                      </a:r>
+                    </a:p>
+                  </a:txBody>
+                  <a:tcPr marL="54864" marR="54864" marT="27432" marB="27432" anchor="ctr">
+                    <a:solidFill>
+                      <a:srgbClr val="F2F4F7"/>
+                    </a:solidFill>
+                  </a:tcPr>
+                </a:tc>
+                <a:tc>
+                  <a:txBody>
+                    <a:bodyPr wrap="square"/>
+                    <a:lstStyle/>
+                    <a:p>
+                      <a:pPr algn="l"/>
+                      <a:r>
+                        <a:rPr sz="950">
+                          <a:solidFill>
+                            <a:srgbClr val="1F2A37"/>
+                          </a:solidFill>
+                          <a:latin typeface="Calibri"/>
+                        </a:rPr>
+                        <a:t>IICT</a:t>
+                      </a:r>
+                    </a:p>
+                  </a:txBody>
+                  <a:tcPr marL="54864" marR="54864" marT="27432" marB="27432" anchor="ctr">
+                    <a:solidFill>
+                      <a:srgbClr val="F2F4F7"/>
+                    </a:solidFill>
+                  </a:tcPr>
+                </a:tc>
+                <a:tc>
+                  <a:txBody>
+                    <a:bodyPr wrap="square"/>
+                    <a:lstStyle/>
+                    <a:p>
+                      <a:pPr algn="r"/>
+                      <a:r>
+                        <a:rPr sz="950">
+                          <a:solidFill>
+                            <a:srgbClr val="1F2A37"/>
+                          </a:solidFill>
+                          <a:latin typeface="Calibri"/>
+                        </a:rPr>
+                        <a:t>198</a:t>
+                      </a:r>
+                    </a:p>
+                  </a:txBody>
+                  <a:tcPr marL="54864" marR="54864" marT="27432" marB="27432" anchor="ctr">
+                    <a:solidFill>
+                      <a:srgbClr val="F2F4F7"/>
+                    </a:solidFill>
+                  </a:tcPr>
+                </a:tc>
+                <a:tc>
+                  <a:txBody>
+                    <a:bodyPr wrap="square"/>
+                    <a:lstStyle/>
+                    <a:p>
+                      <a:pPr algn="r"/>
+                      <a:r>
+                        <a:rPr sz="950">
+                          <a:solidFill>
+                            <a:srgbClr val="1F2A37"/>
+                          </a:solidFill>
+                          <a:latin typeface="Calibri"/>
+                        </a:rPr>
+                        <a:t>0.055</a:t>
+                      </a:r>
+                    </a:p>
+                  </a:txBody>
+                  <a:tcPr marL="54864" marR="54864" marT="27432" marB="27432" anchor="ctr">
+                    <a:solidFill>
+                      <a:srgbClr val="F2F4F7"/>
+                    </a:solidFill>
+                  </a:tcPr>
+                </a:tc>
+                <a:tc>
+                  <a:txBody>
+                    <a:bodyPr wrap="square"/>
+                    <a:lstStyle/>
+                    <a:p>
+                      <a:pPr algn="r"/>
+                      <a:r>
+                        <a:rPr sz="950">
+                          <a:solidFill>
+                            <a:srgbClr val="1F2A37"/>
+                          </a:solidFill>
+                          <a:latin typeface="Calibri"/>
+                        </a:rPr>
+                        <a:t>#7</a:t>
+                      </a:r>
+                    </a:p>
+                  </a:txBody>
+                  <a:tcPr marL="54864" marR="54864" marT="27432" marB="27432" anchor="ctr">
+                    <a:solidFill>
+                      <a:srgbClr val="F2F4F7"/>
+                    </a:solidFill>
+                  </a:tcPr>
+                </a:tc>
+                <a:tc>
+                  <a:txBody>
+                    <a:bodyPr wrap="square"/>
+                    <a:lstStyle/>
+                    <a:p>
+                      <a:pPr algn="r"/>
+                      <a:r>
+                        <a:rPr sz="950">
+                          <a:solidFill>
+                            <a:srgbClr val="1F2A37"/>
+                          </a:solidFill>
+                          <a:latin typeface="Calibri"/>
+                        </a:rPr>
+                        <a:t>8</a:t>
+                      </a:r>
+                    </a:p>
+                  </a:txBody>
+                  <a:tcPr marL="54864" marR="54864" marT="27432" marB="27432" anchor="ctr">
+                    <a:solidFill>
+                      <a:srgbClr val="F2F4F7"/>
+                    </a:solidFill>
+                  </a:tcPr>
+                </a:tc>
+              </a:tr>
+              <a:tr h="283464">
+                <a:tc>
+                  <a:txBody>
+                    <a:bodyPr wrap="square"/>
+                    <a:lstStyle/>
+                    <a:p>
+                      <a:pPr algn="l"/>
+                      <a:r>
+                        <a:rPr sz="950">
+                          <a:solidFill>
+                            <a:srgbClr val="1F2A37"/>
+                          </a:solidFill>
+                          <a:latin typeface="Calibri"/>
+                        </a:rPr>
+                        <a:t>5</a:t>
+                      </a:r>
+                    </a:p>
+                  </a:txBody>
+                  <a:tcPr marL="54864" marR="54864" marT="27432" marB="27432" anchor="ctr">
+                    <a:solidFill>
+                      <a:srgbClr val="FFFFFF"/>
+                    </a:solidFill>
+                  </a:tcPr>
+                </a:tc>
+                <a:tc>
+                  <a:txBody>
+                    <a:bodyPr wrap="square"/>
+                    <a:lstStyle/>
+                    <a:p>
+                      <a:pPr algn="l"/>
+                      <a:r>
+                        <a:rPr sz="950">
+                          <a:solidFill>
+                            <a:srgbClr val="1F2A37"/>
+                          </a:solidFill>
+                          <a:latin typeface="Calibri"/>
+                        </a:rPr>
+                        <a:t>Dr. B.V. Subba Reddy</a:t>
+                      </a:r>
+                    </a:p>
+                  </a:txBody>
+                  <a:tcPr marL="54864" marR="54864" marT="27432" marB="27432" anchor="ctr">
+                    <a:solidFill>
+                      <a:srgbClr val="FFFFFF"/>
+                    </a:solidFill>
+                  </a:tcPr>
+                </a:tc>
+                <a:tc>
+                  <a:txBody>
+                    <a:bodyPr wrap="square"/>
+                    <a:lstStyle/>
+                    <a:p>
+                      <a:pPr algn="l"/>
+                      <a:r>
+                        <a:rPr sz="950">
+                          <a:solidFill>
+                            <a:srgbClr val="1F2A37"/>
+                          </a:solidFill>
+                          <a:latin typeface="Calibri"/>
+                        </a:rPr>
+                        <a:t>IICT</a:t>
+                      </a:r>
+                    </a:p>
+                  </a:txBody>
+                  <a:tcPr marL="54864" marR="54864" marT="27432" marB="27432" anchor="ctr">
+                    <a:solidFill>
+                      <a:srgbClr val="FFFFFF"/>
+                    </a:solidFill>
+                  </a:tcPr>
+                </a:tc>
+                <a:tc>
+                  <a:txBody>
+                    <a:bodyPr wrap="square"/>
+                    <a:lstStyle/>
+                    <a:p>
+                      <a:pPr algn="r"/>
+                      <a:r>
+                        <a:rPr sz="950">
+                          <a:solidFill>
+                            <a:srgbClr val="1F2A37"/>
+                          </a:solidFill>
+                          <a:latin typeface="Calibri"/>
+                        </a:rPr>
+                        <a:t>196</a:t>
+                      </a:r>
+                    </a:p>
+                  </a:txBody>
+                  <a:tcPr marL="54864" marR="54864" marT="27432" marB="27432" anchor="ctr">
+                    <a:solidFill>
+                      <a:srgbClr val="FFFFFF"/>
+                    </a:solidFill>
+                  </a:tcPr>
+                </a:tc>
+                <a:tc>
+                  <a:txBody>
+                    <a:bodyPr wrap="square"/>
+                    <a:lstStyle/>
+                    <a:p>
+                      <a:pPr algn="r"/>
+                      <a:r>
+                        <a:rPr sz="950">
+                          <a:solidFill>
+                            <a:srgbClr val="1F2A37"/>
+                          </a:solidFill>
+                          <a:latin typeface="Calibri"/>
+                        </a:rPr>
+                        <a:t>0.057</a:t>
+                      </a:r>
+                    </a:p>
+                  </a:txBody>
+                  <a:tcPr marL="54864" marR="54864" marT="27432" marB="27432" anchor="ctr">
+                    <a:solidFill>
+                      <a:srgbClr val="FFFFFF"/>
+                    </a:solidFill>
+                  </a:tcPr>
+                </a:tc>
+                <a:tc>
+                  <a:txBody>
+                    <a:bodyPr wrap="square"/>
+                    <a:lstStyle/>
+                    <a:p>
+                      <a:pPr algn="r"/>
+                      <a:r>
+                        <a:rPr sz="950">
+                          <a:solidFill>
+                            <a:srgbClr val="1F2A37"/>
+                          </a:solidFill>
+                          <a:latin typeface="Calibri"/>
+                        </a:rPr>
+                        <a:t>#6</a:t>
+                      </a:r>
+                    </a:p>
+                  </a:txBody>
+                  <a:tcPr marL="54864" marR="54864" marT="27432" marB="27432" anchor="ctr">
+                    <a:solidFill>
+                      <a:srgbClr val="FFFFFF"/>
+                    </a:solidFill>
+                  </a:tcPr>
+                </a:tc>
+                <a:tc>
+                  <a:txBody>
+                    <a:bodyPr wrap="square"/>
+                    <a:lstStyle/>
+                    <a:p>
+                      <a:pPr algn="r"/>
+                      <a:r>
+                        <a:rPr sz="950">
+                          <a:solidFill>
+                            <a:srgbClr val="1F2A37"/>
+                          </a:solidFill>
+                          <a:latin typeface="Calibri"/>
+                        </a:rPr>
+                        <a:t>6</a:t>
+                      </a:r>
+                    </a:p>
+                  </a:txBody>
+                  <a:tcPr marL="54864" marR="54864" marT="27432" marB="27432" anchor="ctr">
+                    <a:solidFill>
+                      <a:srgbClr val="FFFFFF"/>
+                    </a:solidFill>
+                  </a:tcPr>
+                </a:tc>
+              </a:tr>
+              <a:tr h="283464">
+                <a:tc>
+                  <a:txBody>
+                    <a:bodyPr wrap="square"/>
+                    <a:lstStyle/>
+                    <a:p>
+                      <a:pPr algn="l"/>
+                      <a:r>
+                        <a:rPr sz="950">
+                          <a:solidFill>
+                            <a:srgbClr val="1F2A37"/>
+                          </a:solidFill>
+                          <a:latin typeface="Calibri"/>
+                        </a:rPr>
+                        <a:t>6</a:t>
+                      </a:r>
+                    </a:p>
+                  </a:txBody>
+                  <a:tcPr marL="54864" marR="54864" marT="27432" marB="27432" anchor="ctr">
+                    <a:solidFill>
+                      <a:srgbClr val="F2F4F7"/>
+                    </a:solidFill>
+                  </a:tcPr>
+                </a:tc>
+                <a:tc>
+                  <a:txBody>
+                    <a:bodyPr wrap="square"/>
+                    <a:lstStyle/>
+                    <a:p>
+                      <a:pPr algn="l"/>
+                      <a:r>
+                        <a:rPr sz="950">
+                          <a:solidFill>
+                            <a:srgbClr val="1F2A37"/>
+                          </a:solidFill>
+                          <a:latin typeface="Calibri"/>
+                        </a:rPr>
+                        <a:t>Dr. Kumar Vanka</a:t>
+                      </a:r>
+                    </a:p>
+                  </a:txBody>
+                  <a:tcPr marL="54864" marR="54864" marT="27432" marB="27432" anchor="ctr">
+                    <a:solidFill>
+                      <a:srgbClr val="F2F4F7"/>
+                    </a:solidFill>
+                  </a:tcPr>
+                </a:tc>
+                <a:tc>
+                  <a:txBody>
+                    <a:bodyPr wrap="square"/>
+                    <a:lstStyle/>
+                    <a:p>
+                      <a:pPr algn="l"/>
+                      <a:r>
+                        <a:rPr sz="950">
+                          <a:solidFill>
+                            <a:srgbClr val="1F2A37"/>
+                          </a:solidFill>
+                          <a:latin typeface="Calibri"/>
+                        </a:rPr>
+                        <a:t>NCL</a:t>
+                      </a:r>
+                    </a:p>
+                  </a:txBody>
+                  <a:tcPr marL="54864" marR="54864" marT="27432" marB="27432" anchor="ctr">
+                    <a:solidFill>
+                      <a:srgbClr val="F2F4F7"/>
+                    </a:solidFill>
+                  </a:tcPr>
+                </a:tc>
+                <a:tc>
+                  <a:txBody>
+                    <a:bodyPr wrap="square"/>
+                    <a:lstStyle/>
+                    <a:p>
+                      <a:pPr algn="r"/>
+                      <a:r>
+                        <a:rPr sz="950">
+                          <a:solidFill>
+                            <a:srgbClr val="1F2A37"/>
+                          </a:solidFill>
+                          <a:latin typeface="Calibri"/>
+                        </a:rPr>
+                        <a:t>195</a:t>
+                      </a:r>
+                    </a:p>
+                  </a:txBody>
+                  <a:tcPr marL="54864" marR="54864" marT="27432" marB="27432" anchor="ctr">
+                    <a:solidFill>
+                      <a:srgbClr val="F2F4F7"/>
+                    </a:solidFill>
+                  </a:tcPr>
+                </a:tc>
+                <a:tc>
+                  <a:txBody>
+                    <a:bodyPr wrap="square"/>
+                    <a:lstStyle/>
+                    <a:p>
+                      <a:pPr algn="r"/>
+                      <a:r>
+                        <a:rPr sz="950">
+                          <a:solidFill>
+                            <a:srgbClr val="1F2A37"/>
+                          </a:solidFill>
+                          <a:latin typeface="Calibri"/>
+                        </a:rPr>
+                        <a:t>0.044</a:t>
+                      </a:r>
+                    </a:p>
+                  </a:txBody>
+                  <a:tcPr marL="54864" marR="54864" marT="27432" marB="27432" anchor="ctr">
+                    <a:solidFill>
+                      <a:srgbClr val="F2F4F7"/>
+                    </a:solidFill>
+                  </a:tcPr>
+                </a:tc>
+                <a:tc>
+                  <a:txBody>
+                    <a:bodyPr wrap="square"/>
+                    <a:lstStyle/>
+                    <a:p>
+                      <a:pPr algn="r"/>
+                      <a:r>
+                        <a:rPr sz="950">
+                          <a:solidFill>
+                            <a:srgbClr val="1F2A37"/>
+                          </a:solidFill>
+                          <a:latin typeface="Calibri"/>
+                        </a:rPr>
+                        <a:t>#9</a:t>
+                      </a:r>
+                    </a:p>
+                  </a:txBody>
+                  <a:tcPr marL="54864" marR="54864" marT="27432" marB="27432" anchor="ctr">
+                    <a:solidFill>
+                      <a:srgbClr val="F2F4F7"/>
+                    </a:solidFill>
+                  </a:tcPr>
+                </a:tc>
+                <a:tc>
+                  <a:txBody>
+                    <a:bodyPr wrap="square"/>
+                    <a:lstStyle/>
+                    <a:p>
+                      <a:pPr algn="r"/>
+                      <a:r>
+                        <a:rPr sz="950">
+                          <a:solidFill>
+                            <a:srgbClr val="1F2A37"/>
+                          </a:solidFill>
+                          <a:latin typeface="Calibri"/>
+                        </a:rPr>
+                        <a:t>4</a:t>
+                      </a:r>
+                    </a:p>
+                  </a:txBody>
+                  <a:tcPr marL="54864" marR="54864" marT="27432" marB="27432" anchor="ctr">
+                    <a:solidFill>
+                      <a:srgbClr val="F2F4F7"/>
+                    </a:solidFill>
+                  </a:tcPr>
+                </a:tc>
+              </a:tr>
+            </a:tbl>
+          </a:graphicData>
+        </a:graphic>
+      </p:graphicFrame>
+      <p:sp>
+        <p:nvSpPr>
+          <p:cNvPr id="19" name="TextBox 18"/>
+          <p:cNvSpPr txBox="1"/>
+          <p:nvPr/>
+        </p:nvSpPr>
+        <p:spPr>
+          <a:xfrm>
+            <a:off x="6255868" y="4645152"/>
+            <a:ext cx="5432908" cy="1417320"/>
+          </a:xfrm>
+          <a:prstGeom prst="rect">
+            <a:avLst/>
+          </a:prstGeom>
+          <a:noFill/>
+        </p:spPr>
+        <p:txBody>
+          <a:bodyPr wrap="square" anchor="t" lIns="0" rIns="0" tIns="0" bIns="0">
+            <a:spAutoFit/>
+          </a:bodyPr>
+          <a:lstStyle/>
+          <a:p>
+            <a:pPr algn="l">
+              <a:spcAft>
+                <a:spcPts val="200"/>
+              </a:spcAft>
+            </a:pPr>
+            <a:r>
+              <a:rPr sz="1150" b="1">
+                <a:solidFill>
+                  <a:srgbClr val="1F2A37"/>
+                </a:solidFill>
+                <a:latin typeface="Calibri"/>
+              </a:rPr>
+              <a:t>Top Brokers by Betweenness &amp; Indian Partners</a:t>
+            </a:r>
+          </a:p>
+          <a:p>
+            <a:pPr algn="l">
+              <a:spcAft>
+                <a:spcPts val="200"/>
+              </a:spcAft>
+            </a:pPr>
+            <a:r>
+              <a:rPr sz="1000" b="1">
+                <a:solidFill>
+                  <a:srgbClr val="2B5C8F"/>
+                </a:solidFill>
+                <a:latin typeface="Calibri"/>
+              </a:rPr>
+              <a:t>Balasubramanian Sridhar </a:t>
+            </a:r>
+            <a:r>
+              <a:rPr sz="1000" b="0">
+                <a:solidFill>
+                  <a:srgbClr val="1F2A37"/>
+                </a:solidFill>
+                <a:latin typeface="Calibri"/>
+              </a:rPr>
+              <a:t>(IICT) · btw 0.096 · degree 380</a:t>
+            </a:r>
+          </a:p>
+          <a:p>
+            <a:pPr algn="l">
+              <a:spcAft>
+                <a:spcPts val="200"/>
+              </a:spcAft>
+            </a:pPr>
+            <a:r>
+              <a:rPr sz="1000" b="1">
+                <a:solidFill>
+                  <a:srgbClr val="2B5C8F"/>
+                </a:solidFill>
+                <a:latin typeface="Calibri"/>
+              </a:rPr>
+              <a:t>Dr. Jagadeesh Babu Nanu… </a:t>
+            </a:r>
+            <a:r>
+              <a:rPr sz="1000" b="0">
+                <a:solidFill>
+                  <a:srgbClr val="1F2A37"/>
+                </a:solidFill>
+                <a:latin typeface="Calibri"/>
+              </a:rPr>
+              <a:t>(IICT) · btw 0.090 · degree 285</a:t>
+            </a:r>
+          </a:p>
+          <a:p>
+            <a:pPr algn="l">
+              <a:spcAft>
+                <a:spcPts val="200"/>
+              </a:spcAft>
+            </a:pPr>
+            <a:r>
+              <a:rPr sz="1000" b="1">
+                <a:solidFill>
+                  <a:srgbClr val="D95F02"/>
+                </a:solidFill>
+                <a:latin typeface="Calibri"/>
+              </a:rPr>
+              <a:t>Dr Subrata Kundu </a:t>
+            </a:r>
+            <a:r>
+              <a:rPr sz="1000" b="0">
+                <a:solidFill>
+                  <a:srgbClr val="1F2A37"/>
+                </a:solidFill>
+                <a:latin typeface="Calibri"/>
+              </a:rPr>
+              <a:t>(CECRI) · btw 0.072 · degree 137</a:t>
+            </a:r>
+          </a:p>
+          <a:p>
+            <a:pPr algn="l">
+              <a:spcAft>
+                <a:spcPts val="200"/>
+              </a:spcAft>
+            </a:pPr>
+            <a:r>
+              <a:rPr sz="1000" b="1">
+                <a:solidFill>
+                  <a:srgbClr val="1F2A37"/>
+                </a:solidFill>
+                <a:latin typeface="Calibri"/>
+              </a:rPr>
+              <a:t>Top Indian co-authorship partners: </a:t>
+            </a:r>
+            <a:r>
+              <a:rPr sz="1000" b="0">
+                <a:solidFill>
+                  <a:srgbClr val="1F2A37"/>
+                </a:solidFill>
+                <a:latin typeface="Calibri"/>
+              </a:rPr>
+              <a:t>Academy of Scientific and Innovative Rese… (641); Savitribai Phule Pune University (375); Council of Scientific and Industrial Rese… (337)</a:t>
+            </a:r>
+          </a:p>
+        </p:txBody>
+      </p:sp>
+      <p:sp>
+        <p:nvSpPr>
+          <p:cNvPr id="20" name="Source"/>
           <p:cNvSpPr txBox="1"/>
           <p:nvPr/>
         </p:nvSpPr>
@@ -22839,7 +21531,17 @@
                 </a:solidFill>
                 <a:latin typeface="Calibri"/>
               </a:rPr>
-              <a:t>Source: stats/tables/network_summary.csv, network_citation_*.csv, citation_flow_summary.csv · in-degree = citations from other corpus papers; flows count links to DOI-bearing papers</a:t>
+              <a:t>Source: stats/tables/network_summary.csv, network_citation_*.csv, network_authorship_*.csv, citation_flow_summary.csv · interactive graphs: </a:t>
+            </a:r>
+            <a:r>
+              <a:rPr sz="1000">
+                <a:solidFill>
+                  <a:srgbClr val="1F5FA8"/>
+                </a:solidFill>
+                <a:latin typeface="Calibri"/>
+                <a:hlinkClick r:id="rId2"/>
+              </a:rPr>
+              <a:t>https://prathm01s.github.io/dpcn_almost_stable/</a:t>
             </a:r>
           </a:p>
         </p:txBody>
